--- a/content/W01/D2/slides/C2_W01_D02_half1_STUDENT.pptx
+++ b/content/W01/D2/slides/C2_W01_D02_half1_STUDENT.pptx
@@ -3268,7 +3268,7 @@
           <a:noFill/>
         </p:spPr>
         <p:txBody>
-          <a:bodyPr wrap="square" anchor="ctr">
+          <a:bodyPr wrap="square" anchor="ctr" lIns="0" rIns="0" tIns="0" bIns="0">
             <a:spAutoFit/>
           </a:bodyPr>
           <a:lstStyle/>
@@ -3346,7 +3346,7 @@
           <a:noFill/>
         </p:spPr>
         <p:txBody>
-          <a:bodyPr wrap="square" anchor="t">
+          <a:bodyPr wrap="square" anchor="t" lIns="0" rIns="0" tIns="0" bIns="0">
             <a:spAutoFit/>
           </a:bodyPr>
           <a:lstStyle/>
@@ -3429,7 +3429,7 @@
           <a:noFill/>
         </p:spPr>
         <p:txBody>
-          <a:bodyPr wrap="square" anchor="t">
+          <a:bodyPr wrap="square" anchor="t" lIns="0" rIns="0" tIns="0" bIns="0">
             <a:spAutoFit/>
           </a:bodyPr>
           <a:lstStyle/>
@@ -3463,7 +3463,7 @@
           <a:noFill/>
         </p:spPr>
         <p:txBody>
-          <a:bodyPr wrap="square" anchor="t">
+          <a:bodyPr wrap="square" anchor="t" lIns="0" rIns="0" tIns="0" bIns="0">
             <a:spAutoFit/>
           </a:bodyPr>
           <a:lstStyle/>
@@ -3613,7 +3613,7 @@
           <a:noFill/>
         </p:spPr>
         <p:txBody>
-          <a:bodyPr wrap="square" anchor="ctr">
+          <a:bodyPr wrap="square" anchor="ctr" lIns="0" rIns="0" tIns="0" bIns="0">
             <a:spAutoFit/>
           </a:bodyPr>
           <a:lstStyle/>
@@ -3674,9 +3674,48 @@
           </a:p>
         </p:txBody>
       </p:sp>
+      <p:sp>
+        <p:nvSpPr>
+          <p:cNvPr id="6" name="TextBox 5"/>
+          <p:cNvSpPr txBox="1"/>
+          <p:nvPr/>
+        </p:nvSpPr>
+        <p:spPr>
+          <a:xfrm>
+            <a:off x="685800" y="2484696"/>
+            <a:ext cx="10820095" cy="564896"/>
+          </a:xfrm>
+          <a:prstGeom prst="rect">
+            <a:avLst/>
+          </a:prstGeom>
+          <a:noFill/>
+        </p:spPr>
+        <p:txBody>
+          <a:bodyPr wrap="square" anchor="t" lIns="0" rIns="0" tIns="0" bIns="0">
+            <a:spAutoFit/>
+          </a:bodyPr>
+          <a:lstStyle/>
+          <a:p>
+            <a:pPr>
+              <a:spcAft>
+                <a:spcPts val="900"/>
+              </a:spcAft>
+            </a:pPr>
+            <a:r>
+              <a:rPr sz="2000" b="0">
+                <a:solidFill>
+                  <a:srgbClr val="1C1C1A"/>
+                </a:solidFill>
+                <a:latin typeface="Calibri"/>
+              </a:rPr>
+              <a:t>Four parts, and each one has a job you can name.</a:t>
+            </a:r>
+          </a:p>
+        </p:txBody>
+      </p:sp>
       <p:pic>
         <p:nvPicPr>
-          <p:cNvPr id="6" name="Picture 5" descr="77929e025a73aa30.png"/>
+          <p:cNvPr id="7" name="Picture 6" descr="b7859c5b01bc056f.png"/>
           <p:cNvPicPr>
             <a:picLocks noChangeAspect="1"/>
           </p:cNvPicPr>
@@ -3690,7 +3729,7 @@
         </p:blipFill>
         <p:spPr>
           <a:xfrm>
-            <a:off x="685800" y="2876871"/>
+            <a:off x="685800" y="3177608"/>
             <a:ext cx="10820095" cy="962016"/>
           </a:xfrm>
           <a:prstGeom prst="rect">
@@ -3700,14 +3739,14 @@
       </p:pic>
       <p:sp>
         <p:nvSpPr>
-          <p:cNvPr id="7" name="TextBox 6"/>
+          <p:cNvPr id="8" name="TextBox 7"/>
           <p:cNvSpPr txBox="1"/>
           <p:nvPr/>
         </p:nvSpPr>
         <p:spPr>
           <a:xfrm>
-            <a:off x="685800" y="5197856"/>
-            <a:ext cx="10820095" cy="855471"/>
+            <a:off x="685800" y="4285928"/>
+            <a:ext cx="10820095" cy="910336"/>
           </a:xfrm>
           <a:prstGeom prst="rect">
             <a:avLst/>
@@ -3715,11 +3754,16 @@
           <a:noFill/>
         </p:spPr>
         <p:txBody>
-          <a:bodyPr wrap="square" anchor="t">
+          <a:bodyPr wrap="square" anchor="t" lIns="0" rIns="0" tIns="0" bIns="0">
             <a:spAutoFit/>
           </a:bodyPr>
           <a:lstStyle/>
           <a:p>
+            <a:pPr>
+              <a:spcAft>
+                <a:spcPts val="900"/>
+              </a:spcAft>
+            </a:pPr>
             <a:r>
               <a:rPr sz="2000" b="0">
                 <a:solidFill>
@@ -3727,14 +3771,14 @@
                 </a:solidFill>
                 <a:latin typeface="Calibri"/>
               </a:rPr>
-              <a:t>Four parts, and each one has a job you can name. The parameter is the only door in. The return is the only door out. Everything else is inside and is nobody else's business.</a:t>
-            </a:r>
-          </a:p>
-        </p:txBody>
-      </p:sp>
-      <p:sp>
-        <p:nvSpPr>
-          <p:cNvPr id="8" name="Rectangle 7"/>
+              <a:t>The parameter is the only door in. The return is the only door out. Everything else is inside and is nobody else's business.</a:t>
+            </a:r>
+          </a:p>
+        </p:txBody>
+      </p:sp>
+      <p:sp>
+        <p:nvSpPr>
+          <p:cNvPr id="9" name="Rectangle 8"/>
           <p:cNvSpPr/>
           <p:nvPr/>
         </p:nvSpPr>
@@ -3778,7 +3822,7 @@
       </p:sp>
       <p:sp>
         <p:nvSpPr>
-          <p:cNvPr id="9" name="TextBox 8"/>
+          <p:cNvPr id="10" name="TextBox 9"/>
           <p:cNvSpPr txBox="1"/>
           <p:nvPr/>
         </p:nvSpPr>
@@ -3793,7 +3837,7 @@
           <a:noFill/>
         </p:spPr>
         <p:txBody>
-          <a:bodyPr wrap="square" anchor="t">
+          <a:bodyPr wrap="square" anchor="t" lIns="0" rIns="0" tIns="0" bIns="0">
             <a:spAutoFit/>
           </a:bodyPr>
           <a:lstStyle/>
@@ -3812,7 +3856,7 @@
       </p:sp>
       <p:sp>
         <p:nvSpPr>
-          <p:cNvPr id="10" name="TextBox 9"/>
+          <p:cNvPr id="11" name="TextBox 10"/>
           <p:cNvSpPr txBox="1"/>
           <p:nvPr/>
         </p:nvSpPr>
@@ -3827,7 +3871,7 @@
           <a:noFill/>
         </p:spPr>
         <p:txBody>
-          <a:bodyPr wrap="square" anchor="t">
+          <a:bodyPr wrap="square" anchor="t" lIns="0" rIns="0" tIns="0" bIns="0">
             <a:spAutoFit/>
           </a:bodyPr>
           <a:lstStyle/>
@@ -3977,7 +4021,7 @@
           <a:noFill/>
         </p:spPr>
         <p:txBody>
-          <a:bodyPr wrap="square" anchor="ctr">
+          <a:bodyPr wrap="square" anchor="ctr" lIns="0" rIns="0" tIns="0" bIns="0">
             <a:spAutoFit/>
           </a:bodyPr>
           <a:lstStyle/>
@@ -4055,7 +4099,7 @@
           <a:noFill/>
         </p:spPr>
         <p:txBody>
-          <a:bodyPr wrap="square" anchor="t">
+          <a:bodyPr wrap="square" anchor="t" lIns="0" rIns="0" tIns="0" bIns="0">
             <a:spAutoFit/>
           </a:bodyPr>
           <a:lstStyle/>
@@ -4170,7 +4214,7 @@
           <a:noFill/>
         </p:spPr>
         <p:txBody>
-          <a:bodyPr wrap="square" anchor="t">
+          <a:bodyPr wrap="square" anchor="t" lIns="0" rIns="0" tIns="0" bIns="0">
             <a:spAutoFit/>
           </a:bodyPr>
           <a:lstStyle/>
@@ -4204,7 +4248,7 @@
           <a:noFill/>
         </p:spPr>
         <p:txBody>
-          <a:bodyPr wrap="square" anchor="t">
+          <a:bodyPr wrap="square" anchor="t" lIns="0" rIns="0" tIns="0" bIns="0">
             <a:spAutoFit/>
           </a:bodyPr>
           <a:lstStyle/>
@@ -4354,7 +4398,7 @@
           <a:noFill/>
         </p:spPr>
         <p:txBody>
-          <a:bodyPr wrap="square" anchor="ctr">
+          <a:bodyPr wrap="square" anchor="ctr" lIns="0" rIns="0" tIns="0" bIns="0">
             <a:spAutoFit/>
           </a:bodyPr>
           <a:lstStyle/>
@@ -4423,8 +4467,8 @@
         </p:nvSpPr>
         <p:spPr>
           <a:xfrm>
-            <a:off x="685800" y="3330448"/>
-            <a:ext cx="10820095" cy="1020064"/>
+            <a:off x="685800" y="3157728"/>
+            <a:ext cx="10820095" cy="1365504"/>
           </a:xfrm>
           <a:prstGeom prst="rect">
             <a:avLst/>
@@ -4432,7 +4476,7 @@
           <a:noFill/>
         </p:spPr>
         <p:txBody>
-          <a:bodyPr wrap="square" anchor="t">
+          <a:bodyPr wrap="square" anchor="t" lIns="0" rIns="0" tIns="0" bIns="0">
             <a:spAutoFit/>
           </a:bodyPr>
           <a:lstStyle/>
@@ -4531,7 +4575,7 @@
           <a:noFill/>
         </p:spPr>
         <p:txBody>
-          <a:bodyPr wrap="square" anchor="t">
+          <a:bodyPr wrap="square" anchor="t" lIns="0" rIns="0" tIns="0" bIns="0">
             <a:spAutoFit/>
           </a:bodyPr>
           <a:lstStyle/>
@@ -4565,7 +4609,7 @@
           <a:noFill/>
         </p:spPr>
         <p:txBody>
-          <a:bodyPr wrap="square" anchor="t">
+          <a:bodyPr wrap="square" anchor="t" lIns="0" rIns="0" tIns="0" bIns="0">
             <a:spAutoFit/>
           </a:bodyPr>
           <a:lstStyle/>
@@ -4768,7 +4812,7 @@
           <a:noFill/>
         </p:spPr>
         <p:txBody>
-          <a:bodyPr wrap="square" anchor="ctr">
+          <a:bodyPr wrap="square" anchor="ctr" lIns="0" rIns="0" tIns="0" bIns="0">
             <a:spAutoFit/>
           </a:bodyPr>
           <a:lstStyle/>
@@ -4829,9 +4873,48 @@
           </a:p>
         </p:txBody>
       </p:sp>
+      <p:sp>
+        <p:nvSpPr>
+          <p:cNvPr id="7" name="TextBox 6"/>
+          <p:cNvSpPr txBox="1"/>
+          <p:nvPr/>
+        </p:nvSpPr>
+        <p:spPr>
+          <a:xfrm>
+            <a:off x="685800" y="1627632"/>
+            <a:ext cx="10820095" cy="443992"/>
+          </a:xfrm>
+          <a:prstGeom prst="rect">
+            <a:avLst/>
+          </a:prstGeom>
+          <a:noFill/>
+        </p:spPr>
+        <p:txBody>
+          <a:bodyPr wrap="square" anchor="t" lIns="0" rIns="0" tIns="0" bIns="0">
+            <a:spAutoFit/>
+          </a:bodyPr>
+          <a:lstStyle/>
+          <a:p>
+            <a:pPr>
+              <a:spcAft>
+                <a:spcPts val="600"/>
+              </a:spcAft>
+            </a:pPr>
+            <a:r>
+              <a:rPr sz="1300" b="0">
+                <a:solidFill>
+                  <a:srgbClr val="1C1C1A"/>
+                </a:solidFill>
+                <a:latin typeface="Calibri"/>
+              </a:rPr>
+              <a:t>The bench you worked on yesterday is the global bench. A call builds a small second bench, uses it, and throws it away.</a:t>
+            </a:r>
+          </a:p>
+        </p:txBody>
+      </p:sp>
       <p:pic>
         <p:nvPicPr>
-          <p:cNvPr id="7" name="Picture 6" descr="b4fdd4f9f91139cc.png"/>
+          <p:cNvPr id="8" name="Picture 7" descr="6e6f16776caa8a6c.png"/>
           <p:cNvPicPr>
             <a:picLocks noChangeAspect="1"/>
           </p:cNvPicPr>
@@ -4845,7 +4928,7 @@
         </p:blipFill>
         <p:spPr>
           <a:xfrm>
-            <a:off x="685800" y="1669066"/>
+            <a:off x="685800" y="2199640"/>
             <a:ext cx="10820095" cy="2686746"/>
           </a:xfrm>
           <a:prstGeom prst="rect">
@@ -4855,14 +4938,14 @@
       </p:pic>
       <p:sp>
         <p:nvSpPr>
-          <p:cNvPr id="8" name="TextBox 7"/>
+          <p:cNvPr id="9" name="TextBox 8"/>
           <p:cNvSpPr txBox="1"/>
           <p:nvPr/>
         </p:nvSpPr>
         <p:spPr>
           <a:xfrm>
-            <a:off x="685800" y="4506976"/>
-            <a:ext cx="10820095" cy="1546352"/>
+            <a:off x="685800" y="5032690"/>
+            <a:ext cx="10820095" cy="668528"/>
           </a:xfrm>
           <a:prstGeom prst="rect">
             <a:avLst/>
@@ -4870,26 +4953,31 @@
           <a:noFill/>
         </p:spPr>
         <p:txBody>
-          <a:bodyPr wrap="square" anchor="t">
+          <a:bodyPr wrap="square" anchor="t" lIns="0" rIns="0" tIns="0" bIns="0">
             <a:spAutoFit/>
           </a:bodyPr>
           <a:lstStyle/>
           <a:p>
-            <a:r>
-              <a:rPr sz="2000" b="0">
+            <a:pPr>
+              <a:spcAft>
+                <a:spcPts val="600"/>
+              </a:spcAft>
+            </a:pPr>
+            <a:r>
+              <a:rPr sz="1300" b="0">
                 <a:solidFill>
                   <a:srgbClr val="1C1C1A"/>
                 </a:solidFill>
                 <a:latin typeface="Calibri"/>
               </a:rPr>
-              <a:t>The bench you worked on yesterday is the global bench. A call builds a small second bench, uses it, and throws it away. Two names spelled total can hold two different numbers at the same time. The one inside the call disappears when the call ends, and the one outside never noticed.</a:t>
-            </a:r>
-          </a:p>
-        </p:txBody>
-      </p:sp>
-      <p:sp>
-        <p:nvSpPr>
-          <p:cNvPr id="9" name="Rectangle 8"/>
+              <a:t>Two names spelled total can hold two different numbers at the same time. The one inside the call disappears when the call ends, and the one outside never noticed.</a:t>
+            </a:r>
+          </a:p>
+        </p:txBody>
+      </p:sp>
+      <p:sp>
+        <p:nvSpPr>
+          <p:cNvPr id="10" name="Rectangle 9"/>
           <p:cNvSpPr/>
           <p:nvPr/>
         </p:nvSpPr>
@@ -4933,7 +5021,7 @@
       </p:sp>
       <p:sp>
         <p:nvSpPr>
-          <p:cNvPr id="10" name="TextBox 9"/>
+          <p:cNvPr id="11" name="TextBox 10"/>
           <p:cNvSpPr txBox="1"/>
           <p:nvPr/>
         </p:nvSpPr>
@@ -4948,7 +5036,7 @@
           <a:noFill/>
         </p:spPr>
         <p:txBody>
-          <a:bodyPr wrap="square" anchor="t">
+          <a:bodyPr wrap="square" anchor="t" lIns="0" rIns="0" tIns="0" bIns="0">
             <a:spAutoFit/>
           </a:bodyPr>
           <a:lstStyle/>
@@ -4967,7 +5055,7 @@
       </p:sp>
       <p:sp>
         <p:nvSpPr>
-          <p:cNvPr id="11" name="TextBox 10"/>
+          <p:cNvPr id="12" name="TextBox 11"/>
           <p:cNvSpPr txBox="1"/>
           <p:nvPr/>
         </p:nvSpPr>
@@ -4982,7 +5070,7 @@
           <a:noFill/>
         </p:spPr>
         <p:txBody>
-          <a:bodyPr wrap="square" anchor="t">
+          <a:bodyPr wrap="square" anchor="t" lIns="0" rIns="0" tIns="0" bIns="0">
             <a:spAutoFit/>
           </a:bodyPr>
           <a:lstStyle/>
@@ -5185,7 +5273,7 @@
           <a:noFill/>
         </p:spPr>
         <p:txBody>
-          <a:bodyPr wrap="square" anchor="ctr">
+          <a:bodyPr wrap="square" anchor="ctr" lIns="0" rIns="0" tIns="0" bIns="0">
             <a:spAutoFit/>
           </a:bodyPr>
           <a:lstStyle/>
@@ -5255,7 +5343,7 @@
         <p:spPr>
           <a:xfrm>
             <a:off x="685800" y="1627632"/>
-            <a:ext cx="10820095" cy="2151887"/>
+            <a:ext cx="10820095" cy="2023363"/>
           </a:xfrm>
           <a:prstGeom prst="rect">
             <a:avLst/>
@@ -5299,7 +5387,7 @@
         <p:spPr>
           <a:xfrm>
             <a:off x="685800" y="1627632"/>
-            <a:ext cx="50292" cy="2151887"/>
+            <a:ext cx="50292" cy="2023363"/>
           </a:xfrm>
           <a:prstGeom prst="rect">
             <a:avLst/>
@@ -5343,7 +5431,7 @@
         <p:spPr>
           <a:xfrm>
             <a:off x="923544" y="1728216"/>
-            <a:ext cx="10417759" cy="1969007"/>
+            <a:ext cx="10417759" cy="1840483"/>
           </a:xfrm>
           <a:prstGeom prst="rect">
             <a:avLst/>
@@ -5351,7 +5439,7 @@
           <a:noFill/>
         </p:spPr>
         <p:txBody>
-          <a:bodyPr wrap="square" anchor="t">
+          <a:bodyPr wrap="square" anchor="t" lIns="0" rIns="0" tIns="0" bIns="0">
             <a:spAutoFit/>
           </a:bodyPr>
           <a:lstStyle/>
@@ -5362,7 +5450,7 @@
               </a:spcAft>
             </a:pPr>
             <a:r>
-              <a:rPr sz="1600" b="0">
+              <a:rPr sz="1400" b="0">
                 <a:solidFill>
                   <a:srgbClr val="E4ECF7"/>
                 </a:solidFill>
@@ -5385,7 +5473,7 @@
               </a:spcAft>
             </a:pPr>
             <a:r>
-              <a:rPr sz="1600" b="0">
+              <a:rPr sz="1400" b="0">
                 <a:solidFill>
                   <a:srgbClr val="E4ECF7"/>
                 </a:solidFill>
@@ -5401,7 +5489,7 @@
               </a:spcAft>
             </a:pPr>
             <a:r>
-              <a:rPr sz="1600" b="0">
+              <a:rPr sz="1400" b="0">
                 <a:solidFill>
                   <a:srgbClr val="E4ECF7"/>
                 </a:solidFill>
@@ -5417,7 +5505,7 @@
               </a:spcAft>
             </a:pPr>
             <a:r>
-              <a:rPr sz="1600" b="0">
+              <a:rPr sz="1400" b="0">
                 <a:solidFill>
                   <a:srgbClr val="E4ECF7"/>
                 </a:solidFill>
@@ -5440,7 +5528,7 @@
               </a:spcAft>
             </a:pPr>
             <a:r>
-              <a:rPr sz="1600" b="0">
+              <a:rPr sz="1400" b="0">
                 <a:solidFill>
                   <a:srgbClr val="E4ECF7"/>
                 </a:solidFill>
@@ -5459,8 +5547,8 @@
         </p:nvSpPr>
         <p:spPr>
           <a:xfrm>
-            <a:off x="685800" y="3944111"/>
-            <a:ext cx="10820095" cy="542543"/>
+            <a:off x="685800" y="3815587"/>
+            <a:ext cx="10820095" cy="508508"/>
           </a:xfrm>
           <a:prstGeom prst="rect">
             <a:avLst/>
@@ -5503,8 +5591,8 @@
         </p:nvSpPr>
         <p:spPr>
           <a:xfrm>
-            <a:off x="685800" y="3944111"/>
-            <a:ext cx="50292" cy="542543"/>
+            <a:off x="685800" y="3815587"/>
+            <a:ext cx="50292" cy="508508"/>
           </a:xfrm>
           <a:prstGeom prst="rect">
             <a:avLst/>
@@ -5547,8 +5635,8 @@
         </p:nvSpPr>
         <p:spPr>
           <a:xfrm>
-            <a:off x="923544" y="4044695"/>
-            <a:ext cx="10417759" cy="359663"/>
+            <a:off x="923544" y="3916172"/>
+            <a:ext cx="10417759" cy="325628"/>
           </a:xfrm>
           <a:prstGeom prst="rect">
             <a:avLst/>
@@ -5556,7 +5644,7 @@
           <a:noFill/>
         </p:spPr>
         <p:txBody>
-          <a:bodyPr wrap="square" anchor="t">
+          <a:bodyPr wrap="square" anchor="t" lIns="0" rIns="0" tIns="0" bIns="0">
             <a:spAutoFit/>
           </a:bodyPr>
           <a:lstStyle/>
@@ -5567,7 +5655,7 @@
               </a:spcAft>
             </a:pPr>
             <a:r>
-              <a:rPr sz="1600" b="0">
+              <a:rPr sz="1400" b="0">
                 <a:solidFill>
                   <a:srgbClr val="E4ECF7"/>
                 </a:solidFill>
@@ -5586,8 +5674,8 @@
         </p:nvSpPr>
         <p:spPr>
           <a:xfrm>
-            <a:off x="685800" y="4651247"/>
-            <a:ext cx="10820095" cy="1255776"/>
+            <a:off x="685800" y="4488687"/>
+            <a:ext cx="10820095" cy="1100328"/>
           </a:xfrm>
           <a:prstGeom prst="rect">
             <a:avLst/>
@@ -5595,18 +5683,18 @@
           <a:noFill/>
         </p:spPr>
         <p:txBody>
-          <a:bodyPr wrap="square" anchor="t">
+          <a:bodyPr wrap="square" anchor="t" lIns="0" rIns="0" tIns="0" bIns="0">
             <a:spAutoFit/>
           </a:bodyPr>
           <a:lstStyle/>
           <a:p>
             <a:pPr>
               <a:spcAft>
-                <a:spcPts val="900"/>
+                <a:spcPts val="800"/>
               </a:spcAft>
             </a:pPr>
             <a:r>
-              <a:rPr sz="2000" b="0">
+              <a:rPr sz="1700" b="0">
                 <a:solidFill>
                   <a:srgbClr val="1C1C1A"/>
                 </a:solidFill>
@@ -5678,7 +5766,7 @@
           <a:noFill/>
         </p:spPr>
         <p:txBody>
-          <a:bodyPr wrap="square" anchor="t">
+          <a:bodyPr wrap="square" anchor="t" lIns="0" rIns="0" tIns="0" bIns="0">
             <a:spAutoFit/>
           </a:bodyPr>
           <a:lstStyle/>
@@ -5712,7 +5800,7 @@
           <a:noFill/>
         </p:spPr>
         <p:txBody>
-          <a:bodyPr wrap="square" anchor="t">
+          <a:bodyPr wrap="square" anchor="t" lIns="0" rIns="0" tIns="0" bIns="0">
             <a:spAutoFit/>
           </a:bodyPr>
           <a:lstStyle/>
@@ -5862,7 +5950,7 @@
           <a:noFill/>
         </p:spPr>
         <p:txBody>
-          <a:bodyPr wrap="square" anchor="ctr">
+          <a:bodyPr wrap="square" anchor="ctr" lIns="0" rIns="0" tIns="0" bIns="0">
             <a:spAutoFit/>
           </a:bodyPr>
           <a:lstStyle/>
@@ -5940,7 +6028,7 @@
           <a:noFill/>
         </p:spPr>
         <p:txBody>
-          <a:bodyPr wrap="square" anchor="t">
+          <a:bodyPr wrap="square" anchor="t" lIns="0" rIns="0" tIns="0" bIns="0">
             <a:spAutoFit/>
           </a:bodyPr>
           <a:lstStyle/>
@@ -6039,7 +6127,7 @@
           <a:noFill/>
         </p:spPr>
         <p:txBody>
-          <a:bodyPr wrap="square" anchor="t">
+          <a:bodyPr wrap="square" anchor="t" lIns="0" rIns="0" tIns="0" bIns="0">
             <a:spAutoFit/>
           </a:bodyPr>
           <a:lstStyle/>
@@ -6073,7 +6161,7 @@
           <a:noFill/>
         </p:spPr>
         <p:txBody>
-          <a:bodyPr wrap="square" anchor="t">
+          <a:bodyPr wrap="square" anchor="t" lIns="0" rIns="0" tIns="0" bIns="0">
             <a:spAutoFit/>
           </a:bodyPr>
           <a:lstStyle/>
@@ -6223,7 +6311,7 @@
           <a:noFill/>
         </p:spPr>
         <p:txBody>
-          <a:bodyPr wrap="square" anchor="ctr">
+          <a:bodyPr wrap="square" anchor="ctr" lIns="0" rIns="0" tIns="0" bIns="0">
             <a:spAutoFit/>
           </a:bodyPr>
           <a:lstStyle/>
@@ -6292,8 +6380,8 @@
         </p:nvSpPr>
         <p:spPr>
           <a:xfrm>
-            <a:off x="685800" y="2802128"/>
-            <a:ext cx="10820095" cy="1347216"/>
+            <a:off x="685800" y="2770632"/>
+            <a:ext cx="10820095" cy="1410208"/>
           </a:xfrm>
           <a:prstGeom prst="rect">
             <a:avLst/>
@@ -6336,8 +6424,8 @@
         </p:nvSpPr>
         <p:spPr>
           <a:xfrm>
-            <a:off x="685800" y="2802128"/>
-            <a:ext cx="50292" cy="1347216"/>
+            <a:off x="685800" y="2770632"/>
+            <a:ext cx="50292" cy="1410208"/>
           </a:xfrm>
           <a:prstGeom prst="rect">
             <a:avLst/>
@@ -6380,8 +6468,8 @@
         </p:nvSpPr>
         <p:spPr>
           <a:xfrm>
-            <a:off x="923544" y="2902712"/>
-            <a:ext cx="10417759" cy="1164336"/>
+            <a:off x="923544" y="2871216"/>
+            <a:ext cx="10417759" cy="1227328"/>
           </a:xfrm>
           <a:prstGeom prst="rect">
             <a:avLst/>
@@ -6389,7 +6477,7 @@
           <a:noFill/>
         </p:spPr>
         <p:txBody>
-          <a:bodyPr wrap="square" anchor="t">
+          <a:bodyPr wrap="square" anchor="t" lIns="0" rIns="0" tIns="0" bIns="0">
             <a:spAutoFit/>
           </a:bodyPr>
           <a:lstStyle/>
@@ -6458,7 +6546,7 @@
         </p:nvSpPr>
         <p:spPr>
           <a:xfrm>
-            <a:off x="685800" y="4313936"/>
+            <a:off x="685800" y="4345432"/>
             <a:ext cx="10820095" cy="564896"/>
           </a:xfrm>
           <a:prstGeom prst="rect">
@@ -6467,7 +6555,7 @@
           <a:noFill/>
         </p:spPr>
         <p:txBody>
-          <a:bodyPr wrap="square" anchor="t">
+          <a:bodyPr wrap="square" anchor="t" lIns="0" rIns="0" tIns="0" bIns="0">
             <a:spAutoFit/>
           </a:bodyPr>
           <a:lstStyle/>
@@ -6550,7 +6638,7 @@
           <a:noFill/>
         </p:spPr>
         <p:txBody>
-          <a:bodyPr wrap="square" anchor="t">
+          <a:bodyPr wrap="square" anchor="t" lIns="0" rIns="0" tIns="0" bIns="0">
             <a:spAutoFit/>
           </a:bodyPr>
           <a:lstStyle/>
@@ -6584,7 +6672,7 @@
           <a:noFill/>
         </p:spPr>
         <p:txBody>
-          <a:bodyPr wrap="square" anchor="t">
+          <a:bodyPr wrap="square" anchor="t" lIns="0" rIns="0" tIns="0" bIns="0">
             <a:spAutoFit/>
           </a:bodyPr>
           <a:lstStyle/>
@@ -6734,7 +6822,7 @@
           <a:noFill/>
         </p:spPr>
         <p:txBody>
-          <a:bodyPr wrap="square" anchor="ctr">
+          <a:bodyPr wrap="square" anchor="ctr" lIns="0" rIns="0" tIns="0" bIns="0">
             <a:spAutoFit/>
           </a:bodyPr>
           <a:lstStyle/>
@@ -6803,8 +6891,8 @@
         </p:nvSpPr>
         <p:spPr>
           <a:xfrm>
-            <a:off x="685800" y="3031744"/>
-            <a:ext cx="10820095" cy="542543"/>
+            <a:off x="685800" y="3030728"/>
+            <a:ext cx="10820095" cy="544576"/>
           </a:xfrm>
           <a:prstGeom prst="rect">
             <a:avLst/>
@@ -6847,8 +6935,8 @@
         </p:nvSpPr>
         <p:spPr>
           <a:xfrm>
-            <a:off x="685800" y="3031744"/>
-            <a:ext cx="50292" cy="542543"/>
+            <a:off x="685800" y="3030728"/>
+            <a:ext cx="50292" cy="544576"/>
           </a:xfrm>
           <a:prstGeom prst="rect">
             <a:avLst/>
@@ -6891,8 +6979,8 @@
         </p:nvSpPr>
         <p:spPr>
           <a:xfrm>
-            <a:off x="923544" y="3132328"/>
-            <a:ext cx="10417759" cy="359663"/>
+            <a:off x="923544" y="3131312"/>
+            <a:ext cx="10417759" cy="361696"/>
           </a:xfrm>
           <a:prstGeom prst="rect">
             <a:avLst/>
@@ -6900,7 +6988,7 @@
           <a:noFill/>
         </p:spPr>
         <p:txBody>
-          <a:bodyPr wrap="square" anchor="t">
+          <a:bodyPr wrap="square" anchor="t" lIns="0" rIns="0" tIns="0" bIns="0">
             <a:spAutoFit/>
           </a:bodyPr>
           <a:lstStyle/>
@@ -6930,7 +7018,7 @@
         </p:nvSpPr>
         <p:spPr>
           <a:xfrm>
-            <a:off x="685800" y="3738880"/>
+            <a:off x="685800" y="3739896"/>
             <a:ext cx="10820095" cy="910336"/>
           </a:xfrm>
           <a:prstGeom prst="rect">
@@ -6939,7 +7027,7 @@
           <a:noFill/>
         </p:spPr>
         <p:txBody>
-          <a:bodyPr wrap="square" anchor="t">
+          <a:bodyPr wrap="square" anchor="t" lIns="0" rIns="0" tIns="0" bIns="0">
             <a:spAutoFit/>
           </a:bodyPr>
           <a:lstStyle/>
@@ -7022,7 +7110,7 @@
           <a:noFill/>
         </p:spPr>
         <p:txBody>
-          <a:bodyPr wrap="square" anchor="t">
+          <a:bodyPr wrap="square" anchor="t" lIns="0" rIns="0" tIns="0" bIns="0">
             <a:spAutoFit/>
           </a:bodyPr>
           <a:lstStyle/>
@@ -7056,7 +7144,7 @@
           <a:noFill/>
         </p:spPr>
         <p:txBody>
-          <a:bodyPr wrap="square" anchor="t">
+          <a:bodyPr wrap="square" anchor="t" lIns="0" rIns="0" tIns="0" bIns="0">
             <a:spAutoFit/>
           </a:bodyPr>
           <a:lstStyle/>
@@ -7259,7 +7347,7 @@
           <a:noFill/>
         </p:spPr>
         <p:txBody>
-          <a:bodyPr wrap="square" anchor="ctr">
+          <a:bodyPr wrap="square" anchor="ctr" lIns="0" rIns="0" tIns="0" bIns="0">
             <a:spAutoFit/>
           </a:bodyPr>
           <a:lstStyle/>
@@ -7329,7 +7417,7 @@
         <p:spPr>
           <a:xfrm>
             <a:off x="685800" y="1627632"/>
-            <a:ext cx="10820095" cy="2688336"/>
+            <a:ext cx="10820095" cy="2528315"/>
           </a:xfrm>
           <a:prstGeom prst="rect">
             <a:avLst/>
@@ -7373,7 +7461,7 @@
         <p:spPr>
           <a:xfrm>
             <a:off x="685800" y="1627632"/>
-            <a:ext cx="50292" cy="2688336"/>
+            <a:ext cx="50292" cy="2528315"/>
           </a:xfrm>
           <a:prstGeom prst="rect">
             <a:avLst/>
@@ -7417,7 +7505,7 @@
         <p:spPr>
           <a:xfrm>
             <a:off x="923544" y="1728216"/>
-            <a:ext cx="10417759" cy="2505456"/>
+            <a:ext cx="10417759" cy="2345435"/>
           </a:xfrm>
           <a:prstGeom prst="rect">
             <a:avLst/>
@@ -7425,7 +7513,7 @@
           <a:noFill/>
         </p:spPr>
         <p:txBody>
-          <a:bodyPr wrap="square" anchor="t">
+          <a:bodyPr wrap="square" anchor="t" lIns="0" rIns="0" tIns="0" bIns="0">
             <a:spAutoFit/>
           </a:bodyPr>
           <a:lstStyle/>
@@ -7436,7 +7524,7 @@
               </a:spcAft>
             </a:pPr>
             <a:r>
-              <a:rPr sz="1600" b="0">
+              <a:rPr sz="1400" b="0">
                 <a:solidFill>
                   <a:srgbClr val="E4ECF7"/>
                 </a:solidFill>
@@ -7452,7 +7540,7 @@
               </a:spcAft>
             </a:pPr>
             <a:r>
-              <a:rPr sz="1600" b="0">
+              <a:rPr sz="1400" b="0">
                 <a:solidFill>
                   <a:srgbClr val="E4ECF7"/>
                 </a:solidFill>
@@ -7475,7 +7563,7 @@
               </a:spcAft>
             </a:pPr>
             <a:r>
-              <a:rPr sz="1600" b="0">
+              <a:rPr sz="1400" b="0">
                 <a:solidFill>
                   <a:srgbClr val="E4ECF7"/>
                 </a:solidFill>
@@ -7491,7 +7579,7 @@
               </a:spcAft>
             </a:pPr>
             <a:r>
-              <a:rPr sz="1600" b="0">
+              <a:rPr sz="1400" b="0">
                 <a:solidFill>
                   <a:srgbClr val="E4ECF7"/>
                 </a:solidFill>
@@ -7514,7 +7602,7 @@
               </a:spcAft>
             </a:pPr>
             <a:r>
-              <a:rPr sz="1600" b="0">
+              <a:rPr sz="1400" b="0">
                 <a:solidFill>
                   <a:srgbClr val="E4ECF7"/>
                 </a:solidFill>
@@ -7530,7 +7618,7 @@
               </a:spcAft>
             </a:pPr>
             <a:r>
-              <a:rPr sz="1600" b="0">
+              <a:rPr sz="1400" b="0">
                 <a:solidFill>
                   <a:srgbClr val="E4ECF7"/>
                 </a:solidFill>
@@ -7546,7 +7634,7 @@
               </a:spcAft>
             </a:pPr>
             <a:r>
-              <a:rPr sz="1600" b="0">
+              <a:rPr sz="1400" b="0">
                 <a:solidFill>
                   <a:srgbClr val="E4ECF7"/>
                 </a:solidFill>
@@ -7565,8 +7653,8 @@
         </p:nvSpPr>
         <p:spPr>
           <a:xfrm>
-            <a:off x="685800" y="4480559"/>
-            <a:ext cx="10820095" cy="810768"/>
+            <a:off x="685800" y="4320540"/>
+            <a:ext cx="10820095" cy="760984"/>
           </a:xfrm>
           <a:prstGeom prst="rect">
             <a:avLst/>
@@ -7609,8 +7697,8 @@
         </p:nvSpPr>
         <p:spPr>
           <a:xfrm>
-            <a:off x="685800" y="4480559"/>
-            <a:ext cx="50292" cy="810768"/>
+            <a:off x="685800" y="4320540"/>
+            <a:ext cx="50292" cy="760984"/>
           </a:xfrm>
           <a:prstGeom prst="rect">
             <a:avLst/>
@@ -7653,8 +7741,8 @@
         </p:nvSpPr>
         <p:spPr>
           <a:xfrm>
-            <a:off x="923544" y="4581144"/>
-            <a:ext cx="10417759" cy="627888"/>
+            <a:off x="923544" y="4421124"/>
+            <a:ext cx="10417759" cy="578104"/>
           </a:xfrm>
           <a:prstGeom prst="rect">
             <a:avLst/>
@@ -7662,7 +7750,7 @@
           <a:noFill/>
         </p:spPr>
         <p:txBody>
-          <a:bodyPr wrap="square" anchor="t">
+          <a:bodyPr wrap="square" anchor="t" lIns="0" rIns="0" tIns="0" bIns="0">
             <a:spAutoFit/>
           </a:bodyPr>
           <a:lstStyle/>
@@ -7673,7 +7761,7 @@
               </a:spcAft>
             </a:pPr>
             <a:r>
-              <a:rPr sz="1600" b="0">
+              <a:rPr sz="1400" b="0">
                 <a:solidFill>
                   <a:srgbClr val="E4ECF7"/>
                 </a:solidFill>
@@ -7689,7 +7777,7 @@
               </a:spcAft>
             </a:pPr>
             <a:r>
-              <a:rPr sz="1600" b="0">
+              <a:rPr sz="1400" b="0">
                 <a:solidFill>
                   <a:srgbClr val="E4ECF7"/>
                 </a:solidFill>
@@ -7708,8 +7796,8 @@
         </p:nvSpPr>
         <p:spPr>
           <a:xfrm>
-            <a:off x="685800" y="5455919"/>
-            <a:ext cx="10820095" cy="564896"/>
+            <a:off x="685800" y="5246116"/>
+            <a:ext cx="10820095" cy="513080"/>
           </a:xfrm>
           <a:prstGeom prst="rect">
             <a:avLst/>
@@ -7717,18 +7805,18 @@
           <a:noFill/>
         </p:spPr>
         <p:txBody>
-          <a:bodyPr wrap="square" anchor="t">
+          <a:bodyPr wrap="square" anchor="t" lIns="0" rIns="0" tIns="0" bIns="0">
             <a:spAutoFit/>
           </a:bodyPr>
           <a:lstStyle/>
           <a:p>
             <a:pPr>
               <a:spcAft>
-                <a:spcPts val="900"/>
+                <a:spcPts val="800"/>
               </a:spcAft>
             </a:pPr>
             <a:r>
-              <a:rPr sz="2000" b="0">
+              <a:rPr sz="1700" b="0">
                 <a:solidFill>
                   <a:srgbClr val="1C1C1A"/>
                 </a:solidFill>
@@ -7800,7 +7888,7 @@
           <a:noFill/>
         </p:spPr>
         <p:txBody>
-          <a:bodyPr wrap="square" anchor="t">
+          <a:bodyPr wrap="square" anchor="t" lIns="0" rIns="0" tIns="0" bIns="0">
             <a:spAutoFit/>
           </a:bodyPr>
           <a:lstStyle/>
@@ -7834,7 +7922,7 @@
           <a:noFill/>
         </p:spPr>
         <p:txBody>
-          <a:bodyPr wrap="square" anchor="t">
+          <a:bodyPr wrap="square" anchor="t" lIns="0" rIns="0" tIns="0" bIns="0">
             <a:spAutoFit/>
           </a:bodyPr>
           <a:lstStyle/>
@@ -7984,7 +8072,7 @@
           <a:noFill/>
         </p:spPr>
         <p:txBody>
-          <a:bodyPr wrap="square" anchor="ctr">
+          <a:bodyPr wrap="square" anchor="ctr" lIns="0" rIns="0" tIns="0" bIns="0">
             <a:spAutoFit/>
           </a:bodyPr>
           <a:lstStyle/>
@@ -8062,7 +8150,7 @@
           <a:noFill/>
         </p:spPr>
         <p:txBody>
-          <a:bodyPr wrap="square" anchor="t">
+          <a:bodyPr wrap="square" anchor="t" lIns="0" rIns="0" tIns="0" bIns="0">
             <a:spAutoFit/>
           </a:bodyPr>
           <a:lstStyle/>
@@ -8161,7 +8249,7 @@
           <a:noFill/>
         </p:spPr>
         <p:txBody>
-          <a:bodyPr wrap="square" anchor="t">
+          <a:bodyPr wrap="square" anchor="t" lIns="0" rIns="0" tIns="0" bIns="0">
             <a:spAutoFit/>
           </a:bodyPr>
           <a:lstStyle/>
@@ -8195,7 +8283,7 @@
           <a:noFill/>
         </p:spPr>
         <p:txBody>
-          <a:bodyPr wrap="square" anchor="t">
+          <a:bodyPr wrap="square" anchor="t" lIns="0" rIns="0" tIns="0" bIns="0">
             <a:spAutoFit/>
           </a:bodyPr>
           <a:lstStyle/>
@@ -8345,7 +8433,7 @@
           <a:noFill/>
         </p:spPr>
         <p:txBody>
-          <a:bodyPr wrap="square" anchor="ctr">
+          <a:bodyPr wrap="square" anchor="ctr" lIns="0" rIns="0" tIns="0" bIns="0">
             <a:spAutoFit/>
           </a:bodyPr>
           <a:lstStyle/>
@@ -8698,7 +8786,7 @@
           <a:noFill/>
         </p:spPr>
         <p:txBody>
-          <a:bodyPr wrap="square" anchor="t">
+          <a:bodyPr wrap="square" anchor="t" lIns="0" rIns="0" tIns="0" bIns="0">
             <a:spAutoFit/>
           </a:bodyPr>
           <a:lstStyle/>
@@ -8797,7 +8885,7 @@
           <a:noFill/>
         </p:spPr>
         <p:txBody>
-          <a:bodyPr wrap="square" anchor="t">
+          <a:bodyPr wrap="square" anchor="t" lIns="0" rIns="0" tIns="0" bIns="0">
             <a:spAutoFit/>
           </a:bodyPr>
           <a:lstStyle/>
@@ -8831,7 +8919,7 @@
           <a:noFill/>
         </p:spPr>
         <p:txBody>
-          <a:bodyPr wrap="square" anchor="t">
+          <a:bodyPr wrap="square" anchor="t" lIns="0" rIns="0" tIns="0" bIns="0">
             <a:spAutoFit/>
           </a:bodyPr>
           <a:lstStyle/>
@@ -9034,7 +9122,7 @@
           <a:noFill/>
         </p:spPr>
         <p:txBody>
-          <a:bodyPr wrap="square" anchor="ctr">
+          <a:bodyPr wrap="square" anchor="ctr" lIns="0" rIns="0" tIns="0" bIns="0">
             <a:spAutoFit/>
           </a:bodyPr>
           <a:lstStyle/>
@@ -9103,8 +9191,8 @@
         </p:nvSpPr>
         <p:spPr>
           <a:xfrm>
-            <a:off x="685800" y="1921256"/>
-            <a:ext cx="10820095" cy="564896"/>
+            <a:off x="685800" y="1627632"/>
+            <a:ext cx="10820095" cy="910336"/>
           </a:xfrm>
           <a:prstGeom prst="rect">
             <a:avLst/>
@@ -9112,7 +9200,7 @@
           <a:noFill/>
         </p:spPr>
         <p:txBody>
-          <a:bodyPr wrap="square" anchor="t">
+          <a:bodyPr wrap="square" anchor="t" lIns="0" rIns="0" tIns="0" bIns="0">
             <a:spAutoFit/>
           </a:bodyPr>
           <a:lstStyle/>
@@ -9142,8 +9230,8 @@
         </p:nvSpPr>
         <p:spPr>
           <a:xfrm>
-            <a:off x="685800" y="2614168"/>
-            <a:ext cx="10820095" cy="1615440"/>
+            <a:off x="685800" y="2665984"/>
+            <a:ext cx="10820095" cy="1698752"/>
           </a:xfrm>
           <a:prstGeom prst="rect">
             <a:avLst/>
@@ -9186,8 +9274,8 @@
         </p:nvSpPr>
         <p:spPr>
           <a:xfrm>
-            <a:off x="685800" y="2614168"/>
-            <a:ext cx="50292" cy="1615440"/>
+            <a:off x="685800" y="2665984"/>
+            <a:ext cx="50292" cy="1698752"/>
           </a:xfrm>
           <a:prstGeom prst="rect">
             <a:avLst/>
@@ -9230,8 +9318,8 @@
         </p:nvSpPr>
         <p:spPr>
           <a:xfrm>
-            <a:off x="923544" y="2714752"/>
-            <a:ext cx="10417759" cy="1432560"/>
+            <a:off x="923544" y="2766568"/>
+            <a:ext cx="10417759" cy="1515872"/>
           </a:xfrm>
           <a:prstGeom prst="rect">
             <a:avLst/>
@@ -9239,7 +9327,7 @@
           <a:noFill/>
         </p:spPr>
         <p:txBody>
-          <a:bodyPr wrap="square" anchor="t">
+          <a:bodyPr wrap="square" anchor="t" lIns="0" rIns="0" tIns="0" bIns="0">
             <a:spAutoFit/>
           </a:bodyPr>
           <a:lstStyle/>
@@ -9324,7 +9412,7 @@
         </p:nvSpPr>
         <p:spPr>
           <a:xfrm>
-            <a:off x="685800" y="4394200"/>
+            <a:off x="685800" y="4529328"/>
             <a:ext cx="10820095" cy="1365504"/>
           </a:xfrm>
           <a:prstGeom prst="rect">
@@ -9333,7 +9421,7 @@
           <a:noFill/>
         </p:spPr>
         <p:txBody>
-          <a:bodyPr wrap="square" anchor="t">
+          <a:bodyPr wrap="square" anchor="t" lIns="0" rIns="0" tIns="0" bIns="0">
             <a:spAutoFit/>
           </a:bodyPr>
           <a:lstStyle/>
@@ -9432,7 +9520,7 @@
           <a:noFill/>
         </p:spPr>
         <p:txBody>
-          <a:bodyPr wrap="square" anchor="t">
+          <a:bodyPr wrap="square" anchor="t" lIns="0" rIns="0" tIns="0" bIns="0">
             <a:spAutoFit/>
           </a:bodyPr>
           <a:lstStyle/>
@@ -9466,7 +9554,7 @@
           <a:noFill/>
         </p:spPr>
         <p:txBody>
-          <a:bodyPr wrap="square" anchor="t">
+          <a:bodyPr wrap="square" anchor="t" lIns="0" rIns="0" tIns="0" bIns="0">
             <a:spAutoFit/>
           </a:bodyPr>
           <a:lstStyle/>
@@ -9616,7 +9704,7 @@
           <a:noFill/>
         </p:spPr>
         <p:txBody>
-          <a:bodyPr wrap="square" anchor="ctr">
+          <a:bodyPr wrap="square" anchor="ctr" lIns="0" rIns="0" tIns="0" bIns="0">
             <a:spAutoFit/>
           </a:bodyPr>
           <a:lstStyle/>
@@ -9694,7 +9782,7 @@
           <a:noFill/>
         </p:spPr>
         <p:txBody>
-          <a:bodyPr wrap="square" anchor="t">
+          <a:bodyPr wrap="square" anchor="t" lIns="0" rIns="0" tIns="0" bIns="0">
             <a:spAutoFit/>
           </a:bodyPr>
           <a:lstStyle/>
@@ -9728,7 +9816,7 @@
           <a:noFill/>
         </p:spPr>
         <p:txBody>
-          <a:bodyPr wrap="square" anchor="t">
+          <a:bodyPr wrap="square" anchor="t" lIns="0" rIns="0" tIns="0" bIns="0">
             <a:spAutoFit/>
           </a:bodyPr>
           <a:lstStyle/>
@@ -9762,7 +9850,7 @@
           <a:noFill/>
         </p:spPr>
         <p:txBody>
-          <a:bodyPr wrap="square" anchor="t">
+          <a:bodyPr wrap="square" anchor="t" lIns="0" rIns="0" tIns="0" bIns="0">
             <a:spAutoFit/>
           </a:bodyPr>
           <a:lstStyle/>
@@ -9796,7 +9884,7 @@
           <a:noFill/>
         </p:spPr>
         <p:txBody>
-          <a:bodyPr wrap="square" anchor="t">
+          <a:bodyPr wrap="square" anchor="t" lIns="0" rIns="0" tIns="0" bIns="0">
             <a:spAutoFit/>
           </a:bodyPr>
           <a:lstStyle/>
@@ -9830,7 +9918,7 @@
           <a:noFill/>
         </p:spPr>
         <p:txBody>
-          <a:bodyPr wrap="square" anchor="t">
+          <a:bodyPr wrap="square" anchor="t" lIns="0" rIns="0" tIns="0" bIns="0">
             <a:spAutoFit/>
           </a:bodyPr>
           <a:lstStyle/>
@@ -9864,7 +9952,7 @@
           <a:noFill/>
         </p:spPr>
         <p:txBody>
-          <a:bodyPr wrap="square" anchor="t">
+          <a:bodyPr wrap="square" anchor="t" lIns="0" rIns="0" tIns="0" bIns="0">
             <a:spAutoFit/>
           </a:bodyPr>
           <a:lstStyle/>
@@ -9898,7 +9986,7 @@
           <a:noFill/>
         </p:spPr>
         <p:txBody>
-          <a:bodyPr wrap="square" anchor="t">
+          <a:bodyPr wrap="square" anchor="t" lIns="0" rIns="0" tIns="0" bIns="0">
             <a:spAutoFit/>
           </a:bodyPr>
           <a:lstStyle/>
@@ -9932,7 +10020,7 @@
           <a:noFill/>
         </p:spPr>
         <p:txBody>
-          <a:bodyPr wrap="square" anchor="t">
+          <a:bodyPr wrap="square" anchor="t" lIns="0" rIns="0" tIns="0" bIns="0">
             <a:spAutoFit/>
           </a:bodyPr>
           <a:lstStyle/>
@@ -10010,7 +10098,7 @@
           <a:noFill/>
         </p:spPr>
         <p:txBody>
-          <a:bodyPr wrap="square" anchor="t">
+          <a:bodyPr wrap="square" anchor="t" lIns="0" rIns="0" tIns="0" bIns="0">
             <a:spAutoFit/>
           </a:bodyPr>
           <a:lstStyle/>
@@ -10044,7 +10132,7 @@
           <a:noFill/>
         </p:spPr>
         <p:txBody>
-          <a:bodyPr wrap="square" anchor="t">
+          <a:bodyPr wrap="square" anchor="t" lIns="0" rIns="0" tIns="0" bIns="0">
             <a:spAutoFit/>
           </a:bodyPr>
           <a:lstStyle/>
@@ -10141,7 +10229,7 @@
           <a:noFill/>
         </p:spPr>
         <p:txBody>
-          <a:bodyPr wrap="square" anchor="ctr">
+          <a:bodyPr wrap="square" anchor="ctr" lIns="0" rIns="0" tIns="0" bIns="0">
             <a:spAutoFit/>
           </a:bodyPr>
           <a:lstStyle/>
@@ -10485,7 +10573,7 @@
           <a:noFill/>
         </p:spPr>
         <p:txBody>
-          <a:bodyPr wrap="square" anchor="t">
+          <a:bodyPr wrap="square" anchor="t" lIns="0" rIns="0" tIns="0" bIns="0">
             <a:spAutoFit/>
           </a:bodyPr>
           <a:lstStyle/>
@@ -10519,7 +10607,7 @@
           <a:noFill/>
         </p:spPr>
         <p:txBody>
-          <a:bodyPr wrap="square" anchor="t">
+          <a:bodyPr wrap="square" anchor="t" lIns="0" rIns="0" tIns="0" bIns="0">
             <a:spAutoFit/>
           </a:bodyPr>
           <a:lstStyle/>
@@ -10669,7 +10757,7 @@
           <a:noFill/>
         </p:spPr>
         <p:txBody>
-          <a:bodyPr wrap="square" anchor="ctr">
+          <a:bodyPr wrap="square" anchor="ctr" lIns="0" rIns="0" tIns="0" bIns="0">
             <a:spAutoFit/>
           </a:bodyPr>
           <a:lstStyle/>
@@ -10747,7 +10835,7 @@
           <a:noFill/>
         </p:spPr>
         <p:txBody>
-          <a:bodyPr wrap="square" anchor="t">
+          <a:bodyPr wrap="square" anchor="t" lIns="0" rIns="0" tIns="0" bIns="0">
             <a:spAutoFit/>
           </a:bodyPr>
           <a:lstStyle/>
@@ -10830,7 +10918,7 @@
           <a:noFill/>
         </p:spPr>
         <p:txBody>
-          <a:bodyPr wrap="square" anchor="t">
+          <a:bodyPr wrap="square" anchor="t" lIns="0" rIns="0" tIns="0" bIns="0">
             <a:spAutoFit/>
           </a:bodyPr>
           <a:lstStyle/>
@@ -10864,7 +10952,7 @@
           <a:noFill/>
         </p:spPr>
         <p:txBody>
-          <a:bodyPr wrap="square" anchor="t">
+          <a:bodyPr wrap="square" anchor="t" lIns="0" rIns="0" tIns="0" bIns="0">
             <a:spAutoFit/>
           </a:bodyPr>
           <a:lstStyle/>
@@ -11014,7 +11102,7 @@
           <a:noFill/>
         </p:spPr>
         <p:txBody>
-          <a:bodyPr wrap="square" anchor="ctr">
+          <a:bodyPr wrap="square" anchor="ctr" lIns="0" rIns="0" tIns="0" bIns="0">
             <a:spAutoFit/>
           </a:bodyPr>
           <a:lstStyle/>
@@ -11083,8 +11171,8 @@
         </p:nvSpPr>
         <p:spPr>
           <a:xfrm>
-            <a:off x="685800" y="2668016"/>
-            <a:ext cx="10820095" cy="1615440"/>
+            <a:off x="685800" y="2453640"/>
+            <a:ext cx="10820095" cy="1698752"/>
           </a:xfrm>
           <a:prstGeom prst="rect">
             <a:avLst/>
@@ -11127,8 +11215,8 @@
         </p:nvSpPr>
         <p:spPr>
           <a:xfrm>
-            <a:off x="685800" y="2668016"/>
-            <a:ext cx="50292" cy="1615440"/>
+            <a:off x="685800" y="2453640"/>
+            <a:ext cx="50292" cy="1698752"/>
           </a:xfrm>
           <a:prstGeom prst="rect">
             <a:avLst/>
@@ -11171,8 +11259,8 @@
         </p:nvSpPr>
         <p:spPr>
           <a:xfrm>
-            <a:off x="923544" y="2768600"/>
-            <a:ext cx="10417759" cy="1432560"/>
+            <a:off x="923544" y="2554224"/>
+            <a:ext cx="10417759" cy="1515872"/>
           </a:xfrm>
           <a:prstGeom prst="rect">
             <a:avLst/>
@@ -11180,7 +11268,7 @@
           <a:noFill/>
         </p:spPr>
         <p:txBody>
-          <a:bodyPr wrap="square" anchor="t">
+          <a:bodyPr wrap="square" anchor="t" lIns="0" rIns="0" tIns="0" bIns="0">
             <a:spAutoFit/>
           </a:bodyPr>
           <a:lstStyle/>
@@ -11274,8 +11362,8 @@
         </p:nvSpPr>
         <p:spPr>
           <a:xfrm>
-            <a:off x="685800" y="4448048"/>
-            <a:ext cx="10820095" cy="564896"/>
+            <a:off x="685800" y="4316984"/>
+            <a:ext cx="10820095" cy="910336"/>
           </a:xfrm>
           <a:prstGeom prst="rect">
             <a:avLst/>
@@ -11283,7 +11371,7 @@
           <a:noFill/>
         </p:spPr>
         <p:txBody>
-          <a:bodyPr wrap="square" anchor="t">
+          <a:bodyPr wrap="square" anchor="t" lIns="0" rIns="0" tIns="0" bIns="0">
             <a:spAutoFit/>
           </a:bodyPr>
           <a:lstStyle/>
@@ -11366,7 +11454,7 @@
           <a:noFill/>
         </p:spPr>
         <p:txBody>
-          <a:bodyPr wrap="square" anchor="t">
+          <a:bodyPr wrap="square" anchor="t" lIns="0" rIns="0" tIns="0" bIns="0">
             <a:spAutoFit/>
           </a:bodyPr>
           <a:lstStyle/>
@@ -11400,7 +11488,7 @@
           <a:noFill/>
         </p:spPr>
         <p:txBody>
-          <a:bodyPr wrap="square" anchor="t">
+          <a:bodyPr wrap="square" anchor="t" lIns="0" rIns="0" tIns="0" bIns="0">
             <a:spAutoFit/>
           </a:bodyPr>
           <a:lstStyle/>
@@ -11603,7 +11691,7 @@
           <a:noFill/>
         </p:spPr>
         <p:txBody>
-          <a:bodyPr wrap="square" anchor="ctr">
+          <a:bodyPr wrap="square" anchor="ctr" lIns="0" rIns="0" tIns="0" bIns="0">
             <a:spAutoFit/>
           </a:bodyPr>
           <a:lstStyle/>
@@ -11666,7 +11754,7 @@
       </p:sp>
       <p:pic>
         <p:nvPicPr>
-          <p:cNvPr id="7" name="Picture 6" descr="e019850e5adc6b57.png"/>
+          <p:cNvPr id="7" name="Picture 6" descr="6139b7c63362572d.png"/>
           <p:cNvPicPr>
             <a:picLocks noChangeAspect="1"/>
           </p:cNvPicPr>
@@ -11680,8 +11768,8 @@
         </p:blipFill>
         <p:spPr>
           <a:xfrm>
-            <a:off x="1924529" y="1627632"/>
-            <a:ext cx="2175182" cy="4425696"/>
+            <a:off x="5245449" y="1627632"/>
+            <a:ext cx="1700796" cy="3460496"/>
           </a:xfrm>
           <a:prstGeom prst="rect">
             <a:avLst/>
@@ -11696,8 +11784,8 @@
         </p:nvSpPr>
         <p:spPr>
           <a:xfrm>
-            <a:off x="5771244" y="3212592"/>
-            <a:ext cx="5734650" cy="1255776"/>
+            <a:off x="685800" y="5197856"/>
+            <a:ext cx="10820095" cy="855471"/>
           </a:xfrm>
           <a:prstGeom prst="rect">
             <a:avLst/>
@@ -11705,16 +11793,11 @@
           <a:noFill/>
         </p:spPr>
         <p:txBody>
-          <a:bodyPr wrap="square" anchor="t">
+          <a:bodyPr wrap="square" anchor="t" lIns="0" rIns="0" tIns="0" bIns="0">
             <a:spAutoFit/>
           </a:bodyPr>
           <a:lstStyle/>
           <a:p>
-            <a:pPr>
-              <a:spcAft>
-                <a:spcPts val="900"/>
-              </a:spcAft>
-            </a:pPr>
             <a:r>
               <a:rPr sz="2000" b="0">
                 <a:solidFill>
@@ -11788,7 +11871,7 @@
           <a:noFill/>
         </p:spPr>
         <p:txBody>
-          <a:bodyPr wrap="square" anchor="t">
+          <a:bodyPr wrap="square" anchor="t" lIns="0" rIns="0" tIns="0" bIns="0">
             <a:spAutoFit/>
           </a:bodyPr>
           <a:lstStyle/>
@@ -11822,7 +11905,7 @@
           <a:noFill/>
         </p:spPr>
         <p:txBody>
-          <a:bodyPr wrap="square" anchor="t">
+          <a:bodyPr wrap="square" anchor="t" lIns="0" rIns="0" tIns="0" bIns="0">
             <a:spAutoFit/>
           </a:bodyPr>
           <a:lstStyle/>
@@ -11972,7 +12055,7 @@
           <a:noFill/>
         </p:spPr>
         <p:txBody>
-          <a:bodyPr wrap="square" anchor="ctr">
+          <a:bodyPr wrap="square" anchor="ctr" lIns="0" rIns="0" tIns="0" bIns="0">
             <a:spAutoFit/>
           </a:bodyPr>
           <a:lstStyle/>
@@ -12033,9 +12116,252 @@
           </a:p>
         </p:txBody>
       </p:sp>
+      <p:sp>
+        <p:nvSpPr>
+          <p:cNvPr id="6" name="TextBox 5"/>
+          <p:cNvSpPr txBox="1"/>
+          <p:nvPr/>
+        </p:nvSpPr>
+        <p:spPr>
+          <a:xfrm>
+            <a:off x="685800" y="1627632"/>
+            <a:ext cx="457200" cy="386080"/>
+          </a:xfrm>
+          <a:prstGeom prst="rect">
+            <a:avLst/>
+          </a:prstGeom>
+          <a:noFill/>
+        </p:spPr>
+        <p:txBody>
+          <a:bodyPr wrap="square" anchor="t" lIns="0" rIns="0" tIns="0" bIns="0">
+            <a:spAutoFit/>
+          </a:bodyPr>
+          <a:lstStyle/>
+          <a:p>
+            <a:r>
+              <a:rPr sz="1600" b="1">
+                <a:solidFill>
+                  <a:srgbClr val="2B4A7D"/>
+                </a:solidFill>
+                <a:latin typeface="Calibri"/>
+              </a:rPr>
+              <a:t>1</a:t>
+            </a:r>
+          </a:p>
+        </p:txBody>
+      </p:sp>
+      <p:sp>
+        <p:nvSpPr>
+          <p:cNvPr id="7" name="TextBox 6"/>
+          <p:cNvSpPr txBox="1"/>
+          <p:nvPr/>
+        </p:nvSpPr>
+        <p:spPr>
+          <a:xfrm>
+            <a:off x="1143000" y="1627632"/>
+            <a:ext cx="10362895" cy="386080"/>
+          </a:xfrm>
+          <a:prstGeom prst="rect">
+            <a:avLst/>
+          </a:prstGeom>
+          <a:noFill/>
+        </p:spPr>
+        <p:txBody>
+          <a:bodyPr wrap="square" anchor="t" lIns="0" rIns="0" tIns="0" bIns="0">
+            <a:spAutoFit/>
+          </a:bodyPr>
+          <a:lstStyle/>
+          <a:p>
+            <a:r>
+              <a:rPr sz="1600" b="0">
+                <a:solidFill>
+                  <a:srgbClr val="1C1C1A"/>
+                </a:solidFill>
+                <a:latin typeface="Calibri"/>
+              </a:rPr>
+              <a:t>What is the exception type?</a:t>
+            </a:r>
+          </a:p>
+        </p:txBody>
+      </p:sp>
+      <p:sp>
+        <p:nvSpPr>
+          <p:cNvPr id="8" name="TextBox 7"/>
+          <p:cNvSpPr txBox="1"/>
+          <p:nvPr/>
+        </p:nvSpPr>
+        <p:spPr>
+          <a:xfrm>
+            <a:off x="685800" y="2068576"/>
+            <a:ext cx="457200" cy="386080"/>
+          </a:xfrm>
+          <a:prstGeom prst="rect">
+            <a:avLst/>
+          </a:prstGeom>
+          <a:noFill/>
+        </p:spPr>
+        <p:txBody>
+          <a:bodyPr wrap="square" anchor="t" lIns="0" rIns="0" tIns="0" bIns="0">
+            <a:spAutoFit/>
+          </a:bodyPr>
+          <a:lstStyle/>
+          <a:p>
+            <a:r>
+              <a:rPr sz="1600" b="1">
+                <a:solidFill>
+                  <a:srgbClr val="2B4A7D"/>
+                </a:solidFill>
+                <a:latin typeface="Calibri"/>
+              </a:rPr>
+              <a:t>2</a:t>
+            </a:r>
+          </a:p>
+        </p:txBody>
+      </p:sp>
+      <p:sp>
+        <p:nvSpPr>
+          <p:cNvPr id="9" name="TextBox 8"/>
+          <p:cNvSpPr txBox="1"/>
+          <p:nvPr/>
+        </p:nvSpPr>
+        <p:spPr>
+          <a:xfrm>
+            <a:off x="1143000" y="2068576"/>
+            <a:ext cx="10362895" cy="386080"/>
+          </a:xfrm>
+          <a:prstGeom prst="rect">
+            <a:avLst/>
+          </a:prstGeom>
+          <a:noFill/>
+        </p:spPr>
+        <p:txBody>
+          <a:bodyPr wrap="square" anchor="t" lIns="0" rIns="0" tIns="0" bIns="0">
+            <a:spAutoFit/>
+          </a:bodyPr>
+          <a:lstStyle/>
+          <a:p>
+            <a:r>
+              <a:rPr sz="1600" b="0">
+                <a:solidFill>
+                  <a:srgbClr val="1C1C1A"/>
+                </a:solidFill>
+                <a:latin typeface="Calibri"/>
+              </a:rPr>
+              <a:t>Which line is mine?</a:t>
+            </a:r>
+          </a:p>
+        </p:txBody>
+      </p:sp>
+      <p:sp>
+        <p:nvSpPr>
+          <p:cNvPr id="10" name="TextBox 9"/>
+          <p:cNvSpPr txBox="1"/>
+          <p:nvPr/>
+        </p:nvSpPr>
+        <p:spPr>
+          <a:xfrm>
+            <a:off x="685800" y="2509520"/>
+            <a:ext cx="457200" cy="386080"/>
+          </a:xfrm>
+          <a:prstGeom prst="rect">
+            <a:avLst/>
+          </a:prstGeom>
+          <a:noFill/>
+        </p:spPr>
+        <p:txBody>
+          <a:bodyPr wrap="square" anchor="t" lIns="0" rIns="0" tIns="0" bIns="0">
+            <a:spAutoFit/>
+          </a:bodyPr>
+          <a:lstStyle/>
+          <a:p>
+            <a:r>
+              <a:rPr sz="1600" b="1">
+                <a:solidFill>
+                  <a:srgbClr val="2B4A7D"/>
+                </a:solidFill>
+                <a:latin typeface="Calibri"/>
+              </a:rPr>
+              <a:t>3</a:t>
+            </a:r>
+          </a:p>
+        </p:txBody>
+      </p:sp>
+      <p:sp>
+        <p:nvSpPr>
+          <p:cNvPr id="11" name="TextBox 10"/>
+          <p:cNvSpPr txBox="1"/>
+          <p:nvPr/>
+        </p:nvSpPr>
+        <p:spPr>
+          <a:xfrm>
+            <a:off x="1143000" y="2509520"/>
+            <a:ext cx="10362895" cy="386080"/>
+          </a:xfrm>
+          <a:prstGeom prst="rect">
+            <a:avLst/>
+          </a:prstGeom>
+          <a:noFill/>
+        </p:spPr>
+        <p:txBody>
+          <a:bodyPr wrap="square" anchor="t" lIns="0" rIns="0" tIns="0" bIns="0">
+            <a:spAutoFit/>
+          </a:bodyPr>
+          <a:lstStyle/>
+          <a:p>
+            <a:r>
+              <a:rPr sz="1600" b="0">
+                <a:solidFill>
+                  <a:srgbClr val="1C1C1A"/>
+                </a:solidFill>
+                <a:latin typeface="Calibri"/>
+              </a:rPr>
+              <a:t>What value was it holding?</a:t>
+            </a:r>
+          </a:p>
+        </p:txBody>
+      </p:sp>
+      <p:sp>
+        <p:nvSpPr>
+          <p:cNvPr id="12" name="TextBox 11"/>
+          <p:cNvSpPr txBox="1"/>
+          <p:nvPr/>
+        </p:nvSpPr>
+        <p:spPr>
+          <a:xfrm>
+            <a:off x="685800" y="3060192"/>
+            <a:ext cx="10820095" cy="513080"/>
+          </a:xfrm>
+          <a:prstGeom prst="rect">
+            <a:avLst/>
+          </a:prstGeom>
+          <a:noFill/>
+        </p:spPr>
+        <p:txBody>
+          <a:bodyPr wrap="square" anchor="t" lIns="0" rIns="0" tIns="0" bIns="0">
+            <a:spAutoFit/>
+          </a:bodyPr>
+          <a:lstStyle/>
+          <a:p>
+            <a:pPr>
+              <a:spcAft>
+                <a:spcPts val="800"/>
+              </a:spcAft>
+            </a:pPr>
+            <a:r>
+              <a:rPr sz="1700" b="0">
+                <a:solidFill>
+                  <a:srgbClr val="1C1C1A"/>
+                </a:solidFill>
+                <a:latin typeface="Calibri"/>
+              </a:rPr>
+              <a:t>The third question is the one people skip.</a:t>
+            </a:r>
+          </a:p>
+        </p:txBody>
+      </p:sp>
       <p:pic>
         <p:nvPicPr>
-          <p:cNvPr id="6" name="Picture 5" descr="956e16ca8a07cd42.png"/>
+          <p:cNvPr id="13" name="Picture 12" descr="5a04c3bcce1864aa.png"/>
           <p:cNvPicPr>
             <a:picLocks noChangeAspect="1"/>
           </p:cNvPicPr>
@@ -12049,257 +12375,14 @@
         </p:blipFill>
         <p:spPr>
           <a:xfrm>
-            <a:off x="1030332" y="1627632"/>
-            <a:ext cx="3963575" cy="4425696"/>
+            <a:off x="5042624" y="3701287"/>
+            <a:ext cx="2106445" cy="2352040"/>
           </a:xfrm>
           <a:prstGeom prst="rect">
             <a:avLst/>
           </a:prstGeom>
         </p:spPr>
       </p:pic>
-      <p:sp>
-        <p:nvSpPr>
-          <p:cNvPr id="7" name="TextBox 6"/>
-          <p:cNvSpPr txBox="1"/>
-          <p:nvPr/>
-        </p:nvSpPr>
-        <p:spPr>
-          <a:xfrm>
-            <a:off x="5771244" y="2764028"/>
-            <a:ext cx="457200" cy="437896"/>
-          </a:xfrm>
-          <a:prstGeom prst="rect">
-            <a:avLst/>
-          </a:prstGeom>
-          <a:noFill/>
-        </p:spPr>
-        <p:txBody>
-          <a:bodyPr wrap="square" anchor="t">
-            <a:spAutoFit/>
-          </a:bodyPr>
-          <a:lstStyle/>
-          <a:p>
-            <a:r>
-              <a:rPr sz="1900" b="1">
-                <a:solidFill>
-                  <a:srgbClr val="2B4A7D"/>
-                </a:solidFill>
-                <a:latin typeface="Calibri"/>
-              </a:rPr>
-              <a:t>1</a:t>
-            </a:r>
-          </a:p>
-        </p:txBody>
-      </p:sp>
-      <p:sp>
-        <p:nvSpPr>
-          <p:cNvPr id="8" name="TextBox 7"/>
-          <p:cNvSpPr txBox="1"/>
-          <p:nvPr/>
-        </p:nvSpPr>
-        <p:spPr>
-          <a:xfrm>
-            <a:off x="6228444" y="2764028"/>
-            <a:ext cx="5277450" cy="437896"/>
-          </a:xfrm>
-          <a:prstGeom prst="rect">
-            <a:avLst/>
-          </a:prstGeom>
-          <a:noFill/>
-        </p:spPr>
-        <p:txBody>
-          <a:bodyPr wrap="square" anchor="t">
-            <a:spAutoFit/>
-          </a:bodyPr>
-          <a:lstStyle/>
-          <a:p>
-            <a:r>
-              <a:rPr sz="1900" b="0">
-                <a:solidFill>
-                  <a:srgbClr val="1C1C1A"/>
-                </a:solidFill>
-                <a:latin typeface="Calibri"/>
-              </a:rPr>
-              <a:t>What is the exception type?</a:t>
-            </a:r>
-          </a:p>
-        </p:txBody>
-      </p:sp>
-      <p:sp>
-        <p:nvSpPr>
-          <p:cNvPr id="9" name="TextBox 8"/>
-          <p:cNvSpPr txBox="1"/>
-          <p:nvPr/>
-        </p:nvSpPr>
-        <p:spPr>
-          <a:xfrm>
-            <a:off x="5771244" y="3256788"/>
-            <a:ext cx="457200" cy="437896"/>
-          </a:xfrm>
-          <a:prstGeom prst="rect">
-            <a:avLst/>
-          </a:prstGeom>
-          <a:noFill/>
-        </p:spPr>
-        <p:txBody>
-          <a:bodyPr wrap="square" anchor="t">
-            <a:spAutoFit/>
-          </a:bodyPr>
-          <a:lstStyle/>
-          <a:p>
-            <a:r>
-              <a:rPr sz="1900" b="1">
-                <a:solidFill>
-                  <a:srgbClr val="2B4A7D"/>
-                </a:solidFill>
-                <a:latin typeface="Calibri"/>
-              </a:rPr>
-              <a:t>2</a:t>
-            </a:r>
-          </a:p>
-        </p:txBody>
-      </p:sp>
-      <p:sp>
-        <p:nvSpPr>
-          <p:cNvPr id="10" name="TextBox 9"/>
-          <p:cNvSpPr txBox="1"/>
-          <p:nvPr/>
-        </p:nvSpPr>
-        <p:spPr>
-          <a:xfrm>
-            <a:off x="6228444" y="3256788"/>
-            <a:ext cx="5277450" cy="437896"/>
-          </a:xfrm>
-          <a:prstGeom prst="rect">
-            <a:avLst/>
-          </a:prstGeom>
-          <a:noFill/>
-        </p:spPr>
-        <p:txBody>
-          <a:bodyPr wrap="square" anchor="t">
-            <a:spAutoFit/>
-          </a:bodyPr>
-          <a:lstStyle/>
-          <a:p>
-            <a:r>
-              <a:rPr sz="1900" b="0">
-                <a:solidFill>
-                  <a:srgbClr val="1C1C1A"/>
-                </a:solidFill>
-                <a:latin typeface="Calibri"/>
-              </a:rPr>
-              <a:t>Which line is mine?</a:t>
-            </a:r>
-          </a:p>
-        </p:txBody>
-      </p:sp>
-      <p:sp>
-        <p:nvSpPr>
-          <p:cNvPr id="11" name="TextBox 10"/>
-          <p:cNvSpPr txBox="1"/>
-          <p:nvPr/>
-        </p:nvSpPr>
-        <p:spPr>
-          <a:xfrm>
-            <a:off x="5771244" y="3749548"/>
-            <a:ext cx="457200" cy="437896"/>
-          </a:xfrm>
-          <a:prstGeom prst="rect">
-            <a:avLst/>
-          </a:prstGeom>
-          <a:noFill/>
-        </p:spPr>
-        <p:txBody>
-          <a:bodyPr wrap="square" anchor="t">
-            <a:spAutoFit/>
-          </a:bodyPr>
-          <a:lstStyle/>
-          <a:p>
-            <a:r>
-              <a:rPr sz="1900" b="1">
-                <a:solidFill>
-                  <a:srgbClr val="2B4A7D"/>
-                </a:solidFill>
-                <a:latin typeface="Calibri"/>
-              </a:rPr>
-              <a:t>3</a:t>
-            </a:r>
-          </a:p>
-        </p:txBody>
-      </p:sp>
-      <p:sp>
-        <p:nvSpPr>
-          <p:cNvPr id="12" name="TextBox 11"/>
-          <p:cNvSpPr txBox="1"/>
-          <p:nvPr/>
-        </p:nvSpPr>
-        <p:spPr>
-          <a:xfrm>
-            <a:off x="6228444" y="3749548"/>
-            <a:ext cx="5277450" cy="437896"/>
-          </a:xfrm>
-          <a:prstGeom prst="rect">
-            <a:avLst/>
-          </a:prstGeom>
-          <a:noFill/>
-        </p:spPr>
-        <p:txBody>
-          <a:bodyPr wrap="square" anchor="t">
-            <a:spAutoFit/>
-          </a:bodyPr>
-          <a:lstStyle/>
-          <a:p>
-            <a:r>
-              <a:rPr sz="1900" b="0">
-                <a:solidFill>
-                  <a:srgbClr val="1C1C1A"/>
-                </a:solidFill>
-                <a:latin typeface="Calibri"/>
-              </a:rPr>
-              <a:t>What value was it holding?</a:t>
-            </a:r>
-          </a:p>
-        </p:txBody>
-      </p:sp>
-      <p:sp>
-        <p:nvSpPr>
-          <p:cNvPr id="13" name="TextBox 12"/>
-          <p:cNvSpPr txBox="1"/>
-          <p:nvPr/>
-        </p:nvSpPr>
-        <p:spPr>
-          <a:xfrm>
-            <a:off x="5771244" y="4352036"/>
-            <a:ext cx="5734650" cy="564896"/>
-          </a:xfrm>
-          <a:prstGeom prst="rect">
-            <a:avLst/>
-          </a:prstGeom>
-          <a:noFill/>
-        </p:spPr>
-        <p:txBody>
-          <a:bodyPr wrap="square" anchor="t">
-            <a:spAutoFit/>
-          </a:bodyPr>
-          <a:lstStyle/>
-          <a:p>
-            <a:pPr>
-              <a:spcAft>
-                <a:spcPts val="900"/>
-              </a:spcAft>
-            </a:pPr>
-            <a:r>
-              <a:rPr sz="2000" b="0">
-                <a:solidFill>
-                  <a:srgbClr val="1C1C1A"/>
-                </a:solidFill>
-                <a:latin typeface="Calibri"/>
-              </a:rPr>
-              <a:t>The third question is the one people skip.</a:t>
-            </a:r>
-          </a:p>
-        </p:txBody>
-      </p:sp>
       <p:sp>
         <p:nvSpPr>
           <p:cNvPr id="14" name="Rectangle 13"/>
@@ -12361,7 +12444,7 @@
           <a:noFill/>
         </p:spPr>
         <p:txBody>
-          <a:bodyPr wrap="square" anchor="t">
+          <a:bodyPr wrap="square" anchor="t" lIns="0" rIns="0" tIns="0" bIns="0">
             <a:spAutoFit/>
           </a:bodyPr>
           <a:lstStyle/>
@@ -12395,7 +12478,7 @@
           <a:noFill/>
         </p:spPr>
         <p:txBody>
-          <a:bodyPr wrap="square" anchor="t">
+          <a:bodyPr wrap="square" anchor="t" lIns="0" rIns="0" tIns="0" bIns="0">
             <a:spAutoFit/>
           </a:bodyPr>
           <a:lstStyle/>
@@ -12598,7 +12681,7 @@
           <a:noFill/>
         </p:spPr>
         <p:txBody>
-          <a:bodyPr wrap="square" anchor="ctr">
+          <a:bodyPr wrap="square" anchor="ctr" lIns="0" rIns="0" tIns="0" bIns="0">
             <a:spAutoFit/>
           </a:bodyPr>
           <a:lstStyle/>
@@ -12661,7 +12744,7 @@
       </p:sp>
       <p:pic>
         <p:nvPicPr>
-          <p:cNvPr id="7" name="Picture 6" descr="c06bf1039def8eb0.png"/>
+          <p:cNvPr id="7" name="Picture 6" descr="b85393a6995c30bc.png"/>
           <p:cNvPicPr>
             <a:picLocks noChangeAspect="1"/>
           </p:cNvPicPr>
@@ -12675,8 +12758,8 @@
         </p:blipFill>
         <p:spPr>
           <a:xfrm>
-            <a:off x="1215221" y="1627632"/>
-            <a:ext cx="3593798" cy="4425696"/>
+            <a:off x="5111595" y="1627632"/>
+            <a:ext cx="1968503" cy="2424175"/>
           </a:xfrm>
           <a:prstGeom prst="rect">
             <a:avLst/>
@@ -12691,8 +12774,8 @@
         </p:nvSpPr>
         <p:spPr>
           <a:xfrm>
-            <a:off x="5771244" y="2002536"/>
-            <a:ext cx="5734650" cy="1946656"/>
+            <a:off x="685800" y="4161536"/>
+            <a:ext cx="10820095" cy="1891792"/>
           </a:xfrm>
           <a:prstGeom prst="rect">
             <a:avLst/>
@@ -12700,16 +12783,11 @@
           <a:noFill/>
         </p:spPr>
         <p:txBody>
-          <a:bodyPr wrap="square" anchor="t">
+          <a:bodyPr wrap="square" anchor="t" lIns="0" rIns="0" tIns="0" bIns="0">
             <a:spAutoFit/>
           </a:bodyPr>
           <a:lstStyle/>
           <a:p>
-            <a:pPr>
-              <a:spcAft>
-                <a:spcPts val="900"/>
-              </a:spcAft>
-            </a:pPr>
             <a:r>
               <a:rPr sz="2000" b="0">
                 <a:solidFill>
@@ -12717,53 +12795,14 @@
                 </a:solidFill>
                 <a:latin typeface="Calibri"/>
               </a:rPr>
-              <a:t>When one function calls another, each call is pushed onto a stack. The traceback prints the stack from the outside in, so the last frame printed is the innermost call, which is where the failure actually happened.</a:t>
-            </a:r>
-          </a:p>
-        </p:txBody>
-      </p:sp>
-      <p:sp>
-        <p:nvSpPr>
-          <p:cNvPr id="9" name="TextBox 8"/>
-          <p:cNvSpPr txBox="1"/>
-          <p:nvPr/>
-        </p:nvSpPr>
-        <p:spPr>
-          <a:xfrm>
-            <a:off x="5771244" y="4077207"/>
-            <a:ext cx="5734650" cy="1601216"/>
-          </a:xfrm>
-          <a:prstGeom prst="rect">
-            <a:avLst/>
-          </a:prstGeom>
-          <a:noFill/>
-        </p:spPr>
-        <p:txBody>
-          <a:bodyPr wrap="square" anchor="t">
-            <a:spAutoFit/>
-          </a:bodyPr>
-          <a:lstStyle/>
-          <a:p>
-            <a:pPr>
-              <a:spcAft>
-                <a:spcPts val="900"/>
-              </a:spcAft>
-            </a:pPr>
-            <a:r>
-              <a:rPr sz="2000" b="0">
-                <a:solidFill>
-                  <a:srgbClr val="1C1C1A"/>
-                </a:solidFill>
-                <a:latin typeface="Calibri"/>
-              </a:rPr>
-              <a:t>In a long traceback, the deepest frame is almost always library code you did not write. Scan upward until you reach the first line that lives in your own file, and start there.</a:t>
-            </a:r>
-          </a:p>
-        </p:txBody>
-      </p:sp>
-      <p:sp>
-        <p:nvSpPr>
-          <p:cNvPr id="10" name="Rectangle 9"/>
+              <a:t>When one function calls another, each call is pushed onto a stack. The traceback prints the stack from the outside in, so the last frame printed is the innermost call, which is where the failure actually happened. In a long traceback, the deepest frame is almost always library code you did not write. Scan upward until you reach the first line that lives in your own file, and start there.</a:t>
+            </a:r>
+          </a:p>
+        </p:txBody>
+      </p:sp>
+      <p:sp>
+        <p:nvSpPr>
+          <p:cNvPr id="9" name="Rectangle 8"/>
           <p:cNvSpPr/>
           <p:nvPr/>
         </p:nvSpPr>
@@ -12807,46 +12846,46 @@
       </p:sp>
       <p:sp>
         <p:nvSpPr>
+          <p:cNvPr id="10" name="TextBox 9"/>
+          <p:cNvSpPr txBox="1"/>
+          <p:nvPr/>
+        </p:nvSpPr>
+        <p:spPr>
+          <a:xfrm>
+            <a:off x="685800" y="6391656"/>
+            <a:ext cx="9722815" cy="292608"/>
+          </a:xfrm>
+          <a:prstGeom prst="rect">
+            <a:avLst/>
+          </a:prstGeom>
+          <a:noFill/>
+        </p:spPr>
+        <p:txBody>
+          <a:bodyPr wrap="square" anchor="t" lIns="0" rIns="0" tIns="0" bIns="0">
+            <a:spAutoFit/>
+          </a:bodyPr>
+          <a:lstStyle/>
+          <a:p>
+            <a:r>
+              <a:rPr sz="1000">
+                <a:solidFill>
+                  <a:srgbClr val="5F6360"/>
+                </a:solidFill>
+                <a:latin typeface="Calibri"/>
+              </a:rPr>
+              <a:t>Week 1, Day 2. Half one: package the logic, survive bad data</a:t>
+            </a:r>
+          </a:p>
+        </p:txBody>
+      </p:sp>
+      <p:sp>
+        <p:nvSpPr>
           <p:cNvPr id="11" name="TextBox 10"/>
           <p:cNvSpPr txBox="1"/>
           <p:nvPr/>
         </p:nvSpPr>
         <p:spPr>
           <a:xfrm>
-            <a:off x="685800" y="6391656"/>
-            <a:ext cx="9722815" cy="292608"/>
-          </a:xfrm>
-          <a:prstGeom prst="rect">
-            <a:avLst/>
-          </a:prstGeom>
-          <a:noFill/>
-        </p:spPr>
-        <p:txBody>
-          <a:bodyPr wrap="square" anchor="t">
-            <a:spAutoFit/>
-          </a:bodyPr>
-          <a:lstStyle/>
-          <a:p>
-            <a:r>
-              <a:rPr sz="1000">
-                <a:solidFill>
-                  <a:srgbClr val="5F6360"/>
-                </a:solidFill>
-                <a:latin typeface="Calibri"/>
-              </a:rPr>
-              <a:t>Week 1, Day 2. Half one: package the logic, survive bad data</a:t>
-            </a:r>
-          </a:p>
-        </p:txBody>
-      </p:sp>
-      <p:sp>
-        <p:nvSpPr>
-          <p:cNvPr id="12" name="TextBox 11"/>
-          <p:cNvSpPr txBox="1"/>
-          <p:nvPr/>
-        </p:nvSpPr>
-        <p:spPr>
-          <a:xfrm>
             <a:off x="10408615" y="6391656"/>
             <a:ext cx="1097280" cy="292608"/>
           </a:xfrm>
@@ -12856,7 +12895,7 @@
           <a:noFill/>
         </p:spPr>
         <p:txBody>
-          <a:bodyPr wrap="square" anchor="t">
+          <a:bodyPr wrap="square" anchor="t" lIns="0" rIns="0" tIns="0" bIns="0">
             <a:spAutoFit/>
           </a:bodyPr>
           <a:lstStyle/>
@@ -13006,7 +13045,7 @@
           <a:noFill/>
         </p:spPr>
         <p:txBody>
-          <a:bodyPr wrap="square" anchor="ctr">
+          <a:bodyPr wrap="square" anchor="ctr" lIns="0" rIns="0" tIns="0" bIns="0">
             <a:spAutoFit/>
           </a:bodyPr>
           <a:lstStyle/>
@@ -13075,8 +13114,8 @@
         </p:nvSpPr>
         <p:spPr>
           <a:xfrm>
-            <a:off x="685800" y="2629408"/>
-            <a:ext cx="10820095" cy="1347216"/>
+            <a:off x="685800" y="2597912"/>
+            <a:ext cx="10820095" cy="1410208"/>
           </a:xfrm>
           <a:prstGeom prst="rect">
             <a:avLst/>
@@ -13119,8 +13158,8 @@
         </p:nvSpPr>
         <p:spPr>
           <a:xfrm>
-            <a:off x="685800" y="2629408"/>
-            <a:ext cx="50292" cy="1347216"/>
+            <a:off x="685800" y="2597912"/>
+            <a:ext cx="50292" cy="1410208"/>
           </a:xfrm>
           <a:prstGeom prst="rect">
             <a:avLst/>
@@ -13163,8 +13202,8 @@
         </p:nvSpPr>
         <p:spPr>
           <a:xfrm>
-            <a:off x="923544" y="2729992"/>
-            <a:ext cx="10417759" cy="1164336"/>
+            <a:off x="923544" y="2698496"/>
+            <a:ext cx="10417759" cy="1227328"/>
           </a:xfrm>
           <a:prstGeom prst="rect">
             <a:avLst/>
@@ -13172,7 +13211,7 @@
           <a:noFill/>
         </p:spPr>
         <p:txBody>
-          <a:bodyPr wrap="square" anchor="t">
+          <a:bodyPr wrap="square" anchor="t" lIns="0" rIns="0" tIns="0" bIns="0">
             <a:spAutoFit/>
           </a:bodyPr>
           <a:lstStyle/>
@@ -13250,7 +13289,7 @@
         </p:nvSpPr>
         <p:spPr>
           <a:xfrm>
-            <a:off x="685800" y="4141216"/>
+            <a:off x="685800" y="4172712"/>
             <a:ext cx="10820095" cy="910336"/>
           </a:xfrm>
           <a:prstGeom prst="rect">
@@ -13259,7 +13298,7 @@
           <a:noFill/>
         </p:spPr>
         <p:txBody>
-          <a:bodyPr wrap="square" anchor="t">
+          <a:bodyPr wrap="square" anchor="t" lIns="0" rIns="0" tIns="0" bIns="0">
             <a:spAutoFit/>
           </a:bodyPr>
           <a:lstStyle/>
@@ -13342,7 +13381,7 @@
           <a:noFill/>
         </p:spPr>
         <p:txBody>
-          <a:bodyPr wrap="square" anchor="t">
+          <a:bodyPr wrap="square" anchor="t" lIns="0" rIns="0" tIns="0" bIns="0">
             <a:spAutoFit/>
           </a:bodyPr>
           <a:lstStyle/>
@@ -13376,7 +13415,7 @@
           <a:noFill/>
         </p:spPr>
         <p:txBody>
-          <a:bodyPr wrap="square" anchor="t">
+          <a:bodyPr wrap="square" anchor="t" lIns="0" rIns="0" tIns="0" bIns="0">
             <a:spAutoFit/>
           </a:bodyPr>
           <a:lstStyle/>
@@ -13526,7 +13565,7 @@
           <a:noFill/>
         </p:spPr>
         <p:txBody>
-          <a:bodyPr wrap="square" anchor="ctr">
+          <a:bodyPr wrap="square" anchor="ctr" lIns="0" rIns="0" tIns="0" bIns="0">
             <a:spAutoFit/>
           </a:bodyPr>
           <a:lstStyle/>
@@ -13589,7 +13628,7 @@
       </p:sp>
       <p:pic>
         <p:nvPicPr>
-          <p:cNvPr id="6" name="Picture 5" descr="578f1ec305906fc0.png"/>
+          <p:cNvPr id="6" name="Picture 5" descr="4ca885a2fb70fe81.png"/>
           <p:cNvPicPr>
             <a:picLocks noChangeAspect="1"/>
           </p:cNvPicPr>
@@ -13628,7 +13667,7 @@
           <a:noFill/>
         </p:spPr>
         <p:txBody>
-          <a:bodyPr wrap="square" anchor="t">
+          <a:bodyPr wrap="square" anchor="t" lIns="0" rIns="0" tIns="0" bIns="0">
             <a:spAutoFit/>
           </a:bodyPr>
           <a:lstStyle/>
@@ -13711,7 +13750,7 @@
           <a:noFill/>
         </p:spPr>
         <p:txBody>
-          <a:bodyPr wrap="square" anchor="t">
+          <a:bodyPr wrap="square" anchor="t" lIns="0" rIns="0" tIns="0" bIns="0">
             <a:spAutoFit/>
           </a:bodyPr>
           <a:lstStyle/>
@@ -13745,7 +13784,7 @@
           <a:noFill/>
         </p:spPr>
         <p:txBody>
-          <a:bodyPr wrap="square" anchor="t">
+          <a:bodyPr wrap="square" anchor="t" lIns="0" rIns="0" tIns="0" bIns="0">
             <a:spAutoFit/>
           </a:bodyPr>
           <a:lstStyle/>
@@ -13895,7 +13934,7 @@
           <a:noFill/>
         </p:spPr>
         <p:txBody>
-          <a:bodyPr wrap="square" anchor="ctr">
+          <a:bodyPr wrap="square" anchor="ctr" lIns="0" rIns="0" tIns="0" bIns="0">
             <a:spAutoFit/>
           </a:bodyPr>
           <a:lstStyle/>
@@ -13964,7 +14003,7 @@
         </p:nvSpPr>
         <p:spPr>
           <a:xfrm>
-            <a:off x="685800" y="2362200"/>
+            <a:off x="685800" y="2340864"/>
             <a:ext cx="10820095" cy="564896"/>
           </a:xfrm>
           <a:prstGeom prst="rect">
@@ -13973,7 +14012,7 @@
           <a:noFill/>
         </p:spPr>
         <p:txBody>
-          <a:bodyPr wrap="square" anchor="t">
+          <a:bodyPr wrap="square" anchor="t" lIns="0" rIns="0" tIns="0" bIns="0">
             <a:spAutoFit/>
           </a:bodyPr>
           <a:lstStyle/>
@@ -14003,8 +14042,8 @@
         </p:nvSpPr>
         <p:spPr>
           <a:xfrm>
-            <a:off x="685800" y="3055112"/>
-            <a:ext cx="10820095" cy="1078992"/>
+            <a:off x="685800" y="3033776"/>
+            <a:ext cx="10820095" cy="1121664"/>
           </a:xfrm>
           <a:prstGeom prst="rect">
             <a:avLst/>
@@ -14047,8 +14086,8 @@
         </p:nvSpPr>
         <p:spPr>
           <a:xfrm>
-            <a:off x="685800" y="3055112"/>
-            <a:ext cx="50292" cy="1078992"/>
+            <a:off x="685800" y="3033776"/>
+            <a:ext cx="50292" cy="1121664"/>
           </a:xfrm>
           <a:prstGeom prst="rect">
             <a:avLst/>
@@ -14091,8 +14130,8 @@
         </p:nvSpPr>
         <p:spPr>
           <a:xfrm>
-            <a:off x="923544" y="3155696"/>
-            <a:ext cx="10417759" cy="896112"/>
+            <a:off x="923544" y="3134360"/>
+            <a:ext cx="10417759" cy="938784"/>
           </a:xfrm>
           <a:prstGeom prst="rect">
             <a:avLst/>
@@ -14100,7 +14139,7 @@
           <a:noFill/>
         </p:spPr>
         <p:txBody>
-          <a:bodyPr wrap="square" anchor="t">
+          <a:bodyPr wrap="square" anchor="t" lIns="0" rIns="0" tIns="0" bIns="0">
             <a:spAutoFit/>
           </a:bodyPr>
           <a:lstStyle/>
@@ -14162,7 +14201,7 @@
         </p:nvSpPr>
         <p:spPr>
           <a:xfrm>
-            <a:off x="685800" y="4298696"/>
+            <a:off x="685800" y="4320032"/>
             <a:ext cx="10820095" cy="1020064"/>
           </a:xfrm>
           <a:prstGeom prst="rect">
@@ -14171,7 +14210,7 @@
           <a:noFill/>
         </p:spPr>
         <p:txBody>
-          <a:bodyPr wrap="square" anchor="t">
+          <a:bodyPr wrap="square" anchor="t" lIns="0" rIns="0" tIns="0" bIns="0">
             <a:spAutoFit/>
           </a:bodyPr>
           <a:lstStyle/>
@@ -14270,7 +14309,7 @@
           <a:noFill/>
         </p:spPr>
         <p:txBody>
-          <a:bodyPr wrap="square" anchor="t">
+          <a:bodyPr wrap="square" anchor="t" lIns="0" rIns="0" tIns="0" bIns="0">
             <a:spAutoFit/>
           </a:bodyPr>
           <a:lstStyle/>
@@ -14304,7 +14343,7 @@
           <a:noFill/>
         </p:spPr>
         <p:txBody>
-          <a:bodyPr wrap="square" anchor="t">
+          <a:bodyPr wrap="square" anchor="t" lIns="0" rIns="0" tIns="0" bIns="0">
             <a:spAutoFit/>
           </a:bodyPr>
           <a:lstStyle/>
@@ -14507,7 +14546,7 @@
           <a:noFill/>
         </p:spPr>
         <p:txBody>
-          <a:bodyPr wrap="square" anchor="ctr">
+          <a:bodyPr wrap="square" anchor="ctr" lIns="0" rIns="0" tIns="0" bIns="0">
             <a:spAutoFit/>
           </a:bodyPr>
           <a:lstStyle/>
@@ -14570,7 +14609,7 @@
       </p:sp>
       <p:pic>
         <p:nvPicPr>
-          <p:cNvPr id="7" name="Picture 6" descr="7a88ba4b09bc6b6f.png"/>
+          <p:cNvPr id="7" name="Picture 6" descr="60f00ae84a3a6699.png"/>
           <p:cNvPicPr>
             <a:picLocks noChangeAspect="1"/>
           </p:cNvPicPr>
@@ -14584,7 +14623,7 @@
         </p:blipFill>
         <p:spPr>
           <a:xfrm>
-            <a:off x="685800" y="2098005"/>
+            <a:off x="685800" y="1627632"/>
             <a:ext cx="10820095" cy="2519748"/>
           </a:xfrm>
           <a:prstGeom prst="rect">
@@ -14600,8 +14639,8 @@
         </p:nvSpPr>
         <p:spPr>
           <a:xfrm>
-            <a:off x="685800" y="5197856"/>
-            <a:ext cx="10820095" cy="855471"/>
+            <a:off x="685800" y="4293684"/>
+            <a:ext cx="10820095" cy="1255776"/>
           </a:xfrm>
           <a:prstGeom prst="rect">
             <a:avLst/>
@@ -14609,11 +14648,16 @@
           <a:noFill/>
         </p:spPr>
         <p:txBody>
-          <a:bodyPr wrap="square" anchor="t">
+          <a:bodyPr wrap="square" anchor="t" lIns="0" rIns="0" tIns="0" bIns="0">
             <a:spAutoFit/>
           </a:bodyPr>
           <a:lstStyle/>
           <a:p>
+            <a:pPr>
+              <a:spcAft>
+                <a:spcPts val="900"/>
+              </a:spcAft>
+            </a:pPr>
             <a:r>
               <a:rPr sz="2000" b="0">
                 <a:solidFill>
@@ -14687,7 +14731,7 @@
           <a:noFill/>
         </p:spPr>
         <p:txBody>
-          <a:bodyPr wrap="square" anchor="t">
+          <a:bodyPr wrap="square" anchor="t" lIns="0" rIns="0" tIns="0" bIns="0">
             <a:spAutoFit/>
           </a:bodyPr>
           <a:lstStyle/>
@@ -14721,7 +14765,7 @@
           <a:noFill/>
         </p:spPr>
         <p:txBody>
-          <a:bodyPr wrap="square" anchor="t">
+          <a:bodyPr wrap="square" anchor="t" lIns="0" rIns="0" tIns="0" bIns="0">
             <a:spAutoFit/>
           </a:bodyPr>
           <a:lstStyle/>
@@ -14924,7 +14968,7 @@
           <a:noFill/>
         </p:spPr>
         <p:txBody>
-          <a:bodyPr wrap="square" anchor="ctr">
+          <a:bodyPr wrap="square" anchor="ctr" lIns="0" rIns="0" tIns="0" bIns="0">
             <a:spAutoFit/>
           </a:bodyPr>
           <a:lstStyle/>
@@ -14995,7 +15039,7 @@
         </p:nvGraphicFramePr>
         <p:xfrm>
           <a:off x="685800" y="1985772"/>
-          <a:ext cx="10820095" cy="2197608"/>
+          <a:ext cx="10820094" cy="2197608"/>
         </p:xfrm>
         <a:graphic>
           <a:graphicData uri="http://schemas.openxmlformats.org/drawingml/2006/table">
@@ -15004,9 +15048,9 @@
                 <a:tableStyleId>{2D5ABB26-0587-4C30-8999-92F81FD0307C}</a:tableStyleId>
               </a:tblPr>
               <a:tblGrid>
-                <a:gridCol w="3606698"/>
-                <a:gridCol w="3606698"/>
-                <a:gridCol w="3606699"/>
+                <a:gridCol w="2514378"/>
+                <a:gridCol w="4152858"/>
+                <a:gridCol w="4152858"/>
               </a:tblGrid>
               <a:tr h="387096">
                 <a:tc>
@@ -15233,7 +15277,7 @@
           <a:noFill/>
         </p:spPr>
         <p:txBody>
-          <a:bodyPr wrap="square" anchor="t">
+          <a:bodyPr wrap="square" anchor="t" lIns="0" rIns="0" tIns="0" bIns="0">
             <a:spAutoFit/>
           </a:bodyPr>
           <a:lstStyle/>
@@ -15316,7 +15360,7 @@
           <a:noFill/>
         </p:spPr>
         <p:txBody>
-          <a:bodyPr wrap="square" anchor="t">
+          <a:bodyPr wrap="square" anchor="t" lIns="0" rIns="0" tIns="0" bIns="0">
             <a:spAutoFit/>
           </a:bodyPr>
           <a:lstStyle/>
@@ -15350,7 +15394,7 @@
           <a:noFill/>
         </p:spPr>
         <p:txBody>
-          <a:bodyPr wrap="square" anchor="t">
+          <a:bodyPr wrap="square" anchor="t" lIns="0" rIns="0" tIns="0" bIns="0">
             <a:spAutoFit/>
           </a:bodyPr>
           <a:lstStyle/>
@@ -15500,7 +15544,7 @@
           <a:noFill/>
         </p:spPr>
         <p:txBody>
-          <a:bodyPr wrap="square" anchor="ctr">
+          <a:bodyPr wrap="square" anchor="ctr" lIns="0" rIns="0" tIns="0" bIns="0">
             <a:spAutoFit/>
           </a:bodyPr>
           <a:lstStyle/>
@@ -15569,8 +15613,8 @@
         </p:nvSpPr>
         <p:spPr>
           <a:xfrm>
-            <a:off x="685800" y="2802128"/>
-            <a:ext cx="10820095" cy="1347216"/>
+            <a:off x="685800" y="2597912"/>
+            <a:ext cx="10820095" cy="1410208"/>
           </a:xfrm>
           <a:prstGeom prst="rect">
             <a:avLst/>
@@ -15613,8 +15657,8 @@
         </p:nvSpPr>
         <p:spPr>
           <a:xfrm>
-            <a:off x="685800" y="2802128"/>
-            <a:ext cx="50292" cy="1347216"/>
+            <a:off x="685800" y="2597912"/>
+            <a:ext cx="50292" cy="1410208"/>
           </a:xfrm>
           <a:prstGeom prst="rect">
             <a:avLst/>
@@ -15657,8 +15701,8 @@
         </p:nvSpPr>
         <p:spPr>
           <a:xfrm>
-            <a:off x="923544" y="2902712"/>
-            <a:ext cx="10417759" cy="1164336"/>
+            <a:off x="923544" y="2698496"/>
+            <a:ext cx="10417759" cy="1227328"/>
           </a:xfrm>
           <a:prstGeom prst="rect">
             <a:avLst/>
@@ -15666,7 +15710,7 @@
           <a:noFill/>
         </p:spPr>
         <p:txBody>
-          <a:bodyPr wrap="square" anchor="t">
+          <a:bodyPr wrap="square" anchor="t" lIns="0" rIns="0" tIns="0" bIns="0">
             <a:spAutoFit/>
           </a:bodyPr>
           <a:lstStyle/>
@@ -15744,8 +15788,8 @@
         </p:nvSpPr>
         <p:spPr>
           <a:xfrm>
-            <a:off x="685800" y="4313936"/>
-            <a:ext cx="10820095" cy="564896"/>
+            <a:off x="685800" y="4172712"/>
+            <a:ext cx="10820095" cy="910336"/>
           </a:xfrm>
           <a:prstGeom prst="rect">
             <a:avLst/>
@@ -15753,7 +15797,7 @@
           <a:noFill/>
         </p:spPr>
         <p:txBody>
-          <a:bodyPr wrap="square" anchor="t">
+          <a:bodyPr wrap="square" anchor="t" lIns="0" rIns="0" tIns="0" bIns="0">
             <a:spAutoFit/>
           </a:bodyPr>
           <a:lstStyle/>
@@ -15836,7 +15880,7 @@
           <a:noFill/>
         </p:spPr>
         <p:txBody>
-          <a:bodyPr wrap="square" anchor="t">
+          <a:bodyPr wrap="square" anchor="t" lIns="0" rIns="0" tIns="0" bIns="0">
             <a:spAutoFit/>
           </a:bodyPr>
           <a:lstStyle/>
@@ -15870,7 +15914,7 @@
           <a:noFill/>
         </p:spPr>
         <p:txBody>
-          <a:bodyPr wrap="square" anchor="t">
+          <a:bodyPr wrap="square" anchor="t" lIns="0" rIns="0" tIns="0" bIns="0">
             <a:spAutoFit/>
           </a:bodyPr>
           <a:lstStyle/>
@@ -16020,7 +16064,7 @@
           <a:noFill/>
         </p:spPr>
         <p:txBody>
-          <a:bodyPr wrap="square" anchor="ctr">
+          <a:bodyPr wrap="square" anchor="ctr" lIns="0" rIns="0" tIns="0" bIns="0">
             <a:spAutoFit/>
           </a:bodyPr>
           <a:lstStyle/>
@@ -16089,7 +16133,7 @@
         </p:nvSpPr>
         <p:spPr>
           <a:xfrm>
-            <a:off x="685800" y="2157984"/>
+            <a:off x="685800" y="2155952"/>
             <a:ext cx="10820095" cy="564896"/>
           </a:xfrm>
           <a:prstGeom prst="rect">
@@ -16098,7 +16142,7 @@
           <a:noFill/>
         </p:spPr>
         <p:txBody>
-          <a:bodyPr wrap="square" anchor="t">
+          <a:bodyPr wrap="square" anchor="t" lIns="0" rIns="0" tIns="0" bIns="0">
             <a:spAutoFit/>
           </a:bodyPr>
           <a:lstStyle/>
@@ -16128,8 +16172,8 @@
         </p:nvSpPr>
         <p:spPr>
           <a:xfrm>
-            <a:off x="685800" y="2850896"/>
-            <a:ext cx="10820095" cy="542543"/>
+            <a:off x="685800" y="2848864"/>
+            <a:ext cx="10820095" cy="544576"/>
           </a:xfrm>
           <a:prstGeom prst="rect">
             <a:avLst/>
@@ -16172,8 +16216,8 @@
         </p:nvSpPr>
         <p:spPr>
           <a:xfrm>
-            <a:off x="685800" y="2850896"/>
-            <a:ext cx="50292" cy="542543"/>
+            <a:off x="685800" y="2848864"/>
+            <a:ext cx="50292" cy="544576"/>
           </a:xfrm>
           <a:prstGeom prst="rect">
             <a:avLst/>
@@ -16216,8 +16260,8 @@
         </p:nvSpPr>
         <p:spPr>
           <a:xfrm>
-            <a:off x="923544" y="2951480"/>
-            <a:ext cx="10417759" cy="359663"/>
+            <a:off x="923544" y="2949448"/>
+            <a:ext cx="10417759" cy="361696"/>
           </a:xfrm>
           <a:prstGeom prst="rect">
             <a:avLst/>
@@ -16225,7 +16269,7 @@
           <a:noFill/>
         </p:spPr>
         <p:txBody>
-          <a:bodyPr wrap="square" anchor="t">
+          <a:bodyPr wrap="square" anchor="t" lIns="0" rIns="0" tIns="0" bIns="0">
             <a:spAutoFit/>
           </a:bodyPr>
           <a:lstStyle/>
@@ -16264,7 +16308,7 @@
           <a:noFill/>
         </p:spPr>
         <p:txBody>
-          <a:bodyPr wrap="square" anchor="t">
+          <a:bodyPr wrap="square" anchor="t" lIns="0" rIns="0" tIns="0" bIns="0">
             <a:spAutoFit/>
           </a:bodyPr>
           <a:lstStyle/>
@@ -16295,7 +16339,7 @@
         <p:spPr>
           <a:xfrm>
             <a:off x="685800" y="4250944"/>
-            <a:ext cx="10820095" cy="542543"/>
+            <a:ext cx="10820095" cy="544576"/>
           </a:xfrm>
           <a:prstGeom prst="rect">
             <a:avLst/>
@@ -16339,7 +16383,7 @@
         <p:spPr>
           <a:xfrm>
             <a:off x="685800" y="4250944"/>
-            <a:ext cx="50292" cy="542543"/>
+            <a:ext cx="50292" cy="544576"/>
           </a:xfrm>
           <a:prstGeom prst="rect">
             <a:avLst/>
@@ -16383,7 +16427,7 @@
         <p:spPr>
           <a:xfrm>
             <a:off x="923544" y="4351528"/>
-            <a:ext cx="10417759" cy="359663"/>
+            <a:ext cx="10417759" cy="361696"/>
           </a:xfrm>
           <a:prstGeom prst="rect">
             <a:avLst/>
@@ -16391,7 +16435,7 @@
           <a:noFill/>
         </p:spPr>
         <p:txBody>
-          <a:bodyPr wrap="square" anchor="t">
+          <a:bodyPr wrap="square" anchor="t" lIns="0" rIns="0" tIns="0" bIns="0">
             <a:spAutoFit/>
           </a:bodyPr>
           <a:lstStyle/>
@@ -16421,7 +16465,7 @@
         </p:nvSpPr>
         <p:spPr>
           <a:xfrm>
-            <a:off x="685800" y="4958080"/>
+            <a:off x="685800" y="4960112"/>
             <a:ext cx="10820095" cy="564896"/>
           </a:xfrm>
           <a:prstGeom prst="rect">
@@ -16430,7 +16474,7 @@
           <a:noFill/>
         </p:spPr>
         <p:txBody>
-          <a:bodyPr wrap="square" anchor="t">
+          <a:bodyPr wrap="square" anchor="t" lIns="0" rIns="0" tIns="0" bIns="0">
             <a:spAutoFit/>
           </a:bodyPr>
           <a:lstStyle/>
@@ -16513,7 +16557,7 @@
           <a:noFill/>
         </p:spPr>
         <p:txBody>
-          <a:bodyPr wrap="square" anchor="t">
+          <a:bodyPr wrap="square" anchor="t" lIns="0" rIns="0" tIns="0" bIns="0">
             <a:spAutoFit/>
           </a:bodyPr>
           <a:lstStyle/>
@@ -16547,7 +16591,7 @@
           <a:noFill/>
         </p:spPr>
         <p:txBody>
-          <a:bodyPr wrap="square" anchor="t">
+          <a:bodyPr wrap="square" anchor="t" lIns="0" rIns="0" tIns="0" bIns="0">
             <a:spAutoFit/>
           </a:bodyPr>
           <a:lstStyle/>
@@ -16697,7 +16741,7 @@
           <a:noFill/>
         </p:spPr>
         <p:txBody>
-          <a:bodyPr wrap="square" anchor="ctr">
+          <a:bodyPr wrap="square" anchor="ctr" lIns="0" rIns="0" tIns="0" bIns="0">
             <a:spAutoFit/>
           </a:bodyPr>
           <a:lstStyle/>
@@ -16775,7 +16819,7 @@
           <a:noFill/>
         </p:spPr>
         <p:txBody>
-          <a:bodyPr wrap="square" anchor="t">
+          <a:bodyPr wrap="square" anchor="t" lIns="0" rIns="0" tIns="0" bIns="0">
             <a:spAutoFit/>
           </a:bodyPr>
           <a:lstStyle/>
@@ -16874,7 +16918,7 @@
           <a:noFill/>
         </p:spPr>
         <p:txBody>
-          <a:bodyPr wrap="square" anchor="t">
+          <a:bodyPr wrap="square" anchor="t" lIns="0" rIns="0" tIns="0" bIns="0">
             <a:spAutoFit/>
           </a:bodyPr>
           <a:lstStyle/>
@@ -16908,7 +16952,7 @@
           <a:noFill/>
         </p:spPr>
         <p:txBody>
-          <a:bodyPr wrap="square" anchor="t">
+          <a:bodyPr wrap="square" anchor="t" lIns="0" rIns="0" tIns="0" bIns="0">
             <a:spAutoFit/>
           </a:bodyPr>
           <a:lstStyle/>
@@ -17111,7 +17155,7 @@
           <a:noFill/>
         </p:spPr>
         <p:txBody>
-          <a:bodyPr wrap="square" anchor="ctr">
+          <a:bodyPr wrap="square" anchor="ctr" lIns="0" rIns="0" tIns="0" bIns="0">
             <a:spAutoFit/>
           </a:bodyPr>
           <a:lstStyle/>
@@ -17189,7 +17233,7 @@
           <a:noFill/>
         </p:spPr>
         <p:txBody>
-          <a:bodyPr wrap="square" anchor="t">
+          <a:bodyPr wrap="square" anchor="t" lIns="0" rIns="0" tIns="0" bIns="0">
             <a:spAutoFit/>
           </a:bodyPr>
           <a:lstStyle/>
@@ -17336,7 +17380,7 @@
           <a:noFill/>
         </p:spPr>
         <p:txBody>
-          <a:bodyPr wrap="square" anchor="t">
+          <a:bodyPr wrap="square" anchor="t" lIns="0" rIns="0" tIns="0" bIns="0">
             <a:spAutoFit/>
           </a:bodyPr>
           <a:lstStyle/>
@@ -17370,7 +17414,7 @@
           <a:noFill/>
         </p:spPr>
         <p:txBody>
-          <a:bodyPr wrap="square" anchor="t">
+          <a:bodyPr wrap="square" anchor="t" lIns="0" rIns="0" tIns="0" bIns="0">
             <a:spAutoFit/>
           </a:bodyPr>
           <a:lstStyle/>
@@ -17520,7 +17564,7 @@
           <a:noFill/>
         </p:spPr>
         <p:txBody>
-          <a:bodyPr wrap="square" anchor="ctr">
+          <a:bodyPr wrap="square" anchor="ctr" lIns="0" rIns="0" tIns="0" bIns="0">
             <a:spAutoFit/>
           </a:bodyPr>
           <a:lstStyle/>
@@ -17598,7 +17642,7 @@
           <a:noFill/>
         </p:spPr>
         <p:txBody>
-          <a:bodyPr wrap="square" anchor="t">
+          <a:bodyPr wrap="square" anchor="t" lIns="0" rIns="0" tIns="0" bIns="0">
             <a:spAutoFit/>
           </a:bodyPr>
           <a:lstStyle/>
@@ -17632,7 +17676,7 @@
           <a:noFill/>
         </p:spPr>
         <p:txBody>
-          <a:bodyPr wrap="square" anchor="t">
+          <a:bodyPr wrap="square" anchor="t" lIns="0" rIns="0" tIns="0" bIns="0">
             <a:spAutoFit/>
           </a:bodyPr>
           <a:lstStyle/>
@@ -17666,7 +17710,7 @@
           <a:noFill/>
         </p:spPr>
         <p:txBody>
-          <a:bodyPr wrap="square" anchor="t">
+          <a:bodyPr wrap="square" anchor="t" lIns="0" rIns="0" tIns="0" bIns="0">
             <a:spAutoFit/>
           </a:bodyPr>
           <a:lstStyle/>
@@ -17700,7 +17744,7 @@
           <a:noFill/>
         </p:spPr>
         <p:txBody>
-          <a:bodyPr wrap="square" anchor="t">
+          <a:bodyPr wrap="square" anchor="t" lIns="0" rIns="0" tIns="0" bIns="0">
             <a:spAutoFit/>
           </a:bodyPr>
           <a:lstStyle/>
@@ -17734,7 +17778,7 @@
           <a:noFill/>
         </p:spPr>
         <p:txBody>
-          <a:bodyPr wrap="square" anchor="t">
+          <a:bodyPr wrap="square" anchor="t" lIns="0" rIns="0" tIns="0" bIns="0">
             <a:spAutoFit/>
           </a:bodyPr>
           <a:lstStyle/>
@@ -17768,7 +17812,7 @@
           <a:noFill/>
         </p:spPr>
         <p:txBody>
-          <a:bodyPr wrap="square" anchor="t">
+          <a:bodyPr wrap="square" anchor="t" lIns="0" rIns="0" tIns="0" bIns="0">
             <a:spAutoFit/>
           </a:bodyPr>
           <a:lstStyle/>
@@ -17802,7 +17846,7 @@
           <a:noFill/>
         </p:spPr>
         <p:txBody>
-          <a:bodyPr wrap="square" anchor="t">
+          <a:bodyPr wrap="square" anchor="t" lIns="0" rIns="0" tIns="0" bIns="0">
             <a:spAutoFit/>
           </a:bodyPr>
           <a:lstStyle/>
@@ -17836,7 +17880,7 @@
           <a:noFill/>
         </p:spPr>
         <p:txBody>
-          <a:bodyPr wrap="square" anchor="t">
+          <a:bodyPr wrap="square" anchor="t" lIns="0" rIns="0" tIns="0" bIns="0">
             <a:spAutoFit/>
           </a:bodyPr>
           <a:lstStyle/>
@@ -17914,7 +17958,7 @@
           <a:noFill/>
         </p:spPr>
         <p:txBody>
-          <a:bodyPr wrap="square" anchor="t">
+          <a:bodyPr wrap="square" anchor="t" lIns="0" rIns="0" tIns="0" bIns="0">
             <a:spAutoFit/>
           </a:bodyPr>
           <a:lstStyle/>
@@ -17948,7 +17992,7 @@
           <a:noFill/>
         </p:spPr>
         <p:txBody>
-          <a:bodyPr wrap="square" anchor="t">
+          <a:bodyPr wrap="square" anchor="t" lIns="0" rIns="0" tIns="0" bIns="0">
             <a:spAutoFit/>
           </a:bodyPr>
           <a:lstStyle/>
@@ -18045,7 +18089,7 @@
           <a:noFill/>
         </p:spPr>
         <p:txBody>
-          <a:bodyPr wrap="square" anchor="ctr">
+          <a:bodyPr wrap="square" anchor="ctr" lIns="0" rIns="0" tIns="0" bIns="0">
             <a:spAutoFit/>
           </a:bodyPr>
           <a:lstStyle/>
@@ -18389,7 +18433,7 @@
           <a:noFill/>
         </p:spPr>
         <p:txBody>
-          <a:bodyPr wrap="square" anchor="t">
+          <a:bodyPr wrap="square" anchor="t" lIns="0" rIns="0" tIns="0" bIns="0">
             <a:spAutoFit/>
           </a:bodyPr>
           <a:lstStyle/>
@@ -18423,7 +18467,7 @@
           <a:noFill/>
         </p:spPr>
         <p:txBody>
-          <a:bodyPr wrap="square" anchor="t">
+          <a:bodyPr wrap="square" anchor="t" lIns="0" rIns="0" tIns="0" bIns="0">
             <a:spAutoFit/>
           </a:bodyPr>
           <a:lstStyle/>
@@ -18573,7 +18617,7 @@
           <a:noFill/>
         </p:spPr>
         <p:txBody>
-          <a:bodyPr wrap="square" anchor="ctr">
+          <a:bodyPr wrap="square" anchor="ctr" lIns="0" rIns="0" tIns="0" bIns="0">
             <a:spAutoFit/>
           </a:bodyPr>
           <a:lstStyle/>
@@ -18651,7 +18695,7 @@
           <a:noFill/>
         </p:spPr>
         <p:txBody>
-          <a:bodyPr wrap="square" anchor="t">
+          <a:bodyPr wrap="square" anchor="t" lIns="0" rIns="0" tIns="0" bIns="0">
             <a:spAutoFit/>
           </a:bodyPr>
           <a:lstStyle/>
@@ -18766,7 +18810,7 @@
           <a:noFill/>
         </p:spPr>
         <p:txBody>
-          <a:bodyPr wrap="square" anchor="t">
+          <a:bodyPr wrap="square" anchor="t" lIns="0" rIns="0" tIns="0" bIns="0">
             <a:spAutoFit/>
           </a:bodyPr>
           <a:lstStyle/>
@@ -18800,7 +18844,7 @@
           <a:noFill/>
         </p:spPr>
         <p:txBody>
-          <a:bodyPr wrap="square" anchor="t">
+          <a:bodyPr wrap="square" anchor="t" lIns="0" rIns="0" tIns="0" bIns="0">
             <a:spAutoFit/>
           </a:bodyPr>
           <a:lstStyle/>
@@ -18950,7 +18994,7 @@
           <a:noFill/>
         </p:spPr>
         <p:txBody>
-          <a:bodyPr wrap="square" anchor="ctr">
+          <a:bodyPr wrap="square" anchor="ctr" lIns="0" rIns="0" tIns="0" bIns="0">
             <a:spAutoFit/>
           </a:bodyPr>
           <a:lstStyle/>
@@ -19013,7 +19057,7 @@
       </p:sp>
       <p:pic>
         <p:nvPicPr>
-          <p:cNvPr id="6" name="Picture 5" descr="9f2f03e70cc5e6d6.png"/>
+          <p:cNvPr id="6" name="Picture 5" descr="e42b98ffeec15886.png"/>
           <p:cNvPicPr>
             <a:picLocks noChangeAspect="1"/>
           </p:cNvPicPr>
@@ -19052,7 +19096,7 @@
           <a:noFill/>
         </p:spPr>
         <p:txBody>
-          <a:bodyPr wrap="square" anchor="t">
+          <a:bodyPr wrap="square" anchor="t" lIns="0" rIns="0" tIns="0" bIns="0">
             <a:spAutoFit/>
           </a:bodyPr>
           <a:lstStyle/>
@@ -19130,7 +19174,7 @@
           <a:noFill/>
         </p:spPr>
         <p:txBody>
-          <a:bodyPr wrap="square" anchor="t">
+          <a:bodyPr wrap="square" anchor="t" lIns="0" rIns="0" tIns="0" bIns="0">
             <a:spAutoFit/>
           </a:bodyPr>
           <a:lstStyle/>
@@ -19164,7 +19208,7 @@
           <a:noFill/>
         </p:spPr>
         <p:txBody>
-          <a:bodyPr wrap="square" anchor="t">
+          <a:bodyPr wrap="square" anchor="t" lIns="0" rIns="0" tIns="0" bIns="0">
             <a:spAutoFit/>
           </a:bodyPr>
           <a:lstStyle/>
@@ -19314,7 +19358,7 @@
           <a:noFill/>
         </p:spPr>
         <p:txBody>
-          <a:bodyPr wrap="square" anchor="ctr">
+          <a:bodyPr wrap="square" anchor="ctr" lIns="0" rIns="0" tIns="0" bIns="0">
             <a:spAutoFit/>
           </a:bodyPr>
           <a:lstStyle/>
@@ -19375,9 +19419,48 @@
           </a:p>
         </p:txBody>
       </p:sp>
+      <p:sp>
+        <p:nvSpPr>
+          <p:cNvPr id="6" name="TextBox 5"/>
+          <p:cNvSpPr txBox="1"/>
+          <p:nvPr/>
+        </p:nvSpPr>
+        <p:spPr>
+          <a:xfrm>
+            <a:off x="685800" y="2729797"/>
+            <a:ext cx="10820095" cy="564896"/>
+          </a:xfrm>
+          <a:prstGeom prst="rect">
+            <a:avLst/>
+          </a:prstGeom>
+          <a:noFill/>
+        </p:spPr>
+        <p:txBody>
+          <a:bodyPr wrap="square" anchor="t" lIns="0" rIns="0" tIns="0" bIns="0">
+            <a:spAutoFit/>
+          </a:bodyPr>
+          <a:lstStyle/>
+          <a:p>
+            <a:pPr>
+              <a:spcAft>
+                <a:spcPts val="900"/>
+              </a:spcAft>
+            </a:pPr>
+            <a:r>
+              <a:rPr sz="2000" b="0">
+                <a:solidFill>
+                  <a:srgbClr val="1C1C1A"/>
+                </a:solidFill>
+                <a:latin typeface="Calibri"/>
+              </a:rPr>
+              <a:t>Today has five stops and you will pass through all of them before the close.</a:t>
+            </a:r>
+          </a:p>
+        </p:txBody>
+      </p:sp>
       <p:pic>
         <p:nvPicPr>
-          <p:cNvPr id="6" name="Picture 5" descr="8cbe385609c52d3f.png"/>
+          <p:cNvPr id="7" name="Picture 6" descr="c8c118df18842d6b.png"/>
           <p:cNvPicPr>
             <a:picLocks noChangeAspect="1"/>
           </p:cNvPicPr>
@@ -19391,7 +19474,7 @@
         </p:blipFill>
         <p:spPr>
           <a:xfrm>
-            <a:off x="685800" y="2949253"/>
+            <a:off x="685800" y="3422709"/>
             <a:ext cx="10820095" cy="817253"/>
           </a:xfrm>
           <a:prstGeom prst="rect">
@@ -19401,14 +19484,14 @@
       </p:pic>
       <p:sp>
         <p:nvSpPr>
-          <p:cNvPr id="7" name="TextBox 6"/>
+          <p:cNvPr id="8" name="TextBox 7"/>
           <p:cNvSpPr txBox="1"/>
           <p:nvPr/>
         </p:nvSpPr>
         <p:spPr>
           <a:xfrm>
-            <a:off x="685800" y="5197856"/>
-            <a:ext cx="10820095" cy="855471"/>
+            <a:off x="685800" y="4386266"/>
+            <a:ext cx="10820095" cy="564896"/>
           </a:xfrm>
           <a:prstGeom prst="rect">
             <a:avLst/>
@@ -19416,11 +19499,16 @@
           <a:noFill/>
         </p:spPr>
         <p:txBody>
-          <a:bodyPr wrap="square" anchor="t">
+          <a:bodyPr wrap="square" anchor="t" lIns="0" rIns="0" tIns="0" bIns="0">
             <a:spAutoFit/>
           </a:bodyPr>
           <a:lstStyle/>
           <a:p>
+            <a:pPr>
+              <a:spcAft>
+                <a:spcPts val="900"/>
+              </a:spcAft>
+            </a:pPr>
             <a:r>
               <a:rPr sz="2000" b="0">
                 <a:solidFill>
@@ -19428,14 +19516,14 @@
                 </a:solidFill>
                 <a:latin typeface="Calibri"/>
               </a:rPr>
-              <a:t>Today has five stops and you will pass through all of them before the close. Half one is the first four boxes. Half two is the last two.</a:t>
-            </a:r>
-          </a:p>
-        </p:txBody>
-      </p:sp>
-      <p:sp>
-        <p:nvSpPr>
-          <p:cNvPr id="8" name="Rectangle 7"/>
+              <a:t>Half one is the first four boxes. Half two is the last two.</a:t>
+            </a:r>
+          </a:p>
+        </p:txBody>
+      </p:sp>
+      <p:sp>
+        <p:nvSpPr>
+          <p:cNvPr id="9" name="Rectangle 8"/>
           <p:cNvSpPr/>
           <p:nvPr/>
         </p:nvSpPr>
@@ -19479,7 +19567,7 @@
       </p:sp>
       <p:sp>
         <p:nvSpPr>
-          <p:cNvPr id="9" name="TextBox 8"/>
+          <p:cNvPr id="10" name="TextBox 9"/>
           <p:cNvSpPr txBox="1"/>
           <p:nvPr/>
         </p:nvSpPr>
@@ -19494,7 +19582,7 @@
           <a:noFill/>
         </p:spPr>
         <p:txBody>
-          <a:bodyPr wrap="square" anchor="t">
+          <a:bodyPr wrap="square" anchor="t" lIns="0" rIns="0" tIns="0" bIns="0">
             <a:spAutoFit/>
           </a:bodyPr>
           <a:lstStyle/>
@@ -19513,7 +19601,7 @@
       </p:sp>
       <p:sp>
         <p:nvSpPr>
-          <p:cNvPr id="10" name="TextBox 9"/>
+          <p:cNvPr id="11" name="TextBox 10"/>
           <p:cNvSpPr txBox="1"/>
           <p:nvPr/>
         </p:nvSpPr>
@@ -19528,7 +19616,7 @@
           <a:noFill/>
         </p:spPr>
         <p:txBody>
-          <a:bodyPr wrap="square" anchor="t">
+          <a:bodyPr wrap="square" anchor="t" lIns="0" rIns="0" tIns="0" bIns="0">
             <a:spAutoFit/>
           </a:bodyPr>
           <a:lstStyle/>
@@ -19678,7 +19766,7 @@
           <a:noFill/>
         </p:spPr>
         <p:txBody>
-          <a:bodyPr wrap="square" anchor="ctr">
+          <a:bodyPr wrap="square" anchor="ctr" lIns="0" rIns="0" tIns="0" bIns="0">
             <a:spAutoFit/>
           </a:bodyPr>
           <a:lstStyle/>
@@ -19747,8 +19835,8 @@
         </p:nvSpPr>
         <p:spPr>
           <a:xfrm>
-            <a:off x="685800" y="1627632"/>
-            <a:ext cx="10820095" cy="1347216"/>
+            <a:off x="685800" y="1938528"/>
+            <a:ext cx="10820095" cy="1265936"/>
           </a:xfrm>
           <a:prstGeom prst="rect">
             <a:avLst/>
@@ -19791,8 +19879,8 @@
         </p:nvSpPr>
         <p:spPr>
           <a:xfrm>
-            <a:off x="685800" y="1627632"/>
-            <a:ext cx="50292" cy="1347216"/>
+            <a:off x="685800" y="1938528"/>
+            <a:ext cx="50292" cy="1265936"/>
           </a:xfrm>
           <a:prstGeom prst="rect">
             <a:avLst/>
@@ -19835,8 +19923,8 @@
         </p:nvSpPr>
         <p:spPr>
           <a:xfrm>
-            <a:off x="923544" y="1728216"/>
-            <a:ext cx="10417759" cy="1164336"/>
+            <a:off x="923544" y="2039112"/>
+            <a:ext cx="10417759" cy="1083056"/>
           </a:xfrm>
           <a:prstGeom prst="rect">
             <a:avLst/>
@@ -19844,7 +19932,7 @@
           <a:noFill/>
         </p:spPr>
         <p:txBody>
-          <a:bodyPr wrap="square" anchor="t">
+          <a:bodyPr wrap="square" anchor="t" lIns="0" rIns="0" tIns="0" bIns="0">
             <a:spAutoFit/>
           </a:bodyPr>
           <a:lstStyle/>
@@ -19855,7 +19943,7 @@
               </a:spcAft>
             </a:pPr>
             <a:r>
-              <a:rPr sz="1600" b="0">
+              <a:rPr sz="1400" b="0">
                 <a:solidFill>
                   <a:srgbClr val="E4ECF7"/>
                 </a:solidFill>
@@ -19871,7 +19959,7 @@
               </a:spcAft>
             </a:pPr>
             <a:r>
-              <a:rPr sz="1600" b="0">
+              <a:rPr sz="1400" b="0">
                 <a:solidFill>
                   <a:srgbClr val="E4ECF7"/>
                 </a:solidFill>
@@ -19887,7 +19975,7 @@
               </a:spcAft>
             </a:pPr>
             <a:r>
-              <a:rPr sz="1600" b="0">
+              <a:rPr sz="1400" b="0">
                 <a:solidFill>
                   <a:srgbClr val="E4ECF7"/>
                 </a:solidFill>
@@ -19903,7 +19991,7 @@
               </a:spcAft>
             </a:pPr>
             <a:r>
-              <a:rPr sz="1600" b="0">
+              <a:rPr sz="1400" b="0">
                 <a:solidFill>
                   <a:srgbClr val="E4ECF7"/>
                 </a:solidFill>
@@ -19922,8 +20010,8 @@
         </p:nvSpPr>
         <p:spPr>
           <a:xfrm>
-            <a:off x="685800" y="3139440"/>
-            <a:ext cx="10820095" cy="910336"/>
+            <a:off x="685800" y="3369056"/>
+            <a:ext cx="10820095" cy="806704"/>
           </a:xfrm>
           <a:prstGeom prst="rect">
             <a:avLst/>
@@ -19931,18 +20019,18 @@
           <a:noFill/>
         </p:spPr>
         <p:txBody>
-          <a:bodyPr wrap="square" anchor="t">
+          <a:bodyPr wrap="square" anchor="t" lIns="0" rIns="0" tIns="0" bIns="0">
             <a:spAutoFit/>
           </a:bodyPr>
           <a:lstStyle/>
           <a:p>
             <a:pPr>
               <a:spcAft>
-                <a:spcPts val="900"/>
+                <a:spcPts val="800"/>
               </a:spcAft>
             </a:pPr>
             <a:r>
-              <a:rPr sz="2000" b="0">
+              <a:rPr sz="1700" b="0">
                 <a:solidFill>
                   <a:srgbClr val="1C1C1A"/>
                 </a:solidFill>
@@ -19961,8 +20049,8 @@
         </p:nvSpPr>
         <p:spPr>
           <a:xfrm>
-            <a:off x="685800" y="4177792"/>
-            <a:ext cx="10820095" cy="810768"/>
+            <a:off x="685800" y="4303775"/>
+            <a:ext cx="10820095" cy="760984"/>
           </a:xfrm>
           <a:prstGeom prst="rect">
             <a:avLst/>
@@ -20005,8 +20093,8 @@
         </p:nvSpPr>
         <p:spPr>
           <a:xfrm>
-            <a:off x="685800" y="4177792"/>
-            <a:ext cx="50292" cy="810768"/>
+            <a:off x="685800" y="4303775"/>
+            <a:ext cx="50292" cy="760984"/>
           </a:xfrm>
           <a:prstGeom prst="rect">
             <a:avLst/>
@@ -20049,8 +20137,8 @@
         </p:nvSpPr>
         <p:spPr>
           <a:xfrm>
-            <a:off x="923544" y="4278376"/>
-            <a:ext cx="10417759" cy="627888"/>
+            <a:off x="923544" y="4404360"/>
+            <a:ext cx="10417759" cy="578104"/>
           </a:xfrm>
           <a:prstGeom prst="rect">
             <a:avLst/>
@@ -20058,7 +20146,7 @@
           <a:noFill/>
         </p:spPr>
         <p:txBody>
-          <a:bodyPr wrap="square" anchor="t">
+          <a:bodyPr wrap="square" anchor="t" lIns="0" rIns="0" tIns="0" bIns="0">
             <a:spAutoFit/>
           </a:bodyPr>
           <a:lstStyle/>
@@ -20069,7 +20157,7 @@
               </a:spcAft>
             </a:pPr>
             <a:r>
-              <a:rPr sz="1600" b="0">
+              <a:rPr sz="1400" b="0">
                 <a:solidFill>
                   <a:srgbClr val="E4ECF7"/>
                 </a:solidFill>
@@ -20085,7 +20173,7 @@
               </a:spcAft>
             </a:pPr>
             <a:r>
-              <a:rPr sz="1600" b="0">
+              <a:rPr sz="1400" b="0">
                 <a:solidFill>
                   <a:srgbClr val="E4ECF7"/>
                 </a:solidFill>
@@ -20104,8 +20192,8 @@
         </p:nvSpPr>
         <p:spPr>
           <a:xfrm>
-            <a:off x="685800" y="5153152"/>
-            <a:ext cx="10820095" cy="910336"/>
+            <a:off x="685800" y="5229351"/>
+            <a:ext cx="10820095" cy="513080"/>
           </a:xfrm>
           <a:prstGeom prst="rect">
             <a:avLst/>
@@ -20113,18 +20201,18 @@
           <a:noFill/>
         </p:spPr>
         <p:txBody>
-          <a:bodyPr wrap="square" anchor="t">
+          <a:bodyPr wrap="square" anchor="t" lIns="0" rIns="0" tIns="0" bIns="0">
             <a:spAutoFit/>
           </a:bodyPr>
           <a:lstStyle/>
           <a:p>
             <a:pPr>
               <a:spcAft>
-                <a:spcPts val="900"/>
+                <a:spcPts val="800"/>
               </a:spcAft>
             </a:pPr>
             <a:r>
-              <a:rPr sz="2000" b="0">
+              <a:rPr sz="1700" b="0">
                 <a:solidFill>
                   <a:srgbClr val="1C1C1A"/>
                 </a:solidFill>
@@ -20196,7 +20284,7 @@
           <a:noFill/>
         </p:spPr>
         <p:txBody>
-          <a:bodyPr wrap="square" anchor="t">
+          <a:bodyPr wrap="square" anchor="t" lIns="0" rIns="0" tIns="0" bIns="0">
             <a:spAutoFit/>
           </a:bodyPr>
           <a:lstStyle/>
@@ -20230,7 +20318,7 @@
           <a:noFill/>
         </p:spPr>
         <p:txBody>
-          <a:bodyPr wrap="square" anchor="t">
+          <a:bodyPr wrap="square" anchor="t" lIns="0" rIns="0" tIns="0" bIns="0">
             <a:spAutoFit/>
           </a:bodyPr>
           <a:lstStyle/>
@@ -20433,7 +20521,7 @@
           <a:noFill/>
         </p:spPr>
         <p:txBody>
-          <a:bodyPr wrap="square" anchor="ctr">
+          <a:bodyPr wrap="square" anchor="ctr" lIns="0" rIns="0" tIns="0" bIns="0">
             <a:spAutoFit/>
           </a:bodyPr>
           <a:lstStyle/>
@@ -20496,7 +20584,7 @@
       </p:sp>
       <p:pic>
         <p:nvPicPr>
-          <p:cNvPr id="7" name="Picture 6" descr="2857edf829618da0.png"/>
+          <p:cNvPr id="7" name="Picture 6" descr="1d0c3af45dc5702f.png"/>
           <p:cNvPicPr>
             <a:picLocks noChangeAspect="1"/>
           </p:cNvPicPr>
@@ -20510,7 +20598,7 @@
         </p:blipFill>
         <p:spPr>
           <a:xfrm>
-            <a:off x="685799" y="2207072"/>
+            <a:off x="685799" y="2161352"/>
             <a:ext cx="10820095" cy="1956175"/>
           </a:xfrm>
           <a:prstGeom prst="rect">
@@ -20526,8 +20614,8 @@
         </p:nvSpPr>
         <p:spPr>
           <a:xfrm>
-            <a:off x="685800" y="4852416"/>
-            <a:ext cx="10820095" cy="1200912"/>
+            <a:off x="685800" y="4263831"/>
+            <a:ext cx="10820095" cy="1255776"/>
           </a:xfrm>
           <a:prstGeom prst="rect">
             <a:avLst/>
@@ -20535,11 +20623,16 @@
           <a:noFill/>
         </p:spPr>
         <p:txBody>
-          <a:bodyPr wrap="square" anchor="t">
+          <a:bodyPr wrap="square" anchor="t" lIns="0" rIns="0" tIns="0" bIns="0">
             <a:spAutoFit/>
           </a:bodyPr>
           <a:lstStyle/>
           <a:p>
+            <a:pPr>
+              <a:spcAft>
+                <a:spcPts val="900"/>
+              </a:spcAft>
+            </a:pPr>
             <a:r>
               <a:rPr sz="2000" b="0">
                 <a:solidFill>
@@ -20613,7 +20706,7 @@
           <a:noFill/>
         </p:spPr>
         <p:txBody>
-          <a:bodyPr wrap="square" anchor="t">
+          <a:bodyPr wrap="square" anchor="t" lIns="0" rIns="0" tIns="0" bIns="0">
             <a:spAutoFit/>
           </a:bodyPr>
           <a:lstStyle/>
@@ -20647,7 +20740,7 @@
           <a:noFill/>
         </p:spPr>
         <p:txBody>
-          <a:bodyPr wrap="square" anchor="t">
+          <a:bodyPr wrap="square" anchor="t" lIns="0" rIns="0" tIns="0" bIns="0">
             <a:spAutoFit/>
           </a:bodyPr>
           <a:lstStyle/>
@@ -20797,7 +20890,7 @@
           <a:noFill/>
         </p:spPr>
         <p:txBody>
-          <a:bodyPr wrap="square" anchor="ctr">
+          <a:bodyPr wrap="square" anchor="ctr" lIns="0" rIns="0" tIns="0" bIns="0">
             <a:spAutoFit/>
           </a:bodyPr>
           <a:lstStyle/>
@@ -20866,8 +20959,8 @@
         </p:nvSpPr>
         <p:spPr>
           <a:xfrm>
-            <a:off x="685800" y="3070352"/>
-            <a:ext cx="10820095" cy="810768"/>
+            <a:off x="685800" y="3059176"/>
+            <a:ext cx="10820095" cy="833120"/>
           </a:xfrm>
           <a:prstGeom prst="rect">
             <a:avLst/>
@@ -20910,8 +21003,8 @@
         </p:nvSpPr>
         <p:spPr>
           <a:xfrm>
-            <a:off x="685800" y="3070352"/>
-            <a:ext cx="50292" cy="810768"/>
+            <a:off x="685800" y="3059176"/>
+            <a:ext cx="50292" cy="833120"/>
           </a:xfrm>
           <a:prstGeom prst="rect">
             <a:avLst/>
@@ -20954,8 +21047,8 @@
         </p:nvSpPr>
         <p:spPr>
           <a:xfrm>
-            <a:off x="923544" y="3170936"/>
-            <a:ext cx="10417759" cy="627888"/>
+            <a:off x="923544" y="3159760"/>
+            <a:ext cx="10417759" cy="650239"/>
           </a:xfrm>
           <a:prstGeom prst="rect">
             <a:avLst/>
@@ -20963,7 +21056,7 @@
           <a:noFill/>
         </p:spPr>
         <p:txBody>
-          <a:bodyPr wrap="square" anchor="t">
+          <a:bodyPr wrap="square" anchor="t" lIns="0" rIns="0" tIns="0" bIns="0">
             <a:spAutoFit/>
           </a:bodyPr>
           <a:lstStyle/>
@@ -21009,7 +21102,7 @@
         </p:nvSpPr>
         <p:spPr>
           <a:xfrm>
-            <a:off x="685800" y="4045712"/>
+            <a:off x="685800" y="4056888"/>
             <a:ext cx="10820095" cy="564896"/>
           </a:xfrm>
           <a:prstGeom prst="rect">
@@ -21018,7 +21111,7 @@
           <a:noFill/>
         </p:spPr>
         <p:txBody>
-          <a:bodyPr wrap="square" anchor="t">
+          <a:bodyPr wrap="square" anchor="t" lIns="0" rIns="0" tIns="0" bIns="0">
             <a:spAutoFit/>
           </a:bodyPr>
           <a:lstStyle/>
@@ -21101,7 +21194,7 @@
           <a:noFill/>
         </p:spPr>
         <p:txBody>
-          <a:bodyPr wrap="square" anchor="t">
+          <a:bodyPr wrap="square" anchor="t" lIns="0" rIns="0" tIns="0" bIns="0">
             <a:spAutoFit/>
           </a:bodyPr>
           <a:lstStyle/>
@@ -21135,7 +21228,7 @@
           <a:noFill/>
         </p:spPr>
         <p:txBody>
-          <a:bodyPr wrap="square" anchor="t">
+          <a:bodyPr wrap="square" anchor="t" lIns="0" rIns="0" tIns="0" bIns="0">
             <a:spAutoFit/>
           </a:bodyPr>
           <a:lstStyle/>
@@ -21338,7 +21431,7 @@
           <a:noFill/>
         </p:spPr>
         <p:txBody>
-          <a:bodyPr wrap="square" anchor="ctr">
+          <a:bodyPr wrap="square" anchor="ctr" lIns="0" rIns="0" tIns="0" bIns="0">
             <a:spAutoFit/>
           </a:bodyPr>
           <a:lstStyle/>
@@ -21409,7 +21502,7 @@
         </p:nvGraphicFramePr>
         <p:xfrm>
           <a:off x="685800" y="1627632"/>
-          <a:ext cx="10820095" cy="2971800"/>
+          <a:ext cx="10820094" cy="2971800"/>
         </p:xfrm>
         <a:graphic>
           <a:graphicData uri="http://schemas.openxmlformats.org/drawingml/2006/table">
@@ -21418,8 +21511,8 @@
                 <a:tableStyleId>{2D5ABB26-0587-4C30-8999-92F81FD0307C}</a:tableStyleId>
               </a:tblPr>
               <a:tblGrid>
-                <a:gridCol w="5410047"/>
-                <a:gridCol w="5410048"/>
+                <a:gridCol w="4767506"/>
+                <a:gridCol w="6052588"/>
               </a:tblGrid>
               <a:tr h="387096">
                 <a:tc>
@@ -21672,7 +21765,7 @@
           <a:noFill/>
         </p:spPr>
         <p:txBody>
-          <a:bodyPr wrap="square" anchor="t">
+          <a:bodyPr wrap="square" anchor="t" lIns="0" rIns="0" tIns="0" bIns="0">
             <a:spAutoFit/>
           </a:bodyPr>
           <a:lstStyle/>
@@ -21755,7 +21848,7 @@
           <a:noFill/>
         </p:spPr>
         <p:txBody>
-          <a:bodyPr wrap="square" anchor="t">
+          <a:bodyPr wrap="square" anchor="t" lIns="0" rIns="0" tIns="0" bIns="0">
             <a:spAutoFit/>
           </a:bodyPr>
           <a:lstStyle/>
@@ -21789,7 +21882,7 @@
           <a:noFill/>
         </p:spPr>
         <p:txBody>
-          <a:bodyPr wrap="square" anchor="t">
+          <a:bodyPr wrap="square" anchor="t" lIns="0" rIns="0" tIns="0" bIns="0">
             <a:spAutoFit/>
           </a:bodyPr>
           <a:lstStyle/>
@@ -21939,7 +22032,7 @@
           <a:noFill/>
         </p:spPr>
         <p:txBody>
-          <a:bodyPr wrap="square" anchor="ctr">
+          <a:bodyPr wrap="square" anchor="ctr" lIns="0" rIns="0" tIns="0" bIns="0">
             <a:spAutoFit/>
           </a:bodyPr>
           <a:lstStyle/>
@@ -22017,7 +22110,7 @@
           <a:noFill/>
         </p:spPr>
         <p:txBody>
-          <a:bodyPr wrap="square" anchor="t">
+          <a:bodyPr wrap="square" anchor="t" lIns="0" rIns="0" tIns="0" bIns="0">
             <a:spAutoFit/>
           </a:bodyPr>
           <a:lstStyle/>
@@ -22116,7 +22209,7 @@
           <a:noFill/>
         </p:spPr>
         <p:txBody>
-          <a:bodyPr wrap="square" anchor="t">
+          <a:bodyPr wrap="square" anchor="t" lIns="0" rIns="0" tIns="0" bIns="0">
             <a:spAutoFit/>
           </a:bodyPr>
           <a:lstStyle/>
@@ -22150,7 +22243,7 @@
           <a:noFill/>
         </p:spPr>
         <p:txBody>
-          <a:bodyPr wrap="square" anchor="t">
+          <a:bodyPr wrap="square" anchor="t" lIns="0" rIns="0" tIns="0" bIns="0">
             <a:spAutoFit/>
           </a:bodyPr>
           <a:lstStyle/>
@@ -22353,7 +22446,7 @@
           <a:noFill/>
         </p:spPr>
         <p:txBody>
-          <a:bodyPr wrap="square" anchor="ctr">
+          <a:bodyPr wrap="square" anchor="ctr" lIns="0" rIns="0" tIns="0" bIns="0">
             <a:spAutoFit/>
           </a:bodyPr>
           <a:lstStyle/>
@@ -22422,7 +22515,7 @@
         </p:nvSpPr>
         <p:spPr>
           <a:xfrm>
-            <a:off x="685800" y="2057400"/>
+            <a:off x="685800" y="2056384"/>
             <a:ext cx="10820095" cy="1820672"/>
           </a:xfrm>
           <a:prstGeom prst="rect">
@@ -22431,7 +22524,7 @@
           <a:noFill/>
         </p:spPr>
         <p:txBody>
-          <a:bodyPr wrap="square" anchor="t">
+          <a:bodyPr wrap="square" anchor="t" lIns="0" rIns="0" tIns="0" bIns="0">
             <a:spAutoFit/>
           </a:bodyPr>
           <a:lstStyle/>
@@ -22493,8 +22586,8 @@
         </p:nvSpPr>
         <p:spPr>
           <a:xfrm>
-            <a:off x="685800" y="4006088"/>
-            <a:ext cx="10820095" cy="542543"/>
+            <a:off x="685800" y="4005072"/>
+            <a:ext cx="10820095" cy="544576"/>
           </a:xfrm>
           <a:prstGeom prst="rect">
             <a:avLst/>
@@ -22537,8 +22630,8 @@
         </p:nvSpPr>
         <p:spPr>
           <a:xfrm>
-            <a:off x="685800" y="4006088"/>
-            <a:ext cx="50292" cy="542543"/>
+            <a:off x="685800" y="4005072"/>
+            <a:ext cx="50292" cy="544576"/>
           </a:xfrm>
           <a:prstGeom prst="rect">
             <a:avLst/>
@@ -22581,8 +22674,8 @@
         </p:nvSpPr>
         <p:spPr>
           <a:xfrm>
-            <a:off x="923544" y="4106672"/>
-            <a:ext cx="10417759" cy="359663"/>
+            <a:off x="923544" y="4105656"/>
+            <a:ext cx="10417759" cy="361696"/>
           </a:xfrm>
           <a:prstGeom prst="rect">
             <a:avLst/>
@@ -22590,7 +22683,7 @@
           <a:noFill/>
         </p:spPr>
         <p:txBody>
-          <a:bodyPr wrap="square" anchor="t">
+          <a:bodyPr wrap="square" anchor="t" lIns="0" rIns="0" tIns="0" bIns="0">
             <a:spAutoFit/>
           </a:bodyPr>
           <a:lstStyle/>
@@ -22620,7 +22713,7 @@
         </p:nvSpPr>
         <p:spPr>
           <a:xfrm>
-            <a:off x="685800" y="4713224"/>
+            <a:off x="685800" y="4714240"/>
             <a:ext cx="10820095" cy="910336"/>
           </a:xfrm>
           <a:prstGeom prst="rect">
@@ -22629,7 +22722,7 @@
           <a:noFill/>
         </p:spPr>
         <p:txBody>
-          <a:bodyPr wrap="square" anchor="t">
+          <a:bodyPr wrap="square" anchor="t" lIns="0" rIns="0" tIns="0" bIns="0">
             <a:spAutoFit/>
           </a:bodyPr>
           <a:lstStyle/>
@@ -22712,7 +22805,7 @@
           <a:noFill/>
         </p:spPr>
         <p:txBody>
-          <a:bodyPr wrap="square" anchor="t">
+          <a:bodyPr wrap="square" anchor="t" lIns="0" rIns="0" tIns="0" bIns="0">
             <a:spAutoFit/>
           </a:bodyPr>
           <a:lstStyle/>
@@ -22746,7 +22839,7 @@
           <a:noFill/>
         </p:spPr>
         <p:txBody>
-          <a:bodyPr wrap="square" anchor="t">
+          <a:bodyPr wrap="square" anchor="t" lIns="0" rIns="0" tIns="0" bIns="0">
             <a:spAutoFit/>
           </a:bodyPr>
           <a:lstStyle/>
@@ -22896,7 +22989,7 @@
           <a:noFill/>
         </p:spPr>
         <p:txBody>
-          <a:bodyPr wrap="square" anchor="ctr">
+          <a:bodyPr wrap="square" anchor="ctr" lIns="0" rIns="0" tIns="0" bIns="0">
             <a:spAutoFit/>
           </a:bodyPr>
           <a:lstStyle/>
@@ -22974,7 +23067,7 @@
           <a:noFill/>
         </p:spPr>
         <p:txBody>
-          <a:bodyPr wrap="square" anchor="t">
+          <a:bodyPr wrap="square" anchor="t" lIns="0" rIns="0" tIns="0" bIns="0">
             <a:spAutoFit/>
           </a:bodyPr>
           <a:lstStyle/>
@@ -23089,7 +23182,7 @@
           <a:noFill/>
         </p:spPr>
         <p:txBody>
-          <a:bodyPr wrap="square" anchor="t">
+          <a:bodyPr wrap="square" anchor="t" lIns="0" rIns="0" tIns="0" bIns="0">
             <a:spAutoFit/>
           </a:bodyPr>
           <a:lstStyle/>
@@ -23123,7 +23216,7 @@
           <a:noFill/>
         </p:spPr>
         <p:txBody>
-          <a:bodyPr wrap="square" anchor="t">
+          <a:bodyPr wrap="square" anchor="t" lIns="0" rIns="0" tIns="0" bIns="0">
             <a:spAutoFit/>
           </a:bodyPr>
           <a:lstStyle/>
@@ -23326,7 +23419,7 @@
           <a:noFill/>
         </p:spPr>
         <p:txBody>
-          <a:bodyPr wrap="square" anchor="ctr">
+          <a:bodyPr wrap="square" anchor="ctr" lIns="0" rIns="0" tIns="0" bIns="0">
             <a:spAutoFit/>
           </a:bodyPr>
           <a:lstStyle/>
@@ -23389,7 +23482,7 @@
       </p:sp>
       <p:pic>
         <p:nvPicPr>
-          <p:cNvPr id="7" name="Picture 6" descr="70516a823cae1d19.png"/>
+          <p:cNvPr id="7" name="Picture 6" descr="47ad4e4067f39849.png"/>
           <p:cNvPicPr>
             <a:picLocks noChangeAspect="1"/>
           </p:cNvPicPr>
@@ -23419,8 +23512,8 @@
         </p:nvSpPr>
         <p:spPr>
           <a:xfrm>
-            <a:off x="5771244" y="3385312"/>
-            <a:ext cx="5734650" cy="910336"/>
+            <a:off x="5771244" y="3212592"/>
+            <a:ext cx="5734650" cy="1255776"/>
           </a:xfrm>
           <a:prstGeom prst="rect">
             <a:avLst/>
@@ -23428,7 +23521,7 @@
           <a:noFill/>
         </p:spPr>
         <p:txBody>
-          <a:bodyPr wrap="square" anchor="t">
+          <a:bodyPr wrap="square" anchor="t" lIns="0" rIns="0" tIns="0" bIns="0">
             <a:spAutoFit/>
           </a:bodyPr>
           <a:lstStyle/>
@@ -23511,7 +23604,7 @@
           <a:noFill/>
         </p:spPr>
         <p:txBody>
-          <a:bodyPr wrap="square" anchor="t">
+          <a:bodyPr wrap="square" anchor="t" lIns="0" rIns="0" tIns="0" bIns="0">
             <a:spAutoFit/>
           </a:bodyPr>
           <a:lstStyle/>
@@ -23545,7 +23638,7 @@
           <a:noFill/>
         </p:spPr>
         <p:txBody>
-          <a:bodyPr wrap="square" anchor="t">
+          <a:bodyPr wrap="square" anchor="t" lIns="0" rIns="0" tIns="0" bIns="0">
             <a:spAutoFit/>
           </a:bodyPr>
           <a:lstStyle/>
@@ -23748,7 +23841,7 @@
           <a:noFill/>
         </p:spPr>
         <p:txBody>
-          <a:bodyPr wrap="square" anchor="ctr">
+          <a:bodyPr wrap="square" anchor="ctr" lIns="0" rIns="0" tIns="0" bIns="0">
             <a:spAutoFit/>
           </a:bodyPr>
           <a:lstStyle/>
@@ -23819,7 +23912,7 @@
         </p:nvGraphicFramePr>
         <p:xfrm>
           <a:off x="685800" y="1627632"/>
-          <a:ext cx="10820095" cy="2968752"/>
+          <a:ext cx="10820094" cy="2968752"/>
         </p:xfrm>
         <a:graphic>
           <a:graphicData uri="http://schemas.openxmlformats.org/drawingml/2006/table">
@@ -23828,8 +23921,8 @@
                 <a:tableStyleId>{2D5ABB26-0587-4C30-8999-92F81FD0307C}</a:tableStyleId>
               </a:tblPr>
               <a:tblGrid>
-                <a:gridCol w="5410047"/>
-                <a:gridCol w="5410048"/>
+                <a:gridCol w="3217622"/>
+                <a:gridCol w="7602472"/>
               </a:tblGrid>
               <a:tr h="387096">
                 <a:tc>
@@ -24174,7 +24267,7 @@
           <a:noFill/>
         </p:spPr>
         <p:txBody>
-          <a:bodyPr wrap="square" anchor="t">
+          <a:bodyPr wrap="square" anchor="t" lIns="0" rIns="0" tIns="0" bIns="0">
             <a:spAutoFit/>
           </a:bodyPr>
           <a:lstStyle/>
@@ -24257,7 +24350,7 @@
           <a:noFill/>
         </p:spPr>
         <p:txBody>
-          <a:bodyPr wrap="square" anchor="t">
+          <a:bodyPr wrap="square" anchor="t" lIns="0" rIns="0" tIns="0" bIns="0">
             <a:spAutoFit/>
           </a:bodyPr>
           <a:lstStyle/>
@@ -24291,7 +24384,7 @@
           <a:noFill/>
         </p:spPr>
         <p:txBody>
-          <a:bodyPr wrap="square" anchor="t">
+          <a:bodyPr wrap="square" anchor="t" lIns="0" rIns="0" tIns="0" bIns="0">
             <a:spAutoFit/>
           </a:bodyPr>
           <a:lstStyle/>
@@ -24494,7 +24587,7 @@
           <a:noFill/>
         </p:spPr>
         <p:txBody>
-          <a:bodyPr wrap="square" anchor="ctr">
+          <a:bodyPr wrap="square" anchor="ctr" lIns="0" rIns="0" tIns="0" bIns="0">
             <a:spAutoFit/>
           </a:bodyPr>
           <a:lstStyle/>
@@ -24563,8 +24656,8 @@
         </p:nvSpPr>
         <p:spPr>
           <a:xfrm>
-            <a:off x="685800" y="2584704"/>
-            <a:ext cx="10820095" cy="2511552"/>
+            <a:off x="685800" y="2239264"/>
+            <a:ext cx="10820095" cy="3202432"/>
           </a:xfrm>
           <a:prstGeom prst="rect">
             <a:avLst/>
@@ -24572,7 +24665,7 @@
           <a:noFill/>
         </p:spPr>
         <p:txBody>
-          <a:bodyPr wrap="square" anchor="t">
+          <a:bodyPr wrap="square" anchor="t" lIns="0" rIns="0" tIns="0" bIns="0">
             <a:spAutoFit/>
           </a:bodyPr>
           <a:lstStyle/>
@@ -24687,7 +24780,7 @@
           <a:noFill/>
         </p:spPr>
         <p:txBody>
-          <a:bodyPr wrap="square" anchor="t">
+          <a:bodyPr wrap="square" anchor="t" lIns="0" rIns="0" tIns="0" bIns="0">
             <a:spAutoFit/>
           </a:bodyPr>
           <a:lstStyle/>
@@ -24721,7 +24814,7 @@
           <a:noFill/>
         </p:spPr>
         <p:txBody>
-          <a:bodyPr wrap="square" anchor="t">
+          <a:bodyPr wrap="square" anchor="t" lIns="0" rIns="0" tIns="0" bIns="0">
             <a:spAutoFit/>
           </a:bodyPr>
           <a:lstStyle/>
@@ -24871,7 +24964,7 @@
           <a:noFill/>
         </p:spPr>
         <p:txBody>
-          <a:bodyPr wrap="square" anchor="ctr">
+          <a:bodyPr wrap="square" anchor="ctr" lIns="0" rIns="0" tIns="0" bIns="0">
             <a:spAutoFit/>
           </a:bodyPr>
           <a:lstStyle/>
@@ -24941,7 +25034,7 @@
         <p:spPr>
           <a:xfrm>
             <a:off x="685800" y="1627632"/>
-            <a:ext cx="10820095" cy="564896"/>
+            <a:ext cx="10820095" cy="478536"/>
           </a:xfrm>
           <a:prstGeom prst="rect">
             <a:avLst/>
@@ -24949,18 +25042,18 @@
           <a:noFill/>
         </p:spPr>
         <p:txBody>
-          <a:bodyPr wrap="square" anchor="t">
+          <a:bodyPr wrap="square" anchor="t" lIns="0" rIns="0" tIns="0" bIns="0">
             <a:spAutoFit/>
           </a:bodyPr>
           <a:lstStyle/>
           <a:p>
             <a:pPr>
               <a:spcAft>
-                <a:spcPts val="900"/>
+                <a:spcPts val="700"/>
               </a:spcAft>
             </a:pPr>
             <a:r>
-              <a:rPr sz="2000" b="0">
+              <a:rPr sz="1500" b="0">
                 <a:solidFill>
                   <a:srgbClr val="1C1C1A"/>
                 </a:solidFill>
@@ -24979,8 +25072,8 @@
         </p:nvSpPr>
         <p:spPr>
           <a:xfrm>
-            <a:off x="685800" y="2320544"/>
-            <a:ext cx="10820095" cy="1347216"/>
+            <a:off x="685800" y="2234184"/>
+            <a:ext cx="10820095" cy="1121664"/>
           </a:xfrm>
           <a:prstGeom prst="rect">
             <a:avLst/>
@@ -25023,8 +25116,8 @@
         </p:nvSpPr>
         <p:spPr>
           <a:xfrm>
-            <a:off x="685800" y="2320544"/>
-            <a:ext cx="50292" cy="1347216"/>
+            <a:off x="685800" y="2234184"/>
+            <a:ext cx="50292" cy="1121664"/>
           </a:xfrm>
           <a:prstGeom prst="rect">
             <a:avLst/>
@@ -25067,8 +25160,8 @@
         </p:nvSpPr>
         <p:spPr>
           <a:xfrm>
-            <a:off x="923544" y="2421128"/>
-            <a:ext cx="10417759" cy="1164336"/>
+            <a:off x="923544" y="2334768"/>
+            <a:ext cx="10417759" cy="938784"/>
           </a:xfrm>
           <a:prstGeom prst="rect">
             <a:avLst/>
@@ -25076,7 +25169,7 @@
           <a:noFill/>
         </p:spPr>
         <p:txBody>
-          <a:bodyPr wrap="square" anchor="t">
+          <a:bodyPr wrap="square" anchor="t" lIns="0" rIns="0" tIns="0" bIns="0">
             <a:spAutoFit/>
           </a:bodyPr>
           <a:lstStyle/>
@@ -25087,7 +25180,7 @@
               </a:spcAft>
             </a:pPr>
             <a:r>
-              <a:rPr sz="1600" b="0">
+              <a:rPr sz="1200" b="0">
                 <a:solidFill>
                   <a:srgbClr val="E4ECF7"/>
                 </a:solidFill>
@@ -25103,7 +25196,7 @@
               </a:spcAft>
             </a:pPr>
             <a:r>
-              <a:rPr sz="1600" b="0">
+              <a:rPr sz="1200" b="0">
                 <a:solidFill>
                   <a:srgbClr val="E4ECF7"/>
                 </a:solidFill>
@@ -25119,7 +25212,7 @@
               </a:spcAft>
             </a:pPr>
             <a:r>
-              <a:rPr sz="1600" b="0">
+              <a:rPr sz="1200" b="0">
                 <a:solidFill>
                   <a:srgbClr val="E4ECF7"/>
                 </a:solidFill>
@@ -25135,7 +25228,7 @@
               </a:spcAft>
             </a:pPr>
             <a:r>
-              <a:rPr sz="1600" b="0">
+              <a:rPr sz="1200" b="0">
                 <a:solidFill>
                   <a:srgbClr val="E4ECF7"/>
                 </a:solidFill>
@@ -25154,8 +25247,8 @@
         </p:nvSpPr>
         <p:spPr>
           <a:xfrm>
-            <a:off x="685800" y="3832351"/>
-            <a:ext cx="10820095" cy="564896"/>
+            <a:off x="685800" y="3520440"/>
+            <a:ext cx="10820095" cy="478536"/>
           </a:xfrm>
           <a:prstGeom prst="rect">
             <a:avLst/>
@@ -25163,18 +25256,18 @@
           <a:noFill/>
         </p:spPr>
         <p:txBody>
-          <a:bodyPr wrap="square" anchor="t">
+          <a:bodyPr wrap="square" anchor="t" lIns="0" rIns="0" tIns="0" bIns="0">
             <a:spAutoFit/>
           </a:bodyPr>
           <a:lstStyle/>
           <a:p>
             <a:pPr>
               <a:spcAft>
-                <a:spcPts val="900"/>
+                <a:spcPts val="700"/>
               </a:spcAft>
             </a:pPr>
             <a:r>
-              <a:rPr sz="2000" b="0">
+              <a:rPr sz="1500" b="0">
                 <a:solidFill>
                   <a:srgbClr val="1C1C1A"/>
                 </a:solidFill>
@@ -25187,7 +25280,7 @@
       </p:sp>
       <p:pic>
         <p:nvPicPr>
-          <p:cNvPr id="11" name="Picture 10" descr="76139522eb7d5cd6.png"/>
+          <p:cNvPr id="11" name="Picture 10" descr="26e9a147d9f8cec9.png"/>
           <p:cNvPicPr>
             <a:picLocks noChangeAspect="1"/>
           </p:cNvPicPr>
@@ -25201,8 +25294,8 @@
         </p:blipFill>
         <p:spPr>
           <a:xfrm>
-            <a:off x="3202471" y="4525263"/>
-            <a:ext cx="5786751" cy="1528064"/>
+            <a:off x="2459890" y="4133087"/>
+            <a:ext cx="7271914" cy="1920240"/>
           </a:xfrm>
           <a:prstGeom prst="rect">
             <a:avLst/>
@@ -25270,7 +25363,7 @@
           <a:noFill/>
         </p:spPr>
         <p:txBody>
-          <a:bodyPr wrap="square" anchor="t">
+          <a:bodyPr wrap="square" anchor="t" lIns="0" rIns="0" tIns="0" bIns="0">
             <a:spAutoFit/>
           </a:bodyPr>
           <a:lstStyle/>
@@ -25304,7 +25397,7 @@
           <a:noFill/>
         </p:spPr>
         <p:txBody>
-          <a:bodyPr wrap="square" anchor="t">
+          <a:bodyPr wrap="square" anchor="t" lIns="0" rIns="0" tIns="0" bIns="0">
             <a:spAutoFit/>
           </a:bodyPr>
           <a:lstStyle/>
@@ -25507,7 +25600,7 @@
           <a:noFill/>
         </p:spPr>
         <p:txBody>
-          <a:bodyPr wrap="square" anchor="ctr">
+          <a:bodyPr wrap="square" anchor="ctr" lIns="0" rIns="0" tIns="0" bIns="0">
             <a:spAutoFit/>
           </a:bodyPr>
           <a:lstStyle/>
@@ -25585,7 +25678,7 @@
           <a:noFill/>
         </p:spPr>
         <p:txBody>
-          <a:bodyPr wrap="square" anchor="t">
+          <a:bodyPr wrap="square" anchor="t" lIns="0" rIns="0" tIns="0" bIns="0">
             <a:spAutoFit/>
           </a:bodyPr>
           <a:lstStyle/>
@@ -25617,7 +25710,7 @@
         </p:nvGraphicFramePr>
         <p:xfrm>
           <a:off x="685800" y="2665984"/>
-          <a:ext cx="10820095" cy="2325624"/>
+          <a:ext cx="10820093" cy="2325624"/>
         </p:xfrm>
         <a:graphic>
           <a:graphicData uri="http://schemas.openxmlformats.org/drawingml/2006/table">
@@ -25626,9 +25719,9 @@
                 <a:tableStyleId>{2D5ABB26-0587-4C30-8999-92F81FD0307C}</a:tableStyleId>
               </a:tblPr>
               <a:tblGrid>
-                <a:gridCol w="3606698"/>
-                <a:gridCol w="3606698"/>
-                <a:gridCol w="3606699"/>
+                <a:gridCol w="3079061"/>
+                <a:gridCol w="3320707"/>
+                <a:gridCol w="4420325"/>
               </a:tblGrid>
               <a:tr h="387096">
                 <a:tc>
@@ -25923,7 +26016,7 @@
           <a:noFill/>
         </p:spPr>
         <p:txBody>
-          <a:bodyPr wrap="square" anchor="t">
+          <a:bodyPr wrap="square" anchor="t" lIns="0" rIns="0" tIns="0" bIns="0">
             <a:spAutoFit/>
           </a:bodyPr>
           <a:lstStyle/>
@@ -26006,7 +26099,7 @@
           <a:noFill/>
         </p:spPr>
         <p:txBody>
-          <a:bodyPr wrap="square" anchor="t">
+          <a:bodyPr wrap="square" anchor="t" lIns="0" rIns="0" tIns="0" bIns="0">
             <a:spAutoFit/>
           </a:bodyPr>
           <a:lstStyle/>
@@ -26040,7 +26133,7 @@
           <a:noFill/>
         </p:spPr>
         <p:txBody>
-          <a:bodyPr wrap="square" anchor="t">
+          <a:bodyPr wrap="square" anchor="t" lIns="0" rIns="0" tIns="0" bIns="0">
             <a:spAutoFit/>
           </a:bodyPr>
           <a:lstStyle/>
@@ -26190,7 +26283,7 @@
           <a:noFill/>
         </p:spPr>
         <p:txBody>
-          <a:bodyPr wrap="square" anchor="ctr">
+          <a:bodyPr wrap="square" anchor="ctr" lIns="0" rIns="0" tIns="0" bIns="0">
             <a:spAutoFit/>
           </a:bodyPr>
           <a:lstStyle/>
@@ -26251,9 +26344,64 @@
           </a:p>
         </p:txBody>
       </p:sp>
+      <p:sp>
+        <p:nvSpPr>
+          <p:cNvPr id="6" name="TextBox 5"/>
+          <p:cNvSpPr txBox="1"/>
+          <p:nvPr/>
+        </p:nvSpPr>
+        <p:spPr>
+          <a:xfrm>
+            <a:off x="685800" y="2141727"/>
+            <a:ext cx="10820095" cy="1020064"/>
+          </a:xfrm>
+          <a:prstGeom prst="rect">
+            <a:avLst/>
+          </a:prstGeom>
+          <a:noFill/>
+        </p:spPr>
+        <p:txBody>
+          <a:bodyPr wrap="square" anchor="t" lIns="0" rIns="0" tIns="0" bIns="0">
+            <a:spAutoFit/>
+          </a:bodyPr>
+          <a:lstStyle/>
+          <a:p>
+            <a:pPr>
+              <a:spcAft>
+                <a:spcPts val="900"/>
+              </a:spcAft>
+            </a:pPr>
+            <a:r>
+              <a:rPr sz="2000" b="0">
+                <a:solidFill>
+                  <a:srgbClr val="1C1C1A"/>
+                </a:solidFill>
+                <a:latin typeface="Calibri"/>
+              </a:rPr>
+              <a:t>"Why is a bare except worse than letting the code crash?"</a:t>
+            </a:r>
+          </a:p>
+          <a:p>
+            <a:pPr>
+              <a:spcAft>
+                <a:spcPts val="900"/>
+              </a:spcAft>
+            </a:pPr>
+            <a:r>
+              <a:rPr sz="2000" b="0">
+                <a:solidFill>
+                  <a:srgbClr val="1C1C1A"/>
+                </a:solidFill>
+                <a:latin typeface="Calibri"/>
+              </a:rPr>
+              <a:t>You can answer this now, with today's two output lines as your evidence.</a:t>
+            </a:r>
+          </a:p>
+        </p:txBody>
+      </p:sp>
       <p:pic>
         <p:nvPicPr>
-          <p:cNvPr id="6" name="Picture 5" descr="bfdc11f73f2d54c9.png"/>
+          <p:cNvPr id="7" name="Picture 6" descr="fed3029ccc90a417.png"/>
           <p:cNvPicPr>
             <a:picLocks noChangeAspect="1"/>
           </p:cNvPicPr>
@@ -26267,48 +26415,14 @@
         </p:blipFill>
         <p:spPr>
           <a:xfrm>
-            <a:off x="685799" y="1887758"/>
-            <a:ext cx="10820095" cy="2940243"/>
+            <a:off x="1721357" y="3675887"/>
+            <a:ext cx="8748979" cy="2377440"/>
           </a:xfrm>
           <a:prstGeom prst="rect">
             <a:avLst/>
           </a:prstGeom>
         </p:spPr>
       </p:pic>
-      <p:sp>
-        <p:nvSpPr>
-          <p:cNvPr id="7" name="TextBox 6"/>
-          <p:cNvSpPr txBox="1"/>
-          <p:nvPr/>
-        </p:nvSpPr>
-        <p:spPr>
-          <a:xfrm>
-            <a:off x="685800" y="5197856"/>
-            <a:ext cx="10820095" cy="855471"/>
-          </a:xfrm>
-          <a:prstGeom prst="rect">
-            <a:avLst/>
-          </a:prstGeom>
-          <a:noFill/>
-        </p:spPr>
-        <p:txBody>
-          <a:bodyPr wrap="square" anchor="t">
-            <a:spAutoFit/>
-          </a:bodyPr>
-          <a:lstStyle/>
-          <a:p>
-            <a:r>
-              <a:rPr sz="2000" b="0">
-                <a:solidFill>
-                  <a:srgbClr val="1C1C1A"/>
-                </a:solidFill>
-                <a:latin typeface="Calibri"/>
-              </a:rPr>
-              <a:t>"Why is a bare except worse than letting the code crash?" You can answer this now, with today's two output lines as your evidence.</a:t>
-            </a:r>
-          </a:p>
-        </p:txBody>
-      </p:sp>
       <p:sp>
         <p:nvSpPr>
           <p:cNvPr id="8" name="Rectangle 7"/>
@@ -26370,7 +26484,7 @@
           <a:noFill/>
         </p:spPr>
         <p:txBody>
-          <a:bodyPr wrap="square" anchor="t">
+          <a:bodyPr wrap="square" anchor="t" lIns="0" rIns="0" tIns="0" bIns="0">
             <a:spAutoFit/>
           </a:bodyPr>
           <a:lstStyle/>
@@ -26404,7 +26518,7 @@
           <a:noFill/>
         </p:spPr>
         <p:txBody>
-          <a:bodyPr wrap="square" anchor="t">
+          <a:bodyPr wrap="square" anchor="t" lIns="0" rIns="0" tIns="0" bIns="0">
             <a:spAutoFit/>
           </a:bodyPr>
           <a:lstStyle/>
@@ -26554,7 +26668,7 @@
           <a:noFill/>
         </p:spPr>
         <p:txBody>
-          <a:bodyPr wrap="square" anchor="ctr">
+          <a:bodyPr wrap="square" anchor="ctr" lIns="0" rIns="0" tIns="0" bIns="0">
             <a:spAutoFit/>
           </a:bodyPr>
           <a:lstStyle/>
@@ -26632,7 +26746,7 @@
           <a:noFill/>
         </p:spPr>
         <p:txBody>
-          <a:bodyPr wrap="square" anchor="t">
+          <a:bodyPr wrap="square" anchor="t" lIns="0" rIns="0" tIns="0" bIns="0">
             <a:spAutoFit/>
           </a:bodyPr>
           <a:lstStyle/>
@@ -26666,7 +26780,7 @@
           <a:noFill/>
         </p:spPr>
         <p:txBody>
-          <a:bodyPr wrap="square" anchor="t">
+          <a:bodyPr wrap="square" anchor="t" lIns="0" rIns="0" tIns="0" bIns="0">
             <a:spAutoFit/>
           </a:bodyPr>
           <a:lstStyle/>
@@ -26700,7 +26814,7 @@
           <a:noFill/>
         </p:spPr>
         <p:txBody>
-          <a:bodyPr wrap="square" anchor="t">
+          <a:bodyPr wrap="square" anchor="t" lIns="0" rIns="0" tIns="0" bIns="0">
             <a:spAutoFit/>
           </a:bodyPr>
           <a:lstStyle/>
@@ -26734,7 +26848,7 @@
           <a:noFill/>
         </p:spPr>
         <p:txBody>
-          <a:bodyPr wrap="square" anchor="t">
+          <a:bodyPr wrap="square" anchor="t" lIns="0" rIns="0" tIns="0" bIns="0">
             <a:spAutoFit/>
           </a:bodyPr>
           <a:lstStyle/>
@@ -26768,7 +26882,7 @@
           <a:noFill/>
         </p:spPr>
         <p:txBody>
-          <a:bodyPr wrap="square" anchor="t">
+          <a:bodyPr wrap="square" anchor="t" lIns="0" rIns="0" tIns="0" bIns="0">
             <a:spAutoFit/>
           </a:bodyPr>
           <a:lstStyle/>
@@ -26802,7 +26916,7 @@
           <a:noFill/>
         </p:spPr>
         <p:txBody>
-          <a:bodyPr wrap="square" anchor="t">
+          <a:bodyPr wrap="square" anchor="t" lIns="0" rIns="0" tIns="0" bIns="0">
             <a:spAutoFit/>
           </a:bodyPr>
           <a:lstStyle/>
@@ -26836,7 +26950,7 @@
           <a:noFill/>
         </p:spPr>
         <p:txBody>
-          <a:bodyPr wrap="square" anchor="t">
+          <a:bodyPr wrap="square" anchor="t" lIns="0" rIns="0" tIns="0" bIns="0">
             <a:spAutoFit/>
           </a:bodyPr>
           <a:lstStyle/>
@@ -26870,7 +26984,7 @@
           <a:noFill/>
         </p:spPr>
         <p:txBody>
-          <a:bodyPr wrap="square" anchor="t">
+          <a:bodyPr wrap="square" anchor="t" lIns="0" rIns="0" tIns="0" bIns="0">
             <a:spAutoFit/>
           </a:bodyPr>
           <a:lstStyle/>
@@ -26948,7 +27062,7 @@
           <a:noFill/>
         </p:spPr>
         <p:txBody>
-          <a:bodyPr wrap="square" anchor="t">
+          <a:bodyPr wrap="square" anchor="t" lIns="0" rIns="0" tIns="0" bIns="0">
             <a:spAutoFit/>
           </a:bodyPr>
           <a:lstStyle/>
@@ -26982,7 +27096,7 @@
           <a:noFill/>
         </p:spPr>
         <p:txBody>
-          <a:bodyPr wrap="square" anchor="t">
+          <a:bodyPr wrap="square" anchor="t" lIns="0" rIns="0" tIns="0" bIns="0">
             <a:spAutoFit/>
           </a:bodyPr>
           <a:lstStyle/>
@@ -27079,7 +27193,7 @@
           <a:noFill/>
         </p:spPr>
         <p:txBody>
-          <a:bodyPr wrap="square" anchor="ctr">
+          <a:bodyPr wrap="square" anchor="ctr" lIns="0" rIns="0" tIns="0" bIns="0">
             <a:spAutoFit/>
           </a:bodyPr>
           <a:lstStyle/>
@@ -27423,7 +27537,7 @@
           <a:noFill/>
         </p:spPr>
         <p:txBody>
-          <a:bodyPr wrap="square" anchor="t">
+          <a:bodyPr wrap="square" anchor="t" lIns="0" rIns="0" tIns="0" bIns="0">
             <a:spAutoFit/>
           </a:bodyPr>
           <a:lstStyle/>
@@ -27457,7 +27571,7 @@
           <a:noFill/>
         </p:spPr>
         <p:txBody>
-          <a:bodyPr wrap="square" anchor="t">
+          <a:bodyPr wrap="square" anchor="t" lIns="0" rIns="0" tIns="0" bIns="0">
             <a:spAutoFit/>
           </a:bodyPr>
           <a:lstStyle/>
@@ -27607,7 +27721,7 @@
           <a:noFill/>
         </p:spPr>
         <p:txBody>
-          <a:bodyPr wrap="square" anchor="ctr">
+          <a:bodyPr wrap="square" anchor="ctr" lIns="0" rIns="0" tIns="0" bIns="0">
             <a:spAutoFit/>
           </a:bodyPr>
           <a:lstStyle/>
@@ -27685,7 +27799,7 @@
           <a:noFill/>
         </p:spPr>
         <p:txBody>
-          <a:bodyPr wrap="square" anchor="t">
+          <a:bodyPr wrap="square" anchor="t" lIns="0" rIns="0" tIns="0" bIns="0">
             <a:spAutoFit/>
           </a:bodyPr>
           <a:lstStyle/>
@@ -27784,7 +27898,7 @@
           <a:noFill/>
         </p:spPr>
         <p:txBody>
-          <a:bodyPr wrap="square" anchor="t">
+          <a:bodyPr wrap="square" anchor="t" lIns="0" rIns="0" tIns="0" bIns="0">
             <a:spAutoFit/>
           </a:bodyPr>
           <a:lstStyle/>
@@ -27818,7 +27932,7 @@
           <a:noFill/>
         </p:spPr>
         <p:txBody>
-          <a:bodyPr wrap="square" anchor="t">
+          <a:bodyPr wrap="square" anchor="t" lIns="0" rIns="0" tIns="0" bIns="0">
             <a:spAutoFit/>
           </a:bodyPr>
           <a:lstStyle/>
@@ -27968,7 +28082,7 @@
           <a:noFill/>
         </p:spPr>
         <p:txBody>
-          <a:bodyPr wrap="square" anchor="ctr">
+          <a:bodyPr wrap="square" anchor="ctr" lIns="0" rIns="0" tIns="0" bIns="0">
             <a:spAutoFit/>
           </a:bodyPr>
           <a:lstStyle/>
@@ -28046,7 +28160,7 @@
           <a:noFill/>
         </p:spPr>
         <p:txBody>
-          <a:bodyPr wrap="square" anchor="t">
+          <a:bodyPr wrap="square" anchor="t" lIns="0" rIns="0" tIns="0" bIns="0">
             <a:spAutoFit/>
           </a:bodyPr>
           <a:lstStyle/>
@@ -28193,7 +28307,7 @@
           <a:noFill/>
         </p:spPr>
         <p:txBody>
-          <a:bodyPr wrap="square" anchor="t">
+          <a:bodyPr wrap="square" anchor="t" lIns="0" rIns="0" tIns="0" bIns="0">
             <a:spAutoFit/>
           </a:bodyPr>
           <a:lstStyle/>
@@ -28227,7 +28341,7 @@
           <a:noFill/>
         </p:spPr>
         <p:txBody>
-          <a:bodyPr wrap="square" anchor="t">
+          <a:bodyPr wrap="square" anchor="t" lIns="0" rIns="0" tIns="0" bIns="0">
             <a:spAutoFit/>
           </a:bodyPr>
           <a:lstStyle/>
@@ -28377,7 +28491,7 @@
           <a:noFill/>
         </p:spPr>
         <p:txBody>
-          <a:bodyPr wrap="square" anchor="ctr">
+          <a:bodyPr wrap="square" anchor="ctr" lIns="0" rIns="0" tIns="0" bIns="0">
             <a:spAutoFit/>
           </a:bodyPr>
           <a:lstStyle/>
@@ -28438,40 +28552,16 @@
           </a:p>
         </p:txBody>
       </p:sp>
-      <p:pic>
-        <p:nvPicPr>
-          <p:cNvPr id="6" name="Picture 5" descr="956e16ca8a07cd42.png"/>
-          <p:cNvPicPr>
-            <a:picLocks noChangeAspect="1"/>
-          </p:cNvPicPr>
-          <p:nvPr/>
-        </p:nvPicPr>
-        <p:blipFill>
-          <a:blip r:embed="rId2"/>
-          <a:stretch>
-            <a:fillRect/>
-          </a:stretch>
-        </p:blipFill>
-        <p:spPr>
-          <a:xfrm>
-            <a:off x="1030332" y="1627632"/>
-            <a:ext cx="3963575" cy="4425696"/>
-          </a:xfrm>
-          <a:prstGeom prst="rect">
-            <a:avLst/>
-          </a:prstGeom>
-        </p:spPr>
-      </p:pic>
-      <p:sp>
-        <p:nvSpPr>
-          <p:cNvPr id="7" name="Rectangle 6"/>
+      <p:sp>
+        <p:nvSpPr>
+          <p:cNvPr id="6" name="Rectangle 5"/>
           <p:cNvSpPr/>
           <p:nvPr/>
         </p:nvSpPr>
         <p:spPr>
           <a:xfrm>
-            <a:off x="5771244" y="1627632"/>
-            <a:ext cx="5734650" cy="1656080"/>
+            <a:off x="685800" y="1627632"/>
+            <a:ext cx="5135727" cy="1319784"/>
           </a:xfrm>
           <a:prstGeom prst="rect">
             <a:avLst/>
@@ -28508,14 +28598,14 @@
       </p:sp>
       <p:sp>
         <p:nvSpPr>
-          <p:cNvPr id="8" name="Rectangle 7"/>
+          <p:cNvPr id="7" name="Rectangle 6"/>
           <p:cNvSpPr/>
           <p:nvPr/>
         </p:nvSpPr>
         <p:spPr>
           <a:xfrm>
-            <a:off x="5771244" y="1627632"/>
-            <a:ext cx="50292" cy="1656080"/>
+            <a:off x="685800" y="1627632"/>
+            <a:ext cx="50292" cy="1319784"/>
           </a:xfrm>
           <a:prstGeom prst="rect">
             <a:avLst/>
@@ -28552,14 +28642,14 @@
       </p:sp>
       <p:sp>
         <p:nvSpPr>
-          <p:cNvPr id="9" name="TextBox 8"/>
+          <p:cNvPr id="8" name="TextBox 7"/>
           <p:cNvSpPr txBox="1"/>
           <p:nvPr/>
         </p:nvSpPr>
         <p:spPr>
           <a:xfrm>
-            <a:off x="6027276" y="1719072"/>
-            <a:ext cx="5277450" cy="1509776"/>
+            <a:off x="941832" y="1719072"/>
+            <a:ext cx="4678527" cy="1173480"/>
           </a:xfrm>
           <a:prstGeom prst="rect">
             <a:avLst/>
@@ -28567,13 +28657,13 @@
           <a:noFill/>
         </p:spPr>
         <p:txBody>
-          <a:bodyPr wrap="square" anchor="ctr">
+          <a:bodyPr wrap="square" anchor="ctr" lIns="0" rIns="0" tIns="0" bIns="0">
             <a:spAutoFit/>
           </a:bodyPr>
           <a:lstStyle/>
           <a:p>
             <a:r>
-              <a:rPr sz="2000" b="1">
+              <a:rPr sz="1500" b="1">
                 <a:solidFill>
                   <a:srgbClr val="2B4A7D"/>
                 </a:solidFill>
@@ -28582,7 +28672,7 @@
               <a:t>The claim. </a:t>
             </a:r>
             <a:r>
-              <a:rPr sz="2000" b="0">
+              <a:rPr sz="1500" b="0">
                 <a:solidFill>
                   <a:srgbClr val="1C1C1A"/>
                 </a:solidFill>
@@ -28595,15 +28685,15 @@
       </p:sp>
       <p:graphicFrame>
         <p:nvGraphicFramePr>
-          <p:cNvPr id="10" name="Table 9"/>
+          <p:cNvPr id="9" name="Table 8"/>
           <p:cNvGraphicFramePr>
             <a:graphicFrameLocks noGrp="1"/>
           </p:cNvGraphicFramePr>
           <p:nvPr/>
         </p:nvGraphicFramePr>
         <p:xfrm>
-          <a:off x="5771244" y="3448304"/>
-          <a:ext cx="5734650" cy="2513582"/>
+          <a:off x="685800" y="3112008"/>
+          <a:ext cx="5135726" cy="1627632"/>
         </p:xfrm>
         <a:graphic>
           <a:graphicData uri="http://schemas.openxmlformats.org/drawingml/2006/table">
@@ -28612,17 +28702,17 @@
                 <a:tableStyleId>{2D5ABB26-0587-4C30-8999-92F81FD0307C}</a:tableStyleId>
               </a:tblPr>
               <a:tblGrid>
-                <a:gridCol w="2867325"/>
-                <a:gridCol w="2867325"/>
+                <a:gridCol w="1852170"/>
+                <a:gridCol w="3283556"/>
               </a:tblGrid>
-              <a:tr h="313580">
+              <a:tr h="310896">
                 <a:tc>
                   <a:txBody>
                     <a:bodyPr/>
                     <a:lstStyle/>
                     <a:p>
                       <a:r>
-                        <a:rPr sz="1600" b="1">
+                        <a:rPr sz="1000" b="1">
                           <a:solidFill>
                             <a:srgbClr val="FFFFFF"/>
                           </a:solidFill>
@@ -28644,7 +28734,7 @@
                     <a:lstStyle/>
                     <a:p>
                       <a:r>
-                        <a:rPr sz="1600" b="1">
+                        <a:rPr sz="1000" b="1">
                           <a:solidFill>
                             <a:srgbClr val="FFFFFF"/>
                           </a:solidFill>
@@ -28661,14 +28751,14 @@
                   </a:tcPr>
                 </a:tc>
               </a:tr>
-              <a:tr h="733334">
+              <a:tr h="438912">
                 <a:tc>
                   <a:txBody>
                     <a:bodyPr/>
                     <a:lstStyle/>
                     <a:p>
                       <a:r>
-                        <a:rPr sz="1500" b="0">
+                        <a:rPr sz="900" b="0">
                           <a:solidFill>
                             <a:srgbClr val="1C1C1A"/>
                           </a:solidFill>
@@ -28690,7 +28780,7 @@
                     <a:lstStyle/>
                     <a:p>
                       <a:r>
-                        <a:rPr sz="1500" b="0">
+                        <a:rPr sz="900" b="0">
                           <a:solidFill>
                             <a:srgbClr val="1C1C1A"/>
                           </a:solidFill>
@@ -28707,14 +28797,14 @@
                   </a:tcPr>
                 </a:tc>
               </a:tr>
-              <a:tr h="733334">
+              <a:tr h="438912">
                 <a:tc>
                   <a:txBody>
                     <a:bodyPr/>
                     <a:lstStyle/>
                     <a:p>
                       <a:r>
-                        <a:rPr sz="1500" b="0">
+                        <a:rPr sz="900" b="0">
                           <a:solidFill>
                             <a:srgbClr val="1C1C1A"/>
                           </a:solidFill>
@@ -28736,7 +28826,7 @@
                     <a:lstStyle/>
                     <a:p>
                       <a:r>
-                        <a:rPr sz="1500" b="0">
+                        <a:rPr sz="900" b="0">
                           <a:solidFill>
                             <a:srgbClr val="1C1C1A"/>
                           </a:solidFill>
@@ -28753,14 +28843,14 @@
                   </a:tcPr>
                 </a:tc>
               </a:tr>
-              <a:tr h="733334">
+              <a:tr h="438912">
                 <a:tc>
                   <a:txBody>
                     <a:bodyPr/>
                     <a:lstStyle/>
                     <a:p>
                       <a:r>
-                        <a:rPr sz="1500" b="0">
+                        <a:rPr sz="900" b="0">
                           <a:solidFill>
                             <a:srgbClr val="1C1C1A"/>
                           </a:solidFill>
@@ -28782,7 +28872,7 @@
                     <a:lstStyle/>
                     <a:p>
                       <a:r>
-                        <a:rPr sz="1500" b="0">
+                        <a:rPr sz="900" b="0">
                           <a:solidFill>
                             <a:srgbClr val="1C1C1A"/>
                           </a:solidFill>
@@ -28805,7 +28895,201 @@
       </p:graphicFrame>
       <p:sp>
         <p:nvSpPr>
+          <p:cNvPr id="10" name="TextBox 9"/>
+          <p:cNvSpPr txBox="1"/>
+          <p:nvPr/>
+        </p:nvSpPr>
+        <p:spPr>
+          <a:xfrm>
+            <a:off x="6370167" y="1627632"/>
+            <a:ext cx="5135727" cy="1255776"/>
+          </a:xfrm>
+          <a:prstGeom prst="rect">
+            <a:avLst/>
+          </a:prstGeom>
+          <a:noFill/>
+        </p:spPr>
+        <p:txBody>
+          <a:bodyPr wrap="square" anchor="t" lIns="0" rIns="0" tIns="0" bIns="0">
+            <a:spAutoFit/>
+          </a:bodyPr>
+          <a:lstStyle/>
+          <a:p>
+            <a:pPr>
+              <a:spcAft>
+                <a:spcPts val="700"/>
+              </a:spcAft>
+            </a:pPr>
+            <a:r>
+              <a:rPr sz="1500" b="0">
+                <a:solidFill>
+                  <a:srgbClr val="1C1C1A"/>
+                </a:solidFill>
+                <a:latin typeface="Calibri"/>
+              </a:rPr>
+              <a:t>Three questions, every time: what is the exception type, which line is mine, and what value was it holding? The third is the one people skip and it is the one that names the record.</a:t>
+            </a:r>
+          </a:p>
+        </p:txBody>
+      </p:sp>
+      <p:sp>
+        <p:nvSpPr>
           <p:cNvPr id="11" name="Rectangle 10"/>
+          <p:cNvSpPr/>
+          <p:nvPr/>
+        </p:nvSpPr>
+        <p:spPr>
+          <a:xfrm>
+            <a:off x="6370167" y="3011424"/>
+            <a:ext cx="5135727" cy="1049274"/>
+          </a:xfrm>
+          <a:prstGeom prst="rect">
+            <a:avLst/>
+          </a:prstGeom>
+          <a:solidFill>
+            <a:srgbClr val="E4ECF7"/>
+          </a:solidFill>
+          <a:ln>
+            <a:noFill/>
+          </a:ln>
+          <a:effectLst/>
+        </p:spPr>
+        <p:style>
+          <a:lnRef idx="1">
+            <a:schemeClr val="accent1"/>
+          </a:lnRef>
+          <a:fillRef idx="3">
+            <a:schemeClr val="accent1"/>
+          </a:fillRef>
+          <a:effectRef idx="2">
+            <a:schemeClr val="accent1"/>
+          </a:effectRef>
+          <a:fontRef idx="minor">
+            <a:schemeClr val="lt1"/>
+          </a:fontRef>
+        </p:style>
+        <p:txBody>
+          <a:bodyPr rtlCol="0" anchor="ctr" wrap="square"/>
+          <a:lstStyle/>
+          <a:p>
+            <a:pPr algn="ctr"/>
+          </a:p>
+        </p:txBody>
+      </p:sp>
+      <p:sp>
+        <p:nvSpPr>
+          <p:cNvPr id="12" name="Rectangle 11"/>
+          <p:cNvSpPr/>
+          <p:nvPr/>
+        </p:nvSpPr>
+        <p:spPr>
+          <a:xfrm>
+            <a:off x="6370167" y="3011424"/>
+            <a:ext cx="50292" cy="1049274"/>
+          </a:xfrm>
+          <a:prstGeom prst="rect">
+            <a:avLst/>
+          </a:prstGeom>
+          <a:solidFill>
+            <a:srgbClr val="2B4A7D"/>
+          </a:solidFill>
+          <a:ln>
+            <a:noFill/>
+          </a:ln>
+          <a:effectLst/>
+        </p:spPr>
+        <p:style>
+          <a:lnRef idx="1">
+            <a:schemeClr val="accent1"/>
+          </a:lnRef>
+          <a:fillRef idx="3">
+            <a:schemeClr val="accent1"/>
+          </a:fillRef>
+          <a:effectRef idx="2">
+            <a:schemeClr val="accent1"/>
+          </a:effectRef>
+          <a:fontRef idx="minor">
+            <a:schemeClr val="lt1"/>
+          </a:fontRef>
+        </p:style>
+        <p:txBody>
+          <a:bodyPr rtlCol="0" anchor="ctr" wrap="square"/>
+          <a:lstStyle/>
+          <a:p>
+            <a:pPr algn="ctr"/>
+          </a:p>
+        </p:txBody>
+      </p:sp>
+      <p:sp>
+        <p:nvSpPr>
+          <p:cNvPr id="13" name="TextBox 12"/>
+          <p:cNvSpPr txBox="1"/>
+          <p:nvPr/>
+        </p:nvSpPr>
+        <p:spPr>
+          <a:xfrm>
+            <a:off x="6626199" y="3102864"/>
+            <a:ext cx="4678527" cy="902969"/>
+          </a:xfrm>
+          <a:prstGeom prst="rect">
+            <a:avLst/>
+          </a:prstGeom>
+          <a:noFill/>
+        </p:spPr>
+        <p:txBody>
+          <a:bodyPr wrap="square" anchor="ctr" lIns="0" rIns="0" tIns="0" bIns="0">
+            <a:spAutoFit/>
+          </a:bodyPr>
+          <a:lstStyle/>
+          <a:p>
+            <a:r>
+              <a:rPr sz="1500" b="1">
+                <a:solidFill>
+                  <a:srgbClr val="2B4A7D"/>
+                </a:solidFill>
+                <a:latin typeface="Calibri"/>
+              </a:rPr>
+              <a:t>The mental model. </a:t>
+            </a:r>
+            <a:r>
+              <a:rPr sz="1500" b="0">
+                <a:solidFill>
+                  <a:srgbClr val="1C1C1A"/>
+                </a:solidFill>
+                <a:latin typeface="Calibri"/>
+              </a:rPr>
+              <a:t>A traceback is a receipt printed from the bottom up. The last line is the total.</a:t>
+            </a:r>
+          </a:p>
+        </p:txBody>
+      </p:sp>
+      <p:pic>
+        <p:nvPicPr>
+          <p:cNvPr id="14" name="Picture 13" descr="5a04c3bcce1864aa.png"/>
+          <p:cNvPicPr>
+            <a:picLocks noChangeAspect="1"/>
+          </p:cNvPicPr>
+          <p:nvPr/>
+        </p:nvPicPr>
+        <p:blipFill>
+          <a:blip r:embed="rId2"/>
+          <a:stretch>
+            <a:fillRect/>
+          </a:stretch>
+        </p:blipFill>
+        <p:spPr>
+          <a:xfrm>
+            <a:off x="8119452" y="4225290"/>
+            <a:ext cx="1637158" cy="1828038"/>
+          </a:xfrm>
+          <a:prstGeom prst="rect">
+            <a:avLst/>
+          </a:prstGeom>
+        </p:spPr>
+      </p:pic>
+      <p:sp>
+        <p:nvSpPr>
+          <p:cNvPr id="15" name="Rectangle 14"/>
           <p:cNvSpPr/>
           <p:nvPr/>
         </p:nvSpPr>
@@ -28849,7 +29133,7 @@
       </p:sp>
       <p:sp>
         <p:nvSpPr>
-          <p:cNvPr id="12" name="TextBox 11"/>
+          <p:cNvPr id="16" name="TextBox 15"/>
           <p:cNvSpPr txBox="1"/>
           <p:nvPr/>
         </p:nvSpPr>
@@ -28864,7 +29148,7 @@
           <a:noFill/>
         </p:spPr>
         <p:txBody>
-          <a:bodyPr wrap="square" anchor="t">
+          <a:bodyPr wrap="square" anchor="t" lIns="0" rIns="0" tIns="0" bIns="0">
             <a:spAutoFit/>
           </a:bodyPr>
           <a:lstStyle/>
@@ -28883,7 +29167,7 @@
       </p:sp>
       <p:sp>
         <p:nvSpPr>
-          <p:cNvPr id="13" name="TextBox 12"/>
+          <p:cNvPr id="17" name="TextBox 16"/>
           <p:cNvSpPr txBox="1"/>
           <p:nvPr/>
         </p:nvSpPr>
@@ -28898,7 +29182,7 @@
           <a:noFill/>
         </p:spPr>
         <p:txBody>
-          <a:bodyPr wrap="square" anchor="t">
+          <a:bodyPr wrap="square" anchor="t" lIns="0" rIns="0" tIns="0" bIns="0">
             <a:spAutoFit/>
           </a:bodyPr>
           <a:lstStyle/>
@@ -29101,7 +29385,7 @@
           <a:noFill/>
         </p:spPr>
         <p:txBody>
-          <a:bodyPr wrap="square" anchor="ctr">
+          <a:bodyPr wrap="square" anchor="ctr" lIns="0" rIns="0" tIns="0" bIns="0">
             <a:spAutoFit/>
           </a:bodyPr>
           <a:lstStyle/>
@@ -29179,7 +29463,7 @@
           <a:noFill/>
         </p:spPr>
         <p:txBody>
-          <a:bodyPr wrap="square" anchor="t">
+          <a:bodyPr wrap="square" anchor="t" lIns="0" rIns="0" tIns="0" bIns="0">
             <a:spAutoFit/>
           </a:bodyPr>
           <a:lstStyle/>
@@ -29278,7 +29562,7 @@
           <a:noFill/>
         </p:spPr>
         <p:txBody>
-          <a:bodyPr wrap="square" anchor="t">
+          <a:bodyPr wrap="square" anchor="t" lIns="0" rIns="0" tIns="0" bIns="0">
             <a:spAutoFit/>
           </a:bodyPr>
           <a:lstStyle/>
@@ -29312,7 +29596,7 @@
           <a:noFill/>
         </p:spPr>
         <p:txBody>
-          <a:bodyPr wrap="square" anchor="t">
+          <a:bodyPr wrap="square" anchor="t" lIns="0" rIns="0" tIns="0" bIns="0">
             <a:spAutoFit/>
           </a:bodyPr>
           <a:lstStyle/>
@@ -29462,7 +29746,7 @@
           <a:noFill/>
         </p:spPr>
         <p:txBody>
-          <a:bodyPr wrap="square" anchor="ctr">
+          <a:bodyPr wrap="square" anchor="ctr" lIns="0" rIns="0" tIns="0" bIns="0">
             <a:spAutoFit/>
           </a:bodyPr>
           <a:lstStyle/>
@@ -29540,7 +29824,7 @@
           <a:noFill/>
         </p:spPr>
         <p:txBody>
-          <a:bodyPr wrap="square" anchor="t">
+          <a:bodyPr wrap="square" anchor="t" lIns="0" rIns="0" tIns="0" bIns="0">
             <a:spAutoFit/>
           </a:bodyPr>
           <a:lstStyle/>
@@ -29687,7 +29971,7 @@
           <a:noFill/>
         </p:spPr>
         <p:txBody>
-          <a:bodyPr wrap="square" anchor="t">
+          <a:bodyPr wrap="square" anchor="t" lIns="0" rIns="0" tIns="0" bIns="0">
             <a:spAutoFit/>
           </a:bodyPr>
           <a:lstStyle/>
@@ -29721,7 +30005,7 @@
           <a:noFill/>
         </p:spPr>
         <p:txBody>
-          <a:bodyPr wrap="square" anchor="t">
+          <a:bodyPr wrap="square" anchor="t" lIns="0" rIns="0" tIns="0" bIns="0">
             <a:spAutoFit/>
           </a:bodyPr>
           <a:lstStyle/>
@@ -29871,7 +30155,7 @@
           <a:noFill/>
         </p:spPr>
         <p:txBody>
-          <a:bodyPr wrap="square" anchor="ctr">
+          <a:bodyPr wrap="square" anchor="ctr" lIns="0" rIns="0" tIns="0" bIns="0">
             <a:spAutoFit/>
           </a:bodyPr>
           <a:lstStyle/>
@@ -29941,7 +30225,7 @@
         <p:spPr>
           <a:xfrm>
             <a:off x="685800" y="1627632"/>
-            <a:ext cx="10820095" cy="1310640"/>
+            <a:ext cx="10820095" cy="706628"/>
           </a:xfrm>
           <a:prstGeom prst="rect">
             <a:avLst/>
@@ -29985,7 +30269,7 @@
         <p:spPr>
           <a:xfrm>
             <a:off x="685800" y="1627632"/>
-            <a:ext cx="50292" cy="1310640"/>
+            <a:ext cx="50292" cy="706628"/>
           </a:xfrm>
           <a:prstGeom prst="rect">
             <a:avLst/>
@@ -30029,7 +30313,7 @@
         <p:spPr>
           <a:xfrm>
             <a:off x="941832" y="1719072"/>
-            <a:ext cx="10362895" cy="1164336"/>
+            <a:ext cx="10362895" cy="560324"/>
           </a:xfrm>
           <a:prstGeom prst="rect">
             <a:avLst/>
@@ -30037,13 +30321,13 @@
           <a:noFill/>
         </p:spPr>
         <p:txBody>
-          <a:bodyPr wrap="square" anchor="ctr">
+          <a:bodyPr wrap="square" anchor="ctr" lIns="0" rIns="0" tIns="0" bIns="0">
             <a:spAutoFit/>
           </a:bodyPr>
           <a:lstStyle/>
           <a:p>
             <a:r>
-              <a:rPr sz="2000" b="1">
+              <a:rPr sz="1300" b="1">
                 <a:solidFill>
                   <a:srgbClr val="2B4A7D"/>
                 </a:solidFill>
@@ -30052,7 +30336,7 @@
               <a:t>The claim. </a:t>
             </a:r>
             <a:r>
-              <a:rPr sz="2000" b="0">
+              <a:rPr sz="1300" b="0">
                 <a:solidFill>
                   <a:srgbClr val="1C1C1A"/>
                 </a:solidFill>
@@ -30071,8 +30355,8 @@
         </p:nvSpPr>
         <p:spPr>
           <a:xfrm>
-            <a:off x="685800" y="3102864"/>
-            <a:ext cx="10820095" cy="810768"/>
+            <a:off x="685800" y="2498852"/>
+            <a:ext cx="10820095" cy="652780"/>
           </a:xfrm>
           <a:prstGeom prst="rect">
             <a:avLst/>
@@ -30115,8 +30399,8 @@
         </p:nvSpPr>
         <p:spPr>
           <a:xfrm>
-            <a:off x="685800" y="3102864"/>
-            <a:ext cx="50292" cy="810768"/>
+            <a:off x="685800" y="2498852"/>
+            <a:ext cx="50292" cy="652780"/>
           </a:xfrm>
           <a:prstGeom prst="rect">
             <a:avLst/>
@@ -30159,8 +30443,8 @@
         </p:nvSpPr>
         <p:spPr>
           <a:xfrm>
-            <a:off x="923544" y="3203448"/>
-            <a:ext cx="10417759" cy="627888"/>
+            <a:off x="923544" y="2599436"/>
+            <a:ext cx="10417759" cy="469899"/>
           </a:xfrm>
           <a:prstGeom prst="rect">
             <a:avLst/>
@@ -30168,7 +30452,7 @@
           <a:noFill/>
         </p:spPr>
         <p:txBody>
-          <a:bodyPr wrap="square" anchor="t">
+          <a:bodyPr wrap="square" anchor="t" lIns="0" rIns="0" tIns="0" bIns="0">
             <a:spAutoFit/>
           </a:bodyPr>
           <a:lstStyle/>
@@ -30179,7 +30463,7 @@
               </a:spcAft>
             </a:pPr>
             <a:r>
-              <a:rPr sz="1600" b="0">
+              <a:rPr sz="1100" b="0">
                 <a:solidFill>
                   <a:srgbClr val="E4ECF7"/>
                 </a:solidFill>
@@ -30195,7 +30479,7 @@
               </a:spcAft>
             </a:pPr>
             <a:r>
-              <a:rPr sz="1600" b="0">
+              <a:rPr sz="1100" b="0">
                 <a:solidFill>
                   <a:srgbClr val="E4ECF7"/>
                 </a:solidFill>
@@ -30215,8 +30499,8 @@
           <p:nvPr/>
         </p:nvGraphicFramePr>
         <p:xfrm>
-          <a:off x="685800" y="4078224"/>
-          <a:ext cx="10820095" cy="1807464"/>
+          <a:off x="685800" y="3316224"/>
+          <a:ext cx="10820094" cy="1243584"/>
         </p:xfrm>
         <a:graphic>
           <a:graphicData uri="http://schemas.openxmlformats.org/drawingml/2006/table">
@@ -30225,17 +30509,17 @@
                 <a:tableStyleId>{2D5ABB26-0587-4C30-8999-92F81FD0307C}</a:tableStyleId>
               </a:tblPr>
               <a:tblGrid>
-                <a:gridCol w="5410047"/>
-                <a:gridCol w="5410048"/>
+                <a:gridCol w="3226631"/>
+                <a:gridCol w="7593463"/>
               </a:tblGrid>
-              <a:tr h="387096">
+              <a:tr h="310896">
                 <a:tc>
                   <a:txBody>
                     <a:bodyPr/>
                     <a:lstStyle/>
                     <a:p>
                       <a:r>
-                        <a:rPr sz="1600" b="1">
+                        <a:rPr sz="1000" b="1">
                           <a:solidFill>
                             <a:srgbClr val="FFFFFF"/>
                           </a:solidFill>
@@ -30257,7 +30541,7 @@
                     <a:lstStyle/>
                     <a:p>
                       <a:r>
-                        <a:rPr sz="1600" b="1">
+                        <a:rPr sz="1000" b="1">
                           <a:solidFill>
                             <a:srgbClr val="FFFFFF"/>
                           </a:solidFill>
@@ -30274,14 +30558,14 @@
                   </a:tcPr>
                 </a:tc>
               </a:tr>
-              <a:tr h="387096">
+              <a:tr h="310896">
                 <a:tc>
                   <a:txBody>
                     <a:bodyPr/>
                     <a:lstStyle/>
                     <a:p>
                       <a:r>
-                        <a:rPr sz="1500" b="0">
+                        <a:rPr sz="900" b="0">
                           <a:solidFill>
                             <a:srgbClr val="1C1C1A"/>
                           </a:solidFill>
@@ -30303,7 +30587,7 @@
                     <a:lstStyle/>
                     <a:p>
                       <a:r>
-                        <a:rPr sz="1500" b="0">
+                        <a:rPr sz="900" b="0">
                           <a:solidFill>
                             <a:srgbClr val="1C1C1A"/>
                           </a:solidFill>
@@ -30320,14 +30604,14 @@
                   </a:tcPr>
                 </a:tc>
               </a:tr>
-              <a:tr h="646176">
+              <a:tr h="310896">
                 <a:tc>
                   <a:txBody>
                     <a:bodyPr/>
                     <a:lstStyle/>
                     <a:p>
                       <a:r>
-                        <a:rPr sz="1500" b="0">
+                        <a:rPr sz="900" b="0">
                           <a:solidFill>
                             <a:srgbClr val="1C1C1A"/>
                           </a:solidFill>
@@ -30349,7 +30633,7 @@
                     <a:lstStyle/>
                     <a:p>
                       <a:r>
-                        <a:rPr sz="1500" b="0">
+                        <a:rPr sz="900" b="0">
                           <a:solidFill>
                             <a:srgbClr val="1C1C1A"/>
                           </a:solidFill>
@@ -30366,14 +30650,14 @@
                   </a:tcPr>
                 </a:tc>
               </a:tr>
-              <a:tr h="387096">
+              <a:tr h="310896">
                 <a:tc>
                   <a:txBody>
                     <a:bodyPr/>
                     <a:lstStyle/>
                     <a:p>
                       <a:r>
-                        <a:rPr sz="1500" b="0">
+                        <a:rPr sz="900" b="0">
                           <a:solidFill>
                             <a:srgbClr val="1C1C1A"/>
                           </a:solidFill>
@@ -30395,7 +30679,7 @@
                     <a:lstStyle/>
                     <a:p>
                       <a:r>
-                        <a:rPr sz="1500" b="0">
+                        <a:rPr sz="900" b="0">
                           <a:solidFill>
                             <a:srgbClr val="1C1C1A"/>
                           </a:solidFill>
@@ -30424,6 +30708,161 @@
         </p:nvSpPr>
         <p:spPr>
           <a:xfrm>
+            <a:off x="685800" y="4815840"/>
+            <a:ext cx="10820095" cy="706628"/>
+          </a:xfrm>
+          <a:prstGeom prst="rect">
+            <a:avLst/>
+          </a:prstGeom>
+          <a:solidFill>
+            <a:srgbClr val="E4ECF7"/>
+          </a:solidFill>
+          <a:ln>
+            <a:noFill/>
+          </a:ln>
+          <a:effectLst/>
+        </p:spPr>
+        <p:style>
+          <a:lnRef idx="1">
+            <a:schemeClr val="accent1"/>
+          </a:lnRef>
+          <a:fillRef idx="3">
+            <a:schemeClr val="accent1"/>
+          </a:fillRef>
+          <a:effectRef idx="2">
+            <a:schemeClr val="accent1"/>
+          </a:effectRef>
+          <a:fontRef idx="minor">
+            <a:schemeClr val="lt1"/>
+          </a:fontRef>
+        </p:style>
+        <p:txBody>
+          <a:bodyPr rtlCol="0" anchor="ctr" wrap="square"/>
+          <a:lstStyle/>
+          <a:p>
+            <a:pPr algn="ctr"/>
+          </a:p>
+        </p:txBody>
+      </p:sp>
+      <p:sp>
+        <p:nvSpPr>
+          <p:cNvPr id="14" name="Rectangle 13"/>
+          <p:cNvSpPr/>
+          <p:nvPr/>
+        </p:nvSpPr>
+        <p:spPr>
+          <a:xfrm>
+            <a:off x="685800" y="4815840"/>
+            <a:ext cx="50292" cy="706628"/>
+          </a:xfrm>
+          <a:prstGeom prst="rect">
+            <a:avLst/>
+          </a:prstGeom>
+          <a:solidFill>
+            <a:srgbClr val="2B4A7D"/>
+          </a:solidFill>
+          <a:ln>
+            <a:noFill/>
+          </a:ln>
+          <a:effectLst/>
+        </p:spPr>
+        <p:style>
+          <a:lnRef idx="1">
+            <a:schemeClr val="accent1"/>
+          </a:lnRef>
+          <a:fillRef idx="3">
+            <a:schemeClr val="accent1"/>
+          </a:fillRef>
+          <a:effectRef idx="2">
+            <a:schemeClr val="accent1"/>
+          </a:effectRef>
+          <a:fontRef idx="minor">
+            <a:schemeClr val="lt1"/>
+          </a:fontRef>
+        </p:style>
+        <p:txBody>
+          <a:bodyPr rtlCol="0" anchor="ctr" wrap="square"/>
+          <a:lstStyle/>
+          <a:p>
+            <a:pPr algn="ctr"/>
+          </a:p>
+        </p:txBody>
+      </p:sp>
+      <p:sp>
+        <p:nvSpPr>
+          <p:cNvPr id="15" name="TextBox 14"/>
+          <p:cNvSpPr txBox="1"/>
+          <p:nvPr/>
+        </p:nvSpPr>
+        <p:spPr>
+          <a:xfrm>
+            <a:off x="941832" y="4907280"/>
+            <a:ext cx="10362895" cy="560324"/>
+          </a:xfrm>
+          <a:prstGeom prst="rect">
+            <a:avLst/>
+          </a:prstGeom>
+          <a:noFill/>
+        </p:spPr>
+        <p:txBody>
+          <a:bodyPr wrap="square" anchor="ctr" lIns="0" rIns="0" tIns="0" bIns="0">
+            <a:spAutoFit/>
+          </a:bodyPr>
+          <a:lstStyle/>
+          <a:p>
+            <a:r>
+              <a:rPr sz="1300" b="1">
+                <a:solidFill>
+                  <a:srgbClr val="2B4A7D"/>
+                </a:solidFill>
+                <a:latin typeface="Calibri"/>
+              </a:rPr>
+              <a:t>The mental model. </a:t>
+            </a:r>
+            <a:r>
+              <a:rPr sz="1300" b="0">
+                <a:solidFill>
+                  <a:srgbClr val="1C1C1A"/>
+                </a:solidFill>
+                <a:latin typeface="Calibri"/>
+              </a:rPr>
+              <a:t>Same total, and one of them is a lie about its own denominator. Say the two numbers, then say the identity: input equals clean plus rejected.</a:t>
+            </a:r>
+          </a:p>
+        </p:txBody>
+      </p:sp>
+      <p:pic>
+        <p:nvPicPr>
+          <p:cNvPr id="16" name="Picture 15" descr="73069a82f8c45599.png"/>
+          <p:cNvPicPr>
+            <a:picLocks noChangeAspect="1"/>
+          </p:cNvPicPr>
+          <p:nvPr/>
+        </p:nvPicPr>
+        <p:blipFill>
+          <a:blip r:embed="rId2"/>
+          <a:stretch>
+            <a:fillRect/>
+          </a:stretch>
+        </p:blipFill>
+        <p:spPr>
+          <a:xfrm>
+            <a:off x="2736721" y="5687060"/>
+            <a:ext cx="6718252" cy="1097280"/>
+          </a:xfrm>
+          <a:prstGeom prst="rect">
+            <a:avLst/>
+          </a:prstGeom>
+        </p:spPr>
+      </p:pic>
+      <p:sp>
+        <p:nvSpPr>
+          <p:cNvPr id="17" name="Rectangle 16"/>
+          <p:cNvSpPr/>
+          <p:nvPr/>
+        </p:nvSpPr>
+        <p:spPr>
+          <a:xfrm>
             <a:off x="685800" y="6327648"/>
             <a:ext cx="10820095" cy="12801"/>
           </a:xfrm>
@@ -30462,7 +30901,7 @@
       </p:sp>
       <p:sp>
         <p:nvSpPr>
-          <p:cNvPr id="14" name="TextBox 13"/>
+          <p:cNvPr id="18" name="TextBox 17"/>
           <p:cNvSpPr txBox="1"/>
           <p:nvPr/>
         </p:nvSpPr>
@@ -30477,7 +30916,7 @@
           <a:noFill/>
         </p:spPr>
         <p:txBody>
-          <a:bodyPr wrap="square" anchor="t">
+          <a:bodyPr wrap="square" anchor="t" lIns="0" rIns="0" tIns="0" bIns="0">
             <a:spAutoFit/>
           </a:bodyPr>
           <a:lstStyle/>
@@ -30496,7 +30935,7 @@
       </p:sp>
       <p:sp>
         <p:nvSpPr>
-          <p:cNvPr id="15" name="TextBox 14"/>
+          <p:cNvPr id="19" name="TextBox 18"/>
           <p:cNvSpPr txBox="1"/>
           <p:nvPr/>
         </p:nvSpPr>
@@ -30511,7 +30950,7 @@
           <a:noFill/>
         </p:spPr>
         <p:txBody>
-          <a:bodyPr wrap="square" anchor="t">
+          <a:bodyPr wrap="square" anchor="t" lIns="0" rIns="0" tIns="0" bIns="0">
             <a:spAutoFit/>
           </a:bodyPr>
           <a:lstStyle/>
@@ -30661,7 +31100,7 @@
           <a:noFill/>
         </p:spPr>
         <p:txBody>
-          <a:bodyPr wrap="square" anchor="ctr">
+          <a:bodyPr wrap="square" anchor="ctr" lIns="0" rIns="0" tIns="0" bIns="0">
             <a:spAutoFit/>
           </a:bodyPr>
           <a:lstStyle/>
@@ -30739,7 +31178,7 @@
           <a:noFill/>
         </p:spPr>
         <p:txBody>
-          <a:bodyPr wrap="square" anchor="t">
+          <a:bodyPr wrap="square" anchor="t" lIns="0" rIns="0" tIns="0" bIns="0">
             <a:spAutoFit/>
           </a:bodyPr>
           <a:lstStyle/>
@@ -30838,7 +31277,7 @@
           <a:noFill/>
         </p:spPr>
         <p:txBody>
-          <a:bodyPr wrap="square" anchor="t">
+          <a:bodyPr wrap="square" anchor="t" lIns="0" rIns="0" tIns="0" bIns="0">
             <a:spAutoFit/>
           </a:bodyPr>
           <a:lstStyle/>
@@ -30872,7 +31311,7 @@
           <a:noFill/>
         </p:spPr>
         <p:txBody>
-          <a:bodyPr wrap="square" anchor="t">
+          <a:bodyPr wrap="square" anchor="t" lIns="0" rIns="0" tIns="0" bIns="0">
             <a:spAutoFit/>
           </a:bodyPr>
           <a:lstStyle/>
@@ -31075,7 +31514,7 @@
           <a:noFill/>
         </p:spPr>
         <p:txBody>
-          <a:bodyPr wrap="square" anchor="ctr">
+          <a:bodyPr wrap="square" anchor="ctr" lIns="0" rIns="0" tIns="0" bIns="0">
             <a:spAutoFit/>
           </a:bodyPr>
           <a:lstStyle/>
@@ -31144,7 +31583,7 @@
         </p:nvSpPr>
         <p:spPr>
           <a:xfrm>
-            <a:off x="685800" y="2378456"/>
+            <a:off x="685800" y="2367280"/>
             <a:ext cx="10820095" cy="910336"/>
           </a:xfrm>
           <a:prstGeom prst="rect">
@@ -31153,7 +31592,7 @@
           <a:noFill/>
         </p:spPr>
         <p:txBody>
-          <a:bodyPr wrap="square" anchor="t">
+          <a:bodyPr wrap="square" anchor="t" lIns="0" rIns="0" tIns="0" bIns="0">
             <a:spAutoFit/>
           </a:bodyPr>
           <a:lstStyle/>
@@ -31183,8 +31622,8 @@
         </p:nvSpPr>
         <p:spPr>
           <a:xfrm>
-            <a:off x="685800" y="3416808"/>
-            <a:ext cx="10820095" cy="810768"/>
+            <a:off x="685800" y="3405632"/>
+            <a:ext cx="10820095" cy="833120"/>
           </a:xfrm>
           <a:prstGeom prst="rect">
             <a:avLst/>
@@ -31227,8 +31666,8 @@
         </p:nvSpPr>
         <p:spPr>
           <a:xfrm>
-            <a:off x="685800" y="3416808"/>
-            <a:ext cx="50292" cy="810768"/>
+            <a:off x="685800" y="3405632"/>
+            <a:ext cx="50292" cy="833120"/>
           </a:xfrm>
           <a:prstGeom prst="rect">
             <a:avLst/>
@@ -31271,8 +31710,8 @@
         </p:nvSpPr>
         <p:spPr>
           <a:xfrm>
-            <a:off x="923544" y="3517392"/>
-            <a:ext cx="10417759" cy="627888"/>
+            <a:off x="923544" y="3506216"/>
+            <a:ext cx="10417759" cy="650239"/>
           </a:xfrm>
           <a:prstGeom prst="rect">
             <a:avLst/>
@@ -31280,7 +31719,7 @@
           <a:noFill/>
         </p:spPr>
         <p:txBody>
-          <a:bodyPr wrap="square" anchor="t">
+          <a:bodyPr wrap="square" anchor="t" lIns="0" rIns="0" tIns="0" bIns="0">
             <a:spAutoFit/>
           </a:bodyPr>
           <a:lstStyle/>
@@ -31326,7 +31765,7 @@
         </p:nvSpPr>
         <p:spPr>
           <a:xfrm>
-            <a:off x="685800" y="4392168"/>
+            <a:off x="685800" y="4403344"/>
             <a:ext cx="10820095" cy="910336"/>
           </a:xfrm>
           <a:prstGeom prst="rect">
@@ -31335,7 +31774,7 @@
           <a:noFill/>
         </p:spPr>
         <p:txBody>
-          <a:bodyPr wrap="square" anchor="t">
+          <a:bodyPr wrap="square" anchor="t" lIns="0" rIns="0" tIns="0" bIns="0">
             <a:spAutoFit/>
           </a:bodyPr>
           <a:lstStyle/>
@@ -31418,7 +31857,7 @@
           <a:noFill/>
         </p:spPr>
         <p:txBody>
-          <a:bodyPr wrap="square" anchor="t">
+          <a:bodyPr wrap="square" anchor="t" lIns="0" rIns="0" tIns="0" bIns="0">
             <a:spAutoFit/>
           </a:bodyPr>
           <a:lstStyle/>
@@ -31452,7 +31891,7 @@
           <a:noFill/>
         </p:spPr>
         <p:txBody>
-          <a:bodyPr wrap="square" anchor="t">
+          <a:bodyPr wrap="square" anchor="t" lIns="0" rIns="0" tIns="0" bIns="0">
             <a:spAutoFit/>
           </a:bodyPr>
           <a:lstStyle/>
@@ -31602,7 +32041,7 @@
           <a:noFill/>
         </p:spPr>
         <p:txBody>
-          <a:bodyPr wrap="square" anchor="ctr">
+          <a:bodyPr wrap="square" anchor="ctr" lIns="0" rIns="0" tIns="0" bIns="0">
             <a:spAutoFit/>
           </a:bodyPr>
           <a:lstStyle/>
@@ -31680,7 +32119,7 @@
           <a:noFill/>
         </p:spPr>
         <p:txBody>
-          <a:bodyPr wrap="square" anchor="t">
+          <a:bodyPr wrap="square" anchor="t" lIns="0" rIns="0" tIns="0" bIns="0">
             <a:spAutoFit/>
           </a:bodyPr>
           <a:lstStyle/>
@@ -31827,7 +32266,7 @@
           <a:noFill/>
         </p:spPr>
         <p:txBody>
-          <a:bodyPr wrap="square" anchor="t">
+          <a:bodyPr wrap="square" anchor="t" lIns="0" rIns="0" tIns="0" bIns="0">
             <a:spAutoFit/>
           </a:bodyPr>
           <a:lstStyle/>
@@ -31861,7 +32300,7 @@
           <a:noFill/>
         </p:spPr>
         <p:txBody>
-          <a:bodyPr wrap="square" anchor="t">
+          <a:bodyPr wrap="square" anchor="t" lIns="0" rIns="0" tIns="0" bIns="0">
             <a:spAutoFit/>
           </a:bodyPr>
           <a:lstStyle/>
@@ -32011,7 +32450,7 @@
           <a:noFill/>
         </p:spPr>
         <p:txBody>
-          <a:bodyPr wrap="square" anchor="ctr">
+          <a:bodyPr wrap="square" anchor="ctr" lIns="0" rIns="0" tIns="0" bIns="0">
             <a:spAutoFit/>
           </a:bodyPr>
           <a:lstStyle/>
@@ -32081,7 +32520,7 @@
         <p:spPr>
           <a:xfrm>
             <a:off x="685800" y="1627632"/>
-            <a:ext cx="10820095" cy="1310640"/>
+            <a:ext cx="10820095" cy="850899"/>
           </a:xfrm>
           <a:prstGeom prst="rect">
             <a:avLst/>
@@ -32125,7 +32564,7 @@
         <p:spPr>
           <a:xfrm>
             <a:off x="685800" y="1627632"/>
-            <a:ext cx="50292" cy="1310640"/>
+            <a:ext cx="50292" cy="850899"/>
           </a:xfrm>
           <a:prstGeom prst="rect">
             <a:avLst/>
@@ -32169,7 +32608,7 @@
         <p:spPr>
           <a:xfrm>
             <a:off x="941832" y="1719072"/>
-            <a:ext cx="10362895" cy="1164336"/>
+            <a:ext cx="10362895" cy="704595"/>
           </a:xfrm>
           <a:prstGeom prst="rect">
             <a:avLst/>
@@ -32177,13 +32616,13 @@
           <a:noFill/>
         </p:spPr>
         <p:txBody>
-          <a:bodyPr wrap="square" anchor="ctr">
+          <a:bodyPr wrap="square" anchor="ctr" lIns="0" rIns="0" tIns="0" bIns="0">
             <a:spAutoFit/>
           </a:bodyPr>
           <a:lstStyle/>
           <a:p>
             <a:r>
-              <a:rPr sz="2000" b="1">
+              <a:rPr sz="1700" b="1">
                 <a:solidFill>
                   <a:srgbClr val="2B4A7D"/>
                 </a:solidFill>
@@ -32192,7 +32631,7 @@
               <a:t>The claim. </a:t>
             </a:r>
             <a:r>
-              <a:rPr sz="2000" b="0">
+              <a:rPr sz="1700" b="0">
                 <a:solidFill>
                   <a:srgbClr val="1C1C1A"/>
                 </a:solidFill>
@@ -32212,8 +32651,8 @@
           <p:nvPr/>
         </p:nvGraphicFramePr>
         <p:xfrm>
-          <a:off x="685800" y="3102864"/>
-          <a:ext cx="10820095" cy="1807464"/>
+          <a:off x="685800" y="2643124"/>
+          <a:ext cx="10820094" cy="1243584"/>
         </p:xfrm>
         <a:graphic>
           <a:graphicData uri="http://schemas.openxmlformats.org/drawingml/2006/table">
@@ -32222,17 +32661,17 @@
                 <a:tableStyleId>{2D5ABB26-0587-4C30-8999-92F81FD0307C}</a:tableStyleId>
               </a:tblPr>
               <a:tblGrid>
-                <a:gridCol w="5410047"/>
-                <a:gridCol w="5410048"/>
+                <a:gridCol w="3024659"/>
+                <a:gridCol w="7795435"/>
               </a:tblGrid>
-              <a:tr h="387096">
+              <a:tr h="310896">
                 <a:tc>
                   <a:txBody>
                     <a:bodyPr/>
                     <a:lstStyle/>
                     <a:p>
                       <a:r>
-                        <a:rPr sz="1600" b="1">
+                        <a:rPr sz="1000" b="1">
                           <a:solidFill>
                             <a:srgbClr val="FFFFFF"/>
                           </a:solidFill>
@@ -32254,7 +32693,7 @@
                     <a:lstStyle/>
                     <a:p>
                       <a:r>
-                        <a:rPr sz="1600" b="1">
+                        <a:rPr sz="1000" b="1">
                           <a:solidFill>
                             <a:srgbClr val="FFFFFF"/>
                           </a:solidFill>
@@ -32271,14 +32710,14 @@
                   </a:tcPr>
                 </a:tc>
               </a:tr>
-              <a:tr h="387096">
+              <a:tr h="310896">
                 <a:tc>
                   <a:txBody>
                     <a:bodyPr/>
                     <a:lstStyle/>
                     <a:p>
                       <a:r>
-                        <a:rPr sz="1500" b="0">
+                        <a:rPr sz="900" b="0">
                           <a:solidFill>
                             <a:srgbClr val="1C1C1A"/>
                           </a:solidFill>
@@ -32300,7 +32739,7 @@
                     <a:lstStyle/>
                     <a:p>
                       <a:r>
-                        <a:rPr sz="1500" b="0">
+                        <a:rPr sz="900" b="0">
                           <a:solidFill>
                             <a:srgbClr val="1C1C1A"/>
                           </a:solidFill>
@@ -32317,14 +32756,14 @@
                   </a:tcPr>
                 </a:tc>
               </a:tr>
-              <a:tr h="387096">
+              <a:tr h="310896">
                 <a:tc>
                   <a:txBody>
                     <a:bodyPr/>
                     <a:lstStyle/>
                     <a:p>
                       <a:r>
-                        <a:rPr sz="1500" b="0">
+                        <a:rPr sz="900" b="0">
                           <a:solidFill>
                             <a:srgbClr val="1C1C1A"/>
                           </a:solidFill>
@@ -32346,7 +32785,7 @@
                     <a:lstStyle/>
                     <a:p>
                       <a:r>
-                        <a:rPr sz="1500" b="0">
+                        <a:rPr sz="900" b="0">
                           <a:solidFill>
                             <a:srgbClr val="1C1C1A"/>
                           </a:solidFill>
@@ -32363,14 +32802,14 @@
                   </a:tcPr>
                 </a:tc>
               </a:tr>
-              <a:tr h="646176">
+              <a:tr h="310896">
                 <a:tc>
                   <a:txBody>
                     <a:bodyPr/>
                     <a:lstStyle/>
                     <a:p>
                       <a:r>
-                        <a:rPr sz="1500" b="0">
+                        <a:rPr sz="900" b="0">
                           <a:solidFill>
                             <a:srgbClr val="1C1C1A"/>
                           </a:solidFill>
@@ -32392,7 +32831,7 @@
                     <a:lstStyle/>
                     <a:p>
                       <a:r>
-                        <a:rPr sz="1500" b="0">
+                        <a:rPr sz="900" b="0">
                           <a:solidFill>
                             <a:srgbClr val="1C1C1A"/>
                           </a:solidFill>
@@ -32421,8 +32860,8 @@
         </p:nvSpPr>
         <p:spPr>
           <a:xfrm>
-            <a:off x="685800" y="5166360"/>
-            <a:ext cx="10820095" cy="619760"/>
+            <a:off x="685800" y="4142740"/>
+            <a:ext cx="10820095" cy="544322"/>
           </a:xfrm>
           <a:prstGeom prst="rect">
             <a:avLst/>
@@ -32465,8 +32904,8 @@
         </p:nvSpPr>
         <p:spPr>
           <a:xfrm>
-            <a:off x="685800" y="5166360"/>
-            <a:ext cx="50292" cy="619760"/>
+            <a:off x="685800" y="4142740"/>
+            <a:ext cx="50292" cy="544322"/>
           </a:xfrm>
           <a:prstGeom prst="rect">
             <a:avLst/>
@@ -32509,8 +32948,8 @@
         </p:nvSpPr>
         <p:spPr>
           <a:xfrm>
-            <a:off x="941832" y="5257800"/>
-            <a:ext cx="10362895" cy="473456"/>
+            <a:off x="941832" y="4234180"/>
+            <a:ext cx="10362895" cy="398018"/>
           </a:xfrm>
           <a:prstGeom prst="rect">
             <a:avLst/>
@@ -32518,13 +32957,13 @@
           <a:noFill/>
         </p:spPr>
         <p:txBody>
-          <a:bodyPr wrap="square" anchor="ctr">
+          <a:bodyPr wrap="square" anchor="ctr" lIns="0" rIns="0" tIns="0" bIns="0">
             <a:spAutoFit/>
           </a:bodyPr>
           <a:lstStyle/>
           <a:p>
             <a:r>
-              <a:rPr sz="2000" b="1">
+              <a:rPr sz="1700" b="1">
                 <a:solidFill>
                   <a:srgbClr val="2B4A7D"/>
                 </a:solidFill>
@@ -32533,7 +32972,7 @@
               <a:t>The mental model. </a:t>
             </a:r>
             <a:r>
-              <a:rPr sz="2000" b="0">
+              <a:rPr sz="1700" b="0">
                 <a:solidFill>
                   <a:srgbClr val="1C1C1A"/>
                 </a:solidFill>
@@ -32544,9 +32983,33 @@
           </a:p>
         </p:txBody>
       </p:sp>
-      <p:sp>
-        <p:nvSpPr>
-          <p:cNvPr id="13" name="Rectangle 12"/>
+      <p:pic>
+        <p:nvPicPr>
+          <p:cNvPr id="13" name="Picture 12" descr="1910aa70296a0b2d.png"/>
+          <p:cNvPicPr>
+            <a:picLocks noChangeAspect="1"/>
+          </p:cNvPicPr>
+          <p:nvPr/>
+        </p:nvPicPr>
+        <p:blipFill>
+          <a:blip r:embed="rId2"/>
+          <a:stretch>
+            <a:fillRect/>
+          </a:stretch>
+        </p:blipFill>
+        <p:spPr>
+          <a:xfrm>
+            <a:off x="2881097" y="4864608"/>
+            <a:ext cx="6429500" cy="1188719"/>
+          </a:xfrm>
+          <a:prstGeom prst="rect">
+            <a:avLst/>
+          </a:prstGeom>
+        </p:spPr>
+      </p:pic>
+      <p:sp>
+        <p:nvSpPr>
+          <p:cNvPr id="14" name="Rectangle 13"/>
           <p:cNvSpPr/>
           <p:nvPr/>
         </p:nvSpPr>
@@ -32590,7 +33053,7 @@
       </p:sp>
       <p:sp>
         <p:nvSpPr>
-          <p:cNvPr id="14" name="TextBox 13"/>
+          <p:cNvPr id="15" name="TextBox 14"/>
           <p:cNvSpPr txBox="1"/>
           <p:nvPr/>
         </p:nvSpPr>
@@ -32605,7 +33068,7 @@
           <a:noFill/>
         </p:spPr>
         <p:txBody>
-          <a:bodyPr wrap="square" anchor="t">
+          <a:bodyPr wrap="square" anchor="t" lIns="0" rIns="0" tIns="0" bIns="0">
             <a:spAutoFit/>
           </a:bodyPr>
           <a:lstStyle/>
@@ -32624,7 +33087,7 @@
       </p:sp>
       <p:sp>
         <p:nvSpPr>
-          <p:cNvPr id="15" name="TextBox 14"/>
+          <p:cNvPr id="16" name="TextBox 15"/>
           <p:cNvSpPr txBox="1"/>
           <p:nvPr/>
         </p:nvSpPr>
@@ -32639,7 +33102,7 @@
           <a:noFill/>
         </p:spPr>
         <p:txBody>
-          <a:bodyPr wrap="square" anchor="t">
+          <a:bodyPr wrap="square" anchor="t" lIns="0" rIns="0" tIns="0" bIns="0">
             <a:spAutoFit/>
           </a:bodyPr>
           <a:lstStyle/>
@@ -32789,7 +33252,7 @@
           <a:noFill/>
         </p:spPr>
         <p:txBody>
-          <a:bodyPr wrap="square" anchor="ctr">
+          <a:bodyPr wrap="square" anchor="ctr" lIns="0" rIns="0" tIns="0" bIns="0">
             <a:spAutoFit/>
           </a:bodyPr>
           <a:lstStyle/>
@@ -32867,7 +33330,7 @@
           <a:noFill/>
         </p:spPr>
         <p:txBody>
-          <a:bodyPr wrap="square" anchor="t">
+          <a:bodyPr wrap="square" anchor="t" lIns="0" rIns="0" tIns="0" bIns="0">
             <a:spAutoFit/>
           </a:bodyPr>
           <a:lstStyle/>
@@ -33014,7 +33477,7 @@
           <a:noFill/>
         </p:spPr>
         <p:txBody>
-          <a:bodyPr wrap="square" anchor="t">
+          <a:bodyPr wrap="square" anchor="t" lIns="0" rIns="0" tIns="0" bIns="0">
             <a:spAutoFit/>
           </a:bodyPr>
           <a:lstStyle/>
@@ -33048,7 +33511,7 @@
           <a:noFill/>
         </p:spPr>
         <p:txBody>
-          <a:bodyPr wrap="square" anchor="t">
+          <a:bodyPr wrap="square" anchor="t" lIns="0" rIns="0" tIns="0" bIns="0">
             <a:spAutoFit/>
           </a:bodyPr>
           <a:lstStyle/>
@@ -33198,7 +33661,7 @@
           <a:noFill/>
         </p:spPr>
         <p:txBody>
-          <a:bodyPr wrap="square" anchor="ctr">
+          <a:bodyPr wrap="square" anchor="ctr" lIns="0" rIns="0" tIns="0" bIns="0">
             <a:spAutoFit/>
           </a:bodyPr>
           <a:lstStyle/>
@@ -33268,7 +33731,7 @@
         <p:spPr>
           <a:xfrm>
             <a:off x="685800" y="1627632"/>
-            <a:ext cx="10820095" cy="965200"/>
+            <a:ext cx="10820095" cy="850899"/>
           </a:xfrm>
           <a:prstGeom prst="rect">
             <a:avLst/>
@@ -33312,7 +33775,7 @@
         <p:spPr>
           <a:xfrm>
             <a:off x="685800" y="1627632"/>
-            <a:ext cx="50292" cy="965200"/>
+            <a:ext cx="50292" cy="850899"/>
           </a:xfrm>
           <a:prstGeom prst="rect">
             <a:avLst/>
@@ -33356,7 +33819,7 @@
         <p:spPr>
           <a:xfrm>
             <a:off x="941832" y="1719072"/>
-            <a:ext cx="10362895" cy="818896"/>
+            <a:ext cx="10362895" cy="704595"/>
           </a:xfrm>
           <a:prstGeom prst="rect">
             <a:avLst/>
@@ -33364,13 +33827,13 @@
           <a:noFill/>
         </p:spPr>
         <p:txBody>
-          <a:bodyPr wrap="square" anchor="ctr">
+          <a:bodyPr wrap="square" anchor="ctr" lIns="0" rIns="0" tIns="0" bIns="0">
             <a:spAutoFit/>
           </a:bodyPr>
           <a:lstStyle/>
           <a:p>
             <a:r>
-              <a:rPr sz="2000" b="1">
+              <a:rPr sz="1700" b="1">
                 <a:solidFill>
                   <a:srgbClr val="2B4A7D"/>
                 </a:solidFill>
@@ -33379,7 +33842,7 @@
               <a:t>The claim. </a:t>
             </a:r>
             <a:r>
-              <a:rPr sz="2000" b="0">
+              <a:rPr sz="1700" b="0">
                 <a:solidFill>
                   <a:srgbClr val="1C1C1A"/>
                 </a:solidFill>
@@ -33399,8 +33862,8 @@
           <p:nvPr/>
         </p:nvGraphicFramePr>
         <p:xfrm>
-          <a:off x="685800" y="2757424"/>
-          <a:ext cx="10820095" cy="1807464"/>
+          <a:off x="685800" y="2643124"/>
+          <a:ext cx="10820094" cy="1243584"/>
         </p:xfrm>
         <a:graphic>
           <a:graphicData uri="http://schemas.openxmlformats.org/drawingml/2006/table">
@@ -33409,17 +33872,17 @@
                 <a:tableStyleId>{2D5ABB26-0587-4C30-8999-92F81FD0307C}</a:tableStyleId>
               </a:tblPr>
               <a:tblGrid>
-                <a:gridCol w="5410047"/>
-                <a:gridCol w="5410048"/>
+                <a:gridCol w="3444269"/>
+                <a:gridCol w="7375825"/>
               </a:tblGrid>
-              <a:tr h="387096">
+              <a:tr h="310896">
                 <a:tc>
                   <a:txBody>
                     <a:bodyPr/>
                     <a:lstStyle/>
                     <a:p>
                       <a:r>
-                        <a:rPr sz="1600" b="1">
+                        <a:rPr sz="1000" b="1">
                           <a:solidFill>
                             <a:srgbClr val="FFFFFF"/>
                           </a:solidFill>
@@ -33441,7 +33904,7 @@
                     <a:lstStyle/>
                     <a:p>
                       <a:r>
-                        <a:rPr sz="1600" b="1">
+                        <a:rPr sz="1000" b="1">
                           <a:solidFill>
                             <a:srgbClr val="FFFFFF"/>
                           </a:solidFill>
@@ -33458,14 +33921,14 @@
                   </a:tcPr>
                 </a:tc>
               </a:tr>
-              <a:tr h="646176">
+              <a:tr h="310896">
                 <a:tc>
                   <a:txBody>
                     <a:bodyPr/>
                     <a:lstStyle/>
                     <a:p>
                       <a:r>
-                        <a:rPr sz="1500" b="0">
+                        <a:rPr sz="900" b="0">
                           <a:solidFill>
                             <a:srgbClr val="1C1C1A"/>
                           </a:solidFill>
@@ -33487,7 +33950,7 @@
                     <a:lstStyle/>
                     <a:p>
                       <a:r>
-                        <a:rPr sz="1500" b="0">
+                        <a:rPr sz="900" b="0">
                           <a:solidFill>
                             <a:srgbClr val="1C1C1A"/>
                           </a:solidFill>
@@ -33504,14 +33967,14 @@
                   </a:tcPr>
                 </a:tc>
               </a:tr>
-              <a:tr h="387096">
+              <a:tr h="310896">
                 <a:tc>
                   <a:txBody>
                     <a:bodyPr/>
                     <a:lstStyle/>
                     <a:p>
                       <a:r>
-                        <a:rPr sz="1500" b="0">
+                        <a:rPr sz="900" b="0">
                           <a:solidFill>
                             <a:srgbClr val="1C1C1A"/>
                           </a:solidFill>
@@ -33533,7 +33996,7 @@
                     <a:lstStyle/>
                     <a:p>
                       <a:r>
-                        <a:rPr sz="1500" b="0">
+                        <a:rPr sz="900" b="0">
                           <a:solidFill>
                             <a:srgbClr val="1C1C1A"/>
                           </a:solidFill>
@@ -33550,14 +34013,14 @@
                   </a:tcPr>
                 </a:tc>
               </a:tr>
-              <a:tr h="387096">
+              <a:tr h="310896">
                 <a:tc>
                   <a:txBody>
                     <a:bodyPr/>
                     <a:lstStyle/>
                     <a:p>
                       <a:r>
-                        <a:rPr sz="1500" b="0">
+                        <a:rPr sz="900" b="0">
                           <a:solidFill>
                             <a:srgbClr val="1C1C1A"/>
                           </a:solidFill>
@@ -33579,7 +34042,7 @@
                     <a:lstStyle/>
                     <a:p>
                       <a:r>
-                        <a:rPr sz="1500" b="0">
+                        <a:rPr sz="900" b="0">
                           <a:solidFill>
                             <a:srgbClr val="1C1C1A"/>
                           </a:solidFill>
@@ -33608,8 +34071,8 @@
         </p:nvSpPr>
         <p:spPr>
           <a:xfrm>
-            <a:off x="685800" y="4820920"/>
-            <a:ext cx="10820095" cy="910336"/>
+            <a:off x="685800" y="4142740"/>
+            <a:ext cx="10820095" cy="513080"/>
           </a:xfrm>
           <a:prstGeom prst="rect">
             <a:avLst/>
@@ -33617,18 +34080,18 @@
           <a:noFill/>
         </p:spPr>
         <p:txBody>
-          <a:bodyPr wrap="square" anchor="t">
+          <a:bodyPr wrap="square" anchor="t" lIns="0" rIns="0" tIns="0" bIns="0">
             <a:spAutoFit/>
           </a:bodyPr>
           <a:lstStyle/>
           <a:p>
             <a:pPr>
               <a:spcAft>
-                <a:spcPts val="900"/>
+                <a:spcPts val="800"/>
               </a:spcAft>
             </a:pPr>
             <a:r>
-              <a:rPr sz="2000" b="0">
+              <a:rPr sz="1700" b="0">
                 <a:solidFill>
                   <a:srgbClr val="1C1C1A"/>
                 </a:solidFill>
@@ -33642,6 +34105,161 @@
       <p:sp>
         <p:nvSpPr>
           <p:cNvPr id="11" name="Rectangle 10"/>
+          <p:cNvSpPr/>
+          <p:nvPr/>
+        </p:nvSpPr>
+        <p:spPr>
+          <a:xfrm>
+            <a:off x="685800" y="4783836"/>
+            <a:ext cx="10820095" cy="850899"/>
+          </a:xfrm>
+          <a:prstGeom prst="rect">
+            <a:avLst/>
+          </a:prstGeom>
+          <a:solidFill>
+            <a:srgbClr val="E4ECF7"/>
+          </a:solidFill>
+          <a:ln>
+            <a:noFill/>
+          </a:ln>
+          <a:effectLst/>
+        </p:spPr>
+        <p:style>
+          <a:lnRef idx="1">
+            <a:schemeClr val="accent1"/>
+          </a:lnRef>
+          <a:fillRef idx="3">
+            <a:schemeClr val="accent1"/>
+          </a:fillRef>
+          <a:effectRef idx="2">
+            <a:schemeClr val="accent1"/>
+          </a:effectRef>
+          <a:fontRef idx="minor">
+            <a:schemeClr val="lt1"/>
+          </a:fontRef>
+        </p:style>
+        <p:txBody>
+          <a:bodyPr rtlCol="0" anchor="ctr" wrap="square"/>
+          <a:lstStyle/>
+          <a:p>
+            <a:pPr algn="ctr"/>
+          </a:p>
+        </p:txBody>
+      </p:sp>
+      <p:sp>
+        <p:nvSpPr>
+          <p:cNvPr id="12" name="Rectangle 11"/>
+          <p:cNvSpPr/>
+          <p:nvPr/>
+        </p:nvSpPr>
+        <p:spPr>
+          <a:xfrm>
+            <a:off x="685800" y="4783836"/>
+            <a:ext cx="50292" cy="850899"/>
+          </a:xfrm>
+          <a:prstGeom prst="rect">
+            <a:avLst/>
+          </a:prstGeom>
+          <a:solidFill>
+            <a:srgbClr val="2B4A7D"/>
+          </a:solidFill>
+          <a:ln>
+            <a:noFill/>
+          </a:ln>
+          <a:effectLst/>
+        </p:spPr>
+        <p:style>
+          <a:lnRef idx="1">
+            <a:schemeClr val="accent1"/>
+          </a:lnRef>
+          <a:fillRef idx="3">
+            <a:schemeClr val="accent1"/>
+          </a:fillRef>
+          <a:effectRef idx="2">
+            <a:schemeClr val="accent1"/>
+          </a:effectRef>
+          <a:fontRef idx="minor">
+            <a:schemeClr val="lt1"/>
+          </a:fontRef>
+        </p:style>
+        <p:txBody>
+          <a:bodyPr rtlCol="0" anchor="ctr" wrap="square"/>
+          <a:lstStyle/>
+          <a:p>
+            <a:pPr algn="ctr"/>
+          </a:p>
+        </p:txBody>
+      </p:sp>
+      <p:sp>
+        <p:nvSpPr>
+          <p:cNvPr id="13" name="TextBox 12"/>
+          <p:cNvSpPr txBox="1"/>
+          <p:nvPr/>
+        </p:nvSpPr>
+        <p:spPr>
+          <a:xfrm>
+            <a:off x="941832" y="4875275"/>
+            <a:ext cx="10362895" cy="704595"/>
+          </a:xfrm>
+          <a:prstGeom prst="rect">
+            <a:avLst/>
+          </a:prstGeom>
+          <a:noFill/>
+        </p:spPr>
+        <p:txBody>
+          <a:bodyPr wrap="square" anchor="ctr" lIns="0" rIns="0" tIns="0" bIns="0">
+            <a:spAutoFit/>
+          </a:bodyPr>
+          <a:lstStyle/>
+          <a:p>
+            <a:r>
+              <a:rPr sz="1700" b="1">
+                <a:solidFill>
+                  <a:srgbClr val="2B4A7D"/>
+                </a:solidFill>
+                <a:latin typeface="Calibri"/>
+              </a:rPr>
+              <a:t>The mental model. </a:t>
+            </a:r>
+            <a:r>
+              <a:rPr sz="1700" b="0">
+                <a:solidFill>
+                  <a:srgbClr val="1C1C1A"/>
+                </a:solidFill>
+                <a:latin typeface="Calibri"/>
+              </a:rPr>
+              <a:t>A function is a room with one door and one window. The parameters are the door and the return is the window.</a:t>
+            </a:r>
+          </a:p>
+        </p:txBody>
+      </p:sp>
+      <p:pic>
+        <p:nvPicPr>
+          <p:cNvPr id="14" name="Picture 13" descr="d4228989c2a688db.png"/>
+          <p:cNvPicPr>
+            <a:picLocks noChangeAspect="1"/>
+          </p:cNvPicPr>
+          <p:nvPr/>
+        </p:nvPicPr>
+        <p:blipFill>
+          <a:blip r:embed="rId2"/>
+          <a:stretch>
+            <a:fillRect/>
+          </a:stretch>
+        </p:blipFill>
+        <p:spPr>
+          <a:xfrm>
+            <a:off x="3338335" y="5799327"/>
+            <a:ext cx="5515024" cy="1097280"/>
+          </a:xfrm>
+          <a:prstGeom prst="rect">
+            <a:avLst/>
+          </a:prstGeom>
+        </p:spPr>
+      </p:pic>
+      <p:sp>
+        <p:nvSpPr>
+          <p:cNvPr id="15" name="Rectangle 14"/>
           <p:cNvSpPr/>
           <p:nvPr/>
         </p:nvSpPr>
@@ -33685,7 +34303,7 @@
       </p:sp>
       <p:sp>
         <p:nvSpPr>
-          <p:cNvPr id="12" name="TextBox 11"/>
+          <p:cNvPr id="16" name="TextBox 15"/>
           <p:cNvSpPr txBox="1"/>
           <p:nvPr/>
         </p:nvSpPr>
@@ -33700,7 +34318,7 @@
           <a:noFill/>
         </p:spPr>
         <p:txBody>
-          <a:bodyPr wrap="square" anchor="t">
+          <a:bodyPr wrap="square" anchor="t" lIns="0" rIns="0" tIns="0" bIns="0">
             <a:spAutoFit/>
           </a:bodyPr>
           <a:lstStyle/>
@@ -33719,7 +34337,7 @@
       </p:sp>
       <p:sp>
         <p:nvSpPr>
-          <p:cNvPr id="13" name="TextBox 12"/>
+          <p:cNvPr id="17" name="TextBox 16"/>
           <p:cNvSpPr txBox="1"/>
           <p:nvPr/>
         </p:nvSpPr>
@@ -33734,7 +34352,7 @@
           <a:noFill/>
         </p:spPr>
         <p:txBody>
-          <a:bodyPr wrap="square" anchor="t">
+          <a:bodyPr wrap="square" anchor="t" lIns="0" rIns="0" tIns="0" bIns="0">
             <a:spAutoFit/>
           </a:bodyPr>
           <a:lstStyle/>
@@ -33884,7 +34502,7 @@
           <a:noFill/>
         </p:spPr>
         <p:txBody>
-          <a:bodyPr wrap="square" anchor="ctr">
+          <a:bodyPr wrap="square" anchor="ctr" lIns="0" rIns="0" tIns="0" bIns="0">
             <a:spAutoFit/>
           </a:bodyPr>
           <a:lstStyle/>
@@ -33962,7 +34580,7 @@
           <a:noFill/>
         </p:spPr>
         <p:txBody>
-          <a:bodyPr wrap="square" anchor="t">
+          <a:bodyPr wrap="square" anchor="t" lIns="0" rIns="0" tIns="0" bIns="0">
             <a:spAutoFit/>
           </a:bodyPr>
           <a:lstStyle/>
@@ -34109,7 +34727,7 @@
           <a:noFill/>
         </p:spPr>
         <p:txBody>
-          <a:bodyPr wrap="square" anchor="t">
+          <a:bodyPr wrap="square" anchor="t" lIns="0" rIns="0" tIns="0" bIns="0">
             <a:spAutoFit/>
           </a:bodyPr>
           <a:lstStyle/>
@@ -34143,7 +34761,7 @@
           <a:noFill/>
         </p:spPr>
         <p:txBody>
-          <a:bodyPr wrap="square" anchor="t">
+          <a:bodyPr wrap="square" anchor="t" lIns="0" rIns="0" tIns="0" bIns="0">
             <a:spAutoFit/>
           </a:bodyPr>
           <a:lstStyle/>
@@ -34293,7 +34911,7 @@
           <a:noFill/>
         </p:spPr>
         <p:txBody>
-          <a:bodyPr wrap="square" anchor="ctr">
+          <a:bodyPr wrap="square" anchor="ctr" lIns="0" rIns="0" tIns="0" bIns="0">
             <a:spAutoFit/>
           </a:bodyPr>
           <a:lstStyle/>
@@ -34363,7 +34981,7 @@
         <p:spPr>
           <a:xfrm>
             <a:off x="685800" y="1627632"/>
-            <a:ext cx="10820095" cy="965200"/>
+            <a:ext cx="10820095" cy="850899"/>
           </a:xfrm>
           <a:prstGeom prst="rect">
             <a:avLst/>
@@ -34407,7 +35025,7 @@
         <p:spPr>
           <a:xfrm>
             <a:off x="685800" y="1627632"/>
-            <a:ext cx="50292" cy="965200"/>
+            <a:ext cx="50292" cy="850899"/>
           </a:xfrm>
           <a:prstGeom prst="rect">
             <a:avLst/>
@@ -34451,7 +35069,7 @@
         <p:spPr>
           <a:xfrm>
             <a:off x="941832" y="1719072"/>
-            <a:ext cx="10362895" cy="818896"/>
+            <a:ext cx="10362895" cy="704595"/>
           </a:xfrm>
           <a:prstGeom prst="rect">
             <a:avLst/>
@@ -34459,13 +35077,13 @@
           <a:noFill/>
         </p:spPr>
         <p:txBody>
-          <a:bodyPr wrap="square" anchor="ctr">
+          <a:bodyPr wrap="square" anchor="ctr" lIns="0" rIns="0" tIns="0" bIns="0">
             <a:spAutoFit/>
           </a:bodyPr>
           <a:lstStyle/>
           <a:p>
             <a:r>
-              <a:rPr sz="2000" b="1">
+              <a:rPr sz="1700" b="1">
                 <a:solidFill>
                   <a:srgbClr val="2B4A7D"/>
                 </a:solidFill>
@@ -34474,7 +35092,7 @@
               <a:t>The claim. </a:t>
             </a:r>
             <a:r>
-              <a:rPr sz="2000" b="0">
+              <a:rPr sz="1700" b="0">
                 <a:solidFill>
                   <a:srgbClr val="1C1C1A"/>
                 </a:solidFill>
@@ -34494,8 +35112,8 @@
           <p:nvPr/>
         </p:nvGraphicFramePr>
         <p:xfrm>
-          <a:off x="685800" y="2757424"/>
-          <a:ext cx="10820095" cy="2066544"/>
+          <a:off x="685800" y="2643124"/>
+          <a:ext cx="10820094" cy="1243584"/>
         </p:xfrm>
         <a:graphic>
           <a:graphicData uri="http://schemas.openxmlformats.org/drawingml/2006/table">
@@ -34504,17 +35122,17 @@
                 <a:tableStyleId>{2D5ABB26-0587-4C30-8999-92F81FD0307C}</a:tableStyleId>
               </a:tblPr>
               <a:tblGrid>
-                <a:gridCol w="5410047"/>
-                <a:gridCol w="5410048"/>
+                <a:gridCol w="2843135"/>
+                <a:gridCol w="7976959"/>
               </a:tblGrid>
-              <a:tr h="387096">
+              <a:tr h="310896">
                 <a:tc>
                   <a:txBody>
                     <a:bodyPr/>
                     <a:lstStyle/>
                     <a:p>
                       <a:r>
-                        <a:rPr sz="1600" b="1">
+                        <a:rPr sz="1000" b="1">
                           <a:solidFill>
                             <a:srgbClr val="FFFFFF"/>
                           </a:solidFill>
@@ -34536,7 +35154,7 @@
                     <a:lstStyle/>
                     <a:p>
                       <a:r>
-                        <a:rPr sz="1600" b="1">
+                        <a:rPr sz="1000" b="1">
                           <a:solidFill>
                             <a:srgbClr val="FFFFFF"/>
                           </a:solidFill>
@@ -34553,14 +35171,14 @@
                   </a:tcPr>
                 </a:tc>
               </a:tr>
-              <a:tr h="646176">
+              <a:tr h="310896">
                 <a:tc>
                   <a:txBody>
                     <a:bodyPr/>
                     <a:lstStyle/>
                     <a:p>
                       <a:r>
-                        <a:rPr sz="1500" b="0">
+                        <a:rPr sz="900" b="0">
                           <a:solidFill>
                             <a:srgbClr val="1C1C1A"/>
                           </a:solidFill>
@@ -34582,7 +35200,7 @@
                     <a:lstStyle/>
                     <a:p>
                       <a:r>
-                        <a:rPr sz="1500" b="0">
+                        <a:rPr sz="900" b="0">
                           <a:solidFill>
                             <a:srgbClr val="1C1C1A"/>
                           </a:solidFill>
@@ -34599,14 +35217,14 @@
                   </a:tcPr>
                 </a:tc>
               </a:tr>
-              <a:tr h="387096">
+              <a:tr h="310896">
                 <a:tc>
                   <a:txBody>
                     <a:bodyPr/>
                     <a:lstStyle/>
                     <a:p>
                       <a:r>
-                        <a:rPr sz="1500" b="0">
+                        <a:rPr sz="900" b="0">
                           <a:solidFill>
                             <a:srgbClr val="1C1C1A"/>
                           </a:solidFill>
@@ -34628,7 +35246,7 @@
                     <a:lstStyle/>
                     <a:p>
                       <a:r>
-                        <a:rPr sz="1500" b="0">
+                        <a:rPr sz="900" b="0">
                           <a:solidFill>
                             <a:srgbClr val="1C1C1A"/>
                           </a:solidFill>
@@ -34645,14 +35263,14 @@
                   </a:tcPr>
                 </a:tc>
               </a:tr>
-              <a:tr h="646176">
+              <a:tr h="310896">
                 <a:tc>
                   <a:txBody>
                     <a:bodyPr/>
                     <a:lstStyle/>
                     <a:p>
                       <a:r>
-                        <a:rPr sz="1500" b="0">
+                        <a:rPr sz="900" b="0">
                           <a:solidFill>
                             <a:srgbClr val="1C1C1A"/>
                           </a:solidFill>
@@ -34674,7 +35292,7 @@
                     <a:lstStyle/>
                     <a:p>
                       <a:r>
-                        <a:rPr sz="1500" b="0">
+                        <a:rPr sz="900" b="0">
                           <a:solidFill>
                             <a:srgbClr val="1C1C1A"/>
                           </a:solidFill>
@@ -34703,8 +35321,8 @@
         </p:nvSpPr>
         <p:spPr>
           <a:xfrm>
-            <a:off x="685800" y="5080000"/>
-            <a:ext cx="10820095" cy="1255776"/>
+            <a:off x="685800" y="4142740"/>
+            <a:ext cx="10820095" cy="806704"/>
           </a:xfrm>
           <a:prstGeom prst="rect">
             <a:avLst/>
@@ -34712,18 +35330,18 @@
           <a:noFill/>
         </p:spPr>
         <p:txBody>
-          <a:bodyPr wrap="square" anchor="t">
+          <a:bodyPr wrap="square" anchor="t" lIns="0" rIns="0" tIns="0" bIns="0">
             <a:spAutoFit/>
           </a:bodyPr>
           <a:lstStyle/>
           <a:p>
             <a:pPr>
               <a:spcAft>
-                <a:spcPts val="900"/>
+                <a:spcPts val="800"/>
               </a:spcAft>
             </a:pPr>
             <a:r>
-              <a:rPr sz="2000" b="0">
+              <a:rPr sz="1700" b="0">
                 <a:solidFill>
                   <a:srgbClr val="1C1C1A"/>
                 </a:solidFill>
@@ -34737,6 +35355,161 @@
       <p:sp>
         <p:nvSpPr>
           <p:cNvPr id="11" name="Rectangle 10"/>
+          <p:cNvSpPr/>
+          <p:nvPr/>
+        </p:nvSpPr>
+        <p:spPr>
+          <a:xfrm>
+            <a:off x="685800" y="5077460"/>
+            <a:ext cx="10820095" cy="544322"/>
+          </a:xfrm>
+          <a:prstGeom prst="rect">
+            <a:avLst/>
+          </a:prstGeom>
+          <a:solidFill>
+            <a:srgbClr val="E4ECF7"/>
+          </a:solidFill>
+          <a:ln>
+            <a:noFill/>
+          </a:ln>
+          <a:effectLst/>
+        </p:spPr>
+        <p:style>
+          <a:lnRef idx="1">
+            <a:schemeClr val="accent1"/>
+          </a:lnRef>
+          <a:fillRef idx="3">
+            <a:schemeClr val="accent1"/>
+          </a:fillRef>
+          <a:effectRef idx="2">
+            <a:schemeClr val="accent1"/>
+          </a:effectRef>
+          <a:fontRef idx="minor">
+            <a:schemeClr val="lt1"/>
+          </a:fontRef>
+        </p:style>
+        <p:txBody>
+          <a:bodyPr rtlCol="0" anchor="ctr" wrap="square"/>
+          <a:lstStyle/>
+          <a:p>
+            <a:pPr algn="ctr"/>
+          </a:p>
+        </p:txBody>
+      </p:sp>
+      <p:sp>
+        <p:nvSpPr>
+          <p:cNvPr id="12" name="Rectangle 11"/>
+          <p:cNvSpPr/>
+          <p:nvPr/>
+        </p:nvSpPr>
+        <p:spPr>
+          <a:xfrm>
+            <a:off x="685800" y="5077460"/>
+            <a:ext cx="50292" cy="544322"/>
+          </a:xfrm>
+          <a:prstGeom prst="rect">
+            <a:avLst/>
+          </a:prstGeom>
+          <a:solidFill>
+            <a:srgbClr val="2B4A7D"/>
+          </a:solidFill>
+          <a:ln>
+            <a:noFill/>
+          </a:ln>
+          <a:effectLst/>
+        </p:spPr>
+        <p:style>
+          <a:lnRef idx="1">
+            <a:schemeClr val="accent1"/>
+          </a:lnRef>
+          <a:fillRef idx="3">
+            <a:schemeClr val="accent1"/>
+          </a:fillRef>
+          <a:effectRef idx="2">
+            <a:schemeClr val="accent1"/>
+          </a:effectRef>
+          <a:fontRef idx="minor">
+            <a:schemeClr val="lt1"/>
+          </a:fontRef>
+        </p:style>
+        <p:txBody>
+          <a:bodyPr rtlCol="0" anchor="ctr" wrap="square"/>
+          <a:lstStyle/>
+          <a:p>
+            <a:pPr algn="ctr"/>
+          </a:p>
+        </p:txBody>
+      </p:sp>
+      <p:sp>
+        <p:nvSpPr>
+          <p:cNvPr id="13" name="TextBox 12"/>
+          <p:cNvSpPr txBox="1"/>
+          <p:nvPr/>
+        </p:nvSpPr>
+        <p:spPr>
+          <a:xfrm>
+            <a:off x="941832" y="5168900"/>
+            <a:ext cx="10362895" cy="398018"/>
+          </a:xfrm>
+          <a:prstGeom prst="rect">
+            <a:avLst/>
+          </a:prstGeom>
+          <a:noFill/>
+        </p:spPr>
+        <p:txBody>
+          <a:bodyPr wrap="square" anchor="ctr" lIns="0" rIns="0" tIns="0" bIns="0">
+            <a:spAutoFit/>
+          </a:bodyPr>
+          <a:lstStyle/>
+          <a:p>
+            <a:r>
+              <a:rPr sz="1700" b="1">
+                <a:solidFill>
+                  <a:srgbClr val="2B4A7D"/>
+                </a:solidFill>
+                <a:latin typeface="Calibri"/>
+              </a:rPr>
+              <a:t>The mental model. </a:t>
+            </a:r>
+            <a:r>
+              <a:rPr sz="1700" b="0">
+                <a:solidFill>
+                  <a:srgbClr val="1C1C1A"/>
+                </a:solidFill>
+                <a:latin typeface="Calibri"/>
+              </a:rPr>
+              <a:t>Zero is a number somebody has to earn.</a:t>
+            </a:r>
+          </a:p>
+        </p:txBody>
+      </p:sp>
+      <p:pic>
+        <p:nvPicPr>
+          <p:cNvPr id="14" name="Picture 13" descr="fed3029ccc90a417.png"/>
+          <p:cNvPicPr>
+            <a:picLocks noChangeAspect="1"/>
+          </p:cNvPicPr>
+          <p:nvPr/>
+        </p:nvPicPr>
+        <p:blipFill>
+          <a:blip r:embed="rId2"/>
+          <a:stretch>
+            <a:fillRect/>
+          </a:stretch>
+        </p:blipFill>
+        <p:spPr>
+          <a:xfrm>
+            <a:off x="4076852" y="5786374"/>
+            <a:ext cx="4037990" cy="1097280"/>
+          </a:xfrm>
+          <a:prstGeom prst="rect">
+            <a:avLst/>
+          </a:prstGeom>
+        </p:spPr>
+      </p:pic>
+      <p:sp>
+        <p:nvSpPr>
+          <p:cNvPr id="15" name="Rectangle 14"/>
           <p:cNvSpPr/>
           <p:nvPr/>
         </p:nvSpPr>
@@ -34780,7 +35553,7 @@
       </p:sp>
       <p:sp>
         <p:nvSpPr>
-          <p:cNvPr id="12" name="TextBox 11"/>
+          <p:cNvPr id="16" name="TextBox 15"/>
           <p:cNvSpPr txBox="1"/>
           <p:nvPr/>
         </p:nvSpPr>
@@ -34795,7 +35568,7 @@
           <a:noFill/>
         </p:spPr>
         <p:txBody>
-          <a:bodyPr wrap="square" anchor="t">
+          <a:bodyPr wrap="square" anchor="t" lIns="0" rIns="0" tIns="0" bIns="0">
             <a:spAutoFit/>
           </a:bodyPr>
           <a:lstStyle/>
@@ -34814,7 +35587,7 @@
       </p:sp>
       <p:sp>
         <p:nvSpPr>
-          <p:cNvPr id="13" name="TextBox 12"/>
+          <p:cNvPr id="17" name="TextBox 16"/>
           <p:cNvSpPr txBox="1"/>
           <p:nvPr/>
         </p:nvSpPr>
@@ -34829,7 +35602,7 @@
           <a:noFill/>
         </p:spPr>
         <p:txBody>
-          <a:bodyPr wrap="square" anchor="t">
+          <a:bodyPr wrap="square" anchor="t" lIns="0" rIns="0" tIns="0" bIns="0">
             <a:spAutoFit/>
           </a:bodyPr>
           <a:lstStyle/>
@@ -34979,7 +35752,7 @@
           <a:noFill/>
         </p:spPr>
         <p:txBody>
-          <a:bodyPr wrap="square" anchor="ctr">
+          <a:bodyPr wrap="square" anchor="ctr" lIns="0" rIns="0" tIns="0" bIns="0">
             <a:spAutoFit/>
           </a:bodyPr>
           <a:lstStyle/>
@@ -35048,8 +35821,8 @@
         </p:nvSpPr>
         <p:spPr>
           <a:xfrm>
-            <a:off x="685800" y="3157728"/>
-            <a:ext cx="10820095" cy="1365504"/>
+            <a:off x="685800" y="2985008"/>
+            <a:ext cx="10820095" cy="1710944"/>
           </a:xfrm>
           <a:prstGeom prst="rect">
             <a:avLst/>
@@ -35057,7 +35830,7 @@
           <a:noFill/>
         </p:spPr>
         <p:txBody>
-          <a:bodyPr wrap="square" anchor="t">
+          <a:bodyPr wrap="square" anchor="t" lIns="0" rIns="0" tIns="0" bIns="0">
             <a:spAutoFit/>
           </a:bodyPr>
           <a:lstStyle/>
@@ -35156,7 +35929,7 @@
           <a:noFill/>
         </p:spPr>
         <p:txBody>
-          <a:bodyPr wrap="square" anchor="t">
+          <a:bodyPr wrap="square" anchor="t" lIns="0" rIns="0" tIns="0" bIns="0">
             <a:spAutoFit/>
           </a:bodyPr>
           <a:lstStyle/>
@@ -35190,7 +35963,7 @@
           <a:noFill/>
         </p:spPr>
         <p:txBody>
-          <a:bodyPr wrap="square" anchor="t">
+          <a:bodyPr wrap="square" anchor="t" lIns="0" rIns="0" tIns="0" bIns="0">
             <a:spAutoFit/>
           </a:bodyPr>
           <a:lstStyle/>
@@ -35393,7 +36166,7 @@
           <a:noFill/>
         </p:spPr>
         <p:txBody>
-          <a:bodyPr wrap="square" anchor="ctr">
+          <a:bodyPr wrap="square" anchor="ctr" lIns="0" rIns="0" tIns="0" bIns="0">
             <a:spAutoFit/>
           </a:bodyPr>
           <a:lstStyle/>
@@ -35462,8 +36235,8 @@
         </p:nvSpPr>
         <p:spPr>
           <a:xfrm>
-            <a:off x="685800" y="2357120"/>
-            <a:ext cx="10820095" cy="2966720"/>
+            <a:off x="685800" y="2184400"/>
+            <a:ext cx="10820095" cy="3312160"/>
           </a:xfrm>
           <a:prstGeom prst="rect">
             <a:avLst/>
@@ -35471,7 +36244,7 @@
           <a:noFill/>
         </p:spPr>
         <p:txBody>
-          <a:bodyPr wrap="square" anchor="t">
+          <a:bodyPr wrap="square" anchor="t" lIns="0" rIns="0" tIns="0" bIns="0">
             <a:spAutoFit/>
           </a:bodyPr>
           <a:lstStyle/>
@@ -35602,7 +36375,7 @@
           <a:noFill/>
         </p:spPr>
         <p:txBody>
-          <a:bodyPr wrap="square" anchor="t">
+          <a:bodyPr wrap="square" anchor="t" lIns="0" rIns="0" tIns="0" bIns="0">
             <a:spAutoFit/>
           </a:bodyPr>
           <a:lstStyle/>
@@ -35636,7 +36409,7 @@
           <a:noFill/>
         </p:spPr>
         <p:txBody>
-          <a:bodyPr wrap="square" anchor="t">
+          <a:bodyPr wrap="square" anchor="t" lIns="0" rIns="0" tIns="0" bIns="0">
             <a:spAutoFit/>
           </a:bodyPr>
           <a:lstStyle/>
@@ -35733,7 +36506,7 @@
           <a:noFill/>
         </p:spPr>
         <p:txBody>
-          <a:bodyPr wrap="square" anchor="ctr">
+          <a:bodyPr wrap="square" anchor="ctr" lIns="0" rIns="0" tIns="0" bIns="0">
             <a:spAutoFit/>
           </a:bodyPr>
           <a:lstStyle/>
@@ -36077,7 +36850,7 @@
           <a:noFill/>
         </p:spPr>
         <p:txBody>
-          <a:bodyPr wrap="square" anchor="t">
+          <a:bodyPr wrap="square" anchor="t" lIns="0" rIns="0" tIns="0" bIns="0">
             <a:spAutoFit/>
           </a:bodyPr>
           <a:lstStyle/>
@@ -36111,7 +36884,7 @@
           <a:noFill/>
         </p:spPr>
         <p:txBody>
-          <a:bodyPr wrap="square" anchor="t">
+          <a:bodyPr wrap="square" anchor="t" lIns="0" rIns="0" tIns="0" bIns="0">
             <a:spAutoFit/>
           </a:bodyPr>
           <a:lstStyle/>
@@ -36261,7 +37034,7 @@
           <a:noFill/>
         </p:spPr>
         <p:txBody>
-          <a:bodyPr wrap="square" anchor="ctr">
+          <a:bodyPr wrap="square" anchor="ctr" lIns="0" rIns="0" tIns="0" bIns="0">
             <a:spAutoFit/>
           </a:bodyPr>
           <a:lstStyle/>
@@ -36330,8 +37103,8 @@
         </p:nvSpPr>
         <p:spPr>
           <a:xfrm>
-            <a:off x="685800" y="2533904"/>
-            <a:ext cx="10820095" cy="1883664"/>
+            <a:off x="685800" y="2482088"/>
+            <a:ext cx="10820095" cy="1987295"/>
           </a:xfrm>
           <a:prstGeom prst="rect">
             <a:avLst/>
@@ -36374,8 +37147,8 @@
         </p:nvSpPr>
         <p:spPr>
           <a:xfrm>
-            <a:off x="685800" y="2533904"/>
-            <a:ext cx="50292" cy="1883664"/>
+            <a:off x="685800" y="2482088"/>
+            <a:ext cx="50292" cy="1987295"/>
           </a:xfrm>
           <a:prstGeom prst="rect">
             <a:avLst/>
@@ -36418,8 +37191,8 @@
         </p:nvSpPr>
         <p:spPr>
           <a:xfrm>
-            <a:off x="923544" y="2634488"/>
-            <a:ext cx="10417759" cy="1700784"/>
+            <a:off x="923544" y="2582672"/>
+            <a:ext cx="10417759" cy="1804415"/>
           </a:xfrm>
           <a:prstGeom prst="rect">
             <a:avLst/>
@@ -36427,7 +37200,7 @@
           <a:noFill/>
         </p:spPr>
         <p:txBody>
-          <a:bodyPr wrap="square" anchor="t">
+          <a:bodyPr wrap="square" anchor="t" lIns="0" rIns="0" tIns="0" bIns="0">
             <a:spAutoFit/>
           </a:bodyPr>
           <a:lstStyle/>
@@ -36537,7 +37310,7 @@
         </p:nvSpPr>
         <p:spPr>
           <a:xfrm>
-            <a:off x="685800" y="4582159"/>
+            <a:off x="685800" y="4633975"/>
             <a:ext cx="10820095" cy="564896"/>
           </a:xfrm>
           <a:prstGeom prst="rect">
@@ -36546,7 +37319,7 @@
           <a:noFill/>
         </p:spPr>
         <p:txBody>
-          <a:bodyPr wrap="square" anchor="t">
+          <a:bodyPr wrap="square" anchor="t" lIns="0" rIns="0" tIns="0" bIns="0">
             <a:spAutoFit/>
           </a:bodyPr>
           <a:lstStyle/>
@@ -36629,7 +37402,7 @@
           <a:noFill/>
         </p:spPr>
         <p:txBody>
-          <a:bodyPr wrap="square" anchor="t">
+          <a:bodyPr wrap="square" anchor="t" lIns="0" rIns="0" tIns="0" bIns="0">
             <a:spAutoFit/>
           </a:bodyPr>
           <a:lstStyle/>
@@ -36663,7 +37436,7 @@
           <a:noFill/>
         </p:spPr>
         <p:txBody>
-          <a:bodyPr wrap="square" anchor="t">
+          <a:bodyPr wrap="square" anchor="t" lIns="0" rIns="0" tIns="0" bIns="0">
             <a:spAutoFit/>
           </a:bodyPr>
           <a:lstStyle/>

--- a/content/W01/D2/slides/C2_W01_D02_half1_STUDENT.pptx
+++ b/content/W01/D2/slides/C2_W01_D02_half1_STUDENT.pptx
@@ -11768,8 +11768,8 @@
         </p:blipFill>
         <p:spPr>
           <a:xfrm>
-            <a:off x="5245449" y="1627632"/>
-            <a:ext cx="1700796" cy="3460496"/>
+            <a:off x="5193766" y="1517904"/>
+            <a:ext cx="1804163" cy="3670807"/>
           </a:xfrm>
           <a:prstGeom prst="rect">
             <a:avLst/>
@@ -11784,8 +11784,8 @@
         </p:nvSpPr>
         <p:spPr>
           <a:xfrm>
-            <a:off x="685800" y="5197856"/>
-            <a:ext cx="10820095" cy="855471"/>
+            <a:off x="685800" y="5234432"/>
+            <a:ext cx="10820095" cy="818896"/>
           </a:xfrm>
           <a:prstGeom prst="rect">
             <a:avLst/>
@@ -12758,8 +12758,8 @@
         </p:blipFill>
         <p:spPr>
           <a:xfrm>
-            <a:off x="5111595" y="1627632"/>
-            <a:ext cx="1968503" cy="2424175"/>
+            <a:off x="5026205" y="1517904"/>
+            <a:ext cx="2139283" cy="2634488"/>
           </a:xfrm>
           <a:prstGeom prst="rect">
             <a:avLst/>
@@ -12774,8 +12774,8 @@
         </p:nvSpPr>
         <p:spPr>
           <a:xfrm>
-            <a:off x="685800" y="4161536"/>
-            <a:ext cx="10820095" cy="1891792"/>
+            <a:off x="685800" y="4198112"/>
+            <a:ext cx="10820095" cy="1855216"/>
           </a:xfrm>
           <a:prstGeom prst="rect">
             <a:avLst/>
@@ -13642,8 +13642,8 @@
         </p:blipFill>
         <p:spPr>
           <a:xfrm>
-            <a:off x="685800" y="1818845"/>
-            <a:ext cx="4652640" cy="4043268"/>
+            <a:off x="3983824" y="1517904"/>
+            <a:ext cx="4224045" cy="3670807"/>
           </a:xfrm>
           <a:prstGeom prst="rect">
             <a:avLst/>
@@ -13658,8 +13658,8 @@
         </p:nvSpPr>
         <p:spPr>
           <a:xfrm>
-            <a:off x="5771244" y="3039872"/>
-            <a:ext cx="5734650" cy="1601216"/>
+            <a:off x="685800" y="5234432"/>
+            <a:ext cx="10820095" cy="818896"/>
           </a:xfrm>
           <a:prstGeom prst="rect">
             <a:avLst/>
@@ -13672,11 +13672,6 @@
           </a:bodyPr>
           <a:lstStyle/>
           <a:p>
-            <a:pPr>
-              <a:spcAft>
-                <a:spcPts val="900"/>
-              </a:spcAft>
-            </a:pPr>
             <a:r>
               <a:rPr sz="2000" b="0">
                 <a:solidFill>
@@ -19071,8 +19066,8 @@
         </p:blipFill>
         <p:spPr>
           <a:xfrm>
-            <a:off x="1210441" y="1627632"/>
-            <a:ext cx="9770812" cy="3460496"/>
+            <a:off x="913530" y="1517904"/>
+            <a:ext cx="10364634" cy="3670807"/>
           </a:xfrm>
           <a:prstGeom prst="rect">
             <a:avLst/>
@@ -19087,8 +19082,8 @@
         </p:nvSpPr>
         <p:spPr>
           <a:xfrm>
-            <a:off x="685800" y="5197856"/>
-            <a:ext cx="10820095" cy="855471"/>
+            <a:off x="685800" y="5234432"/>
+            <a:ext cx="10820095" cy="818896"/>
           </a:xfrm>
           <a:prstGeom prst="rect">
             <a:avLst/>
@@ -23496,8 +23491,8 @@
         </p:blipFill>
         <p:spPr>
           <a:xfrm>
-            <a:off x="2055438" y="1627632"/>
-            <a:ext cx="1913364" cy="4425696"/>
+            <a:off x="5216472" y="1517904"/>
+            <a:ext cx="1758749" cy="4068064"/>
           </a:xfrm>
           <a:prstGeom prst="rect">
             <a:avLst/>
@@ -23512,8 +23507,8 @@
         </p:nvSpPr>
         <p:spPr>
           <a:xfrm>
-            <a:off x="5771244" y="3212592"/>
-            <a:ext cx="5734650" cy="1255776"/>
+            <a:off x="685800" y="5631688"/>
+            <a:ext cx="10820095" cy="421640"/>
           </a:xfrm>
           <a:prstGeom prst="rect">
             <a:avLst/>
@@ -23526,13 +23521,8 @@
           </a:bodyPr>
           <a:lstStyle/>
           <a:p>
-            <a:pPr>
-              <a:spcAft>
-                <a:spcPts val="900"/>
-              </a:spcAft>
-            </a:pPr>
-            <a:r>
-              <a:rPr sz="2000" b="0">
+            <a:r>
+              <a:rPr sz="1700" b="0">
                 <a:solidFill>
                   <a:srgbClr val="1C1C1A"/>
                 </a:solidFill>
